--- a/reports/Bluestock_MF_Presentation.pptx
+++ b/reports/Bluestock_MF_Presentation.pptx
@@ -3095,7 +3095,7 @@
     <p:bg>
       <p:bgPr>
         <a:solidFill>
-          <a:srgbClr val="1565C0"/>
+          <a:srgbClr val="1B5E20"/>
         </a:solidFill>
         <a:effectLst/>
       </p:bgPr>
@@ -3109,200 +3109,23 @@
       <p:grpSpPr/>
       <p:sp>
         <p:nvSpPr>
-          <p:cNvPr id="2" name="TextBox 1"/>
-          <p:cNvSpPr txBox="1"/>
-          <p:nvPr/>
-        </p:nvSpPr>
-        <p:spPr>
-          <a:xfrm>
-            <a:off x="457200" y="548640"/>
-            <a:ext cx="8229600" cy="914400"/>
-          </a:xfrm>
-          <a:prstGeom prst="rect">
-            <a:avLst/>
-          </a:prstGeom>
-          <a:noFill/>
-        </p:spPr>
-        <p:txBody>
-          <a:bodyPr wrap="square">
-            <a:spAutoFit/>
-          </a:bodyPr>
-          <a:lstStyle/>
-          <a:p>
-            <a:pPr algn="ctr"/>
-            <a:r>
-              <a:rPr sz="4200" b="1">
-                <a:solidFill>
-                  <a:srgbClr val="FFFFFF"/>
-                </a:solidFill>
-                <a:latin typeface="Calibri"/>
-              </a:rPr>
-              <a:t>BLUESTOCK</a:t>
-            </a:r>
-          </a:p>
-        </p:txBody>
-      </p:sp>
-      <p:sp>
-        <p:nvSpPr>
-          <p:cNvPr id="3" name="TextBox 2"/>
-          <p:cNvSpPr txBox="1"/>
-          <p:nvPr/>
-        </p:nvSpPr>
-        <p:spPr>
-          <a:xfrm>
-            <a:off x="457200" y="1417320"/>
-            <a:ext cx="8229600" cy="640080"/>
-          </a:xfrm>
-          <a:prstGeom prst="rect">
-            <a:avLst/>
-          </a:prstGeom>
-          <a:noFill/>
-        </p:spPr>
-        <p:txBody>
-          <a:bodyPr wrap="square">
-            <a:spAutoFit/>
-          </a:bodyPr>
-          <a:lstStyle/>
-          <a:p>
-            <a:pPr algn="ctr"/>
-            <a:r>
-              <a:rPr sz="2400" b="0">
-                <a:solidFill>
-                  <a:srgbClr val="BBDEFB"/>
-                </a:solidFill>
-                <a:latin typeface="Calibri"/>
-              </a:rPr>
-              <a:t>Mutual Fund Analytics</a:t>
-            </a:r>
-          </a:p>
-        </p:txBody>
-      </p:sp>
-      <p:sp>
-        <p:nvSpPr>
-          <p:cNvPr id="4" name="TextBox 3"/>
-          <p:cNvSpPr txBox="1"/>
-          <p:nvPr/>
-        </p:nvSpPr>
-        <p:spPr>
-          <a:xfrm>
-            <a:off x="457200" y="2011680"/>
-            <a:ext cx="8229600" cy="457200"/>
-          </a:xfrm>
-          <a:prstGeom prst="rect">
-            <a:avLst/>
-          </a:prstGeom>
-          <a:noFill/>
-        </p:spPr>
-        <p:txBody>
-          <a:bodyPr wrap="square">
-            <a:spAutoFit/>
-          </a:bodyPr>
-          <a:lstStyle/>
-          <a:p>
-            <a:pPr algn="ctr"/>
-            <a:r>
-              <a:rPr sz="1600" b="0">
-                <a:solidFill>
-                  <a:srgbClr val="90CAF9"/>
-                </a:solidFill>
-                <a:latin typeface="Calibri"/>
-              </a:rPr>
-              <a:t>Capstone Project Presentation</a:t>
-            </a:r>
-          </a:p>
-        </p:txBody>
-      </p:sp>
-      <p:sp>
-        <p:nvSpPr>
-          <p:cNvPr id="5" name="TextBox 4"/>
-          <p:cNvSpPr txBox="1"/>
-          <p:nvPr/>
-        </p:nvSpPr>
-        <p:spPr>
-          <a:xfrm>
-            <a:off x="457200" y="2834640"/>
-            <a:ext cx="8229600" cy="411480"/>
-          </a:xfrm>
-          <a:prstGeom prst="rect">
-            <a:avLst/>
-          </a:prstGeom>
-          <a:noFill/>
-        </p:spPr>
-        <p:txBody>
-          <a:bodyPr wrap="square">
-            <a:spAutoFit/>
-          </a:bodyPr>
-          <a:lstStyle/>
-          <a:p>
-            <a:pPr algn="ctr"/>
-            <a:r>
-              <a:rPr sz="1300" b="0">
-                <a:solidFill>
-                  <a:srgbClr val="E3F2FD"/>
-                </a:solidFill>
-                <a:latin typeface="Calibri"/>
-              </a:rPr>
-              <a:t>40 Fund Schemes  ·  2022–2025  ·  ₹81 Lakh Crore Industry AUM</a:t>
-            </a:r>
-          </a:p>
-        </p:txBody>
-      </p:sp>
-      <p:sp>
-        <p:nvSpPr>
-          <p:cNvPr id="6" name="TextBox 5"/>
-          <p:cNvSpPr txBox="1"/>
-          <p:nvPr/>
-        </p:nvSpPr>
-        <p:spPr>
-          <a:xfrm>
-            <a:off x="457200" y="3337560"/>
-            <a:ext cx="8229600" cy="365760"/>
-          </a:xfrm>
-          <a:prstGeom prst="rect">
-            <a:avLst/>
-          </a:prstGeom>
-          <a:noFill/>
-        </p:spPr>
-        <p:txBody>
-          <a:bodyPr wrap="square">
-            <a:spAutoFit/>
-          </a:bodyPr>
-          <a:lstStyle/>
-          <a:p>
-            <a:pPr algn="ctr"/>
-            <a:r>
-              <a:rPr sz="1100" b="0">
-                <a:solidFill>
-                  <a:srgbClr val="90CAF9"/>
-                </a:solidFill>
-                <a:latin typeface="Calibri"/>
-              </a:rPr>
-              <a:t>Bluestock Fintech Internship  ·  June 2026</a:t>
-            </a:r>
-          </a:p>
-        </p:txBody>
-      </p:sp>
-      <p:sp>
-        <p:nvSpPr>
-          <p:cNvPr id="7" name="Rectangle 6"/>
+          <p:cNvPr id="2" name="Rectangle 1"/>
           <p:cNvSpPr/>
           <p:nvPr/>
         </p:nvSpPr>
         <p:spPr>
           <a:xfrm>
-            <a:off x="457200" y="3840480"/>
-            <a:ext cx="1920240" cy="914400"/>
+            <a:off x="0" y="0"/>
+            <a:ext cx="9144000" cy="164592"/>
           </a:xfrm>
           <a:prstGeom prst="rect">
             <a:avLst/>
           </a:prstGeom>
           <a:solidFill>
-            <a:srgbClr val="1976D2"/>
+            <a:srgbClr val="E65100"/>
           </a:solidFill>
           <a:ln>
-            <a:solidFill>
-              <a:srgbClr val="90CAF9"/>
-            </a:solidFill>
+            <a:noFill/>
           </a:ln>
         </p:spPr>
         <p:style>
@@ -3329,95 +3152,23 @@
       </p:sp>
       <p:sp>
         <p:nvSpPr>
-          <p:cNvPr id="8" name="TextBox 7"/>
-          <p:cNvSpPr txBox="1"/>
-          <p:nvPr/>
-        </p:nvSpPr>
-        <p:spPr>
-          <a:xfrm>
-            <a:off x="502920" y="3858768"/>
-            <a:ext cx="1828800" cy="411480"/>
-          </a:xfrm>
-          <a:prstGeom prst="rect">
-            <a:avLst/>
-          </a:prstGeom>
-          <a:noFill/>
-        </p:spPr>
-        <p:txBody>
-          <a:bodyPr wrap="square">
-            <a:spAutoFit/>
-          </a:bodyPr>
-          <a:lstStyle/>
-          <a:p>
-            <a:pPr algn="ctr"/>
-            <a:r>
-              <a:rPr sz="1800" b="1">
-                <a:solidFill>
-                  <a:srgbClr val="FFFFFF"/>
-                </a:solidFill>
-                <a:latin typeface="Calibri"/>
-              </a:rPr>
-              <a:t>₹81L Cr</a:t>
-            </a:r>
-          </a:p>
-        </p:txBody>
-      </p:sp>
-      <p:sp>
-        <p:nvSpPr>
-          <p:cNvPr id="9" name="TextBox 8"/>
-          <p:cNvSpPr txBox="1"/>
-          <p:nvPr/>
-        </p:nvSpPr>
-        <p:spPr>
-          <a:xfrm>
-            <a:off x="502920" y="4270248"/>
-            <a:ext cx="1828800" cy="274320"/>
-          </a:xfrm>
-          <a:prstGeom prst="rect">
-            <a:avLst/>
-          </a:prstGeom>
-          <a:noFill/>
-        </p:spPr>
-        <p:txBody>
-          <a:bodyPr wrap="square">
-            <a:spAutoFit/>
-          </a:bodyPr>
-          <a:lstStyle/>
-          <a:p>
-            <a:pPr algn="ctr"/>
-            <a:r>
-              <a:rPr sz="1000" b="0">
-                <a:solidFill>
-                  <a:srgbClr val="BBDEFB"/>
-                </a:solidFill>
-                <a:latin typeface="Calibri"/>
-              </a:rPr>
-              <a:t>Total AUM</a:t>
-            </a:r>
-          </a:p>
-        </p:txBody>
-      </p:sp>
-      <p:sp>
-        <p:nvSpPr>
-          <p:cNvPr id="10" name="Rectangle 9"/>
+          <p:cNvPr id="3" name="Rectangle 2"/>
           <p:cNvSpPr/>
           <p:nvPr/>
         </p:nvSpPr>
         <p:spPr>
           <a:xfrm>
-            <a:off x="2606040" y="3840480"/>
-            <a:ext cx="1920240" cy="914400"/>
+            <a:off x="0" y="4974336"/>
+            <a:ext cx="9144000" cy="173736"/>
           </a:xfrm>
           <a:prstGeom prst="rect">
             <a:avLst/>
           </a:prstGeom>
           <a:solidFill>
-            <a:srgbClr val="1976D2"/>
+            <a:srgbClr val="E65100"/>
           </a:solidFill>
           <a:ln>
-            <a:solidFill>
-              <a:srgbClr val="90CAF9"/>
-            </a:solidFill>
+            <a:noFill/>
           </a:ln>
         </p:spPr>
         <p:style>
@@ -3444,95 +3195,128 @@
       </p:sp>
       <p:sp>
         <p:nvSpPr>
-          <p:cNvPr id="11" name="TextBox 10"/>
-          <p:cNvSpPr txBox="1"/>
-          <p:nvPr/>
-        </p:nvSpPr>
-        <p:spPr>
-          <a:xfrm>
-            <a:off x="2651760" y="3858768"/>
-            <a:ext cx="1828800" cy="411480"/>
-          </a:xfrm>
-          <a:prstGeom prst="rect">
-            <a:avLst/>
-          </a:prstGeom>
-          <a:noFill/>
-        </p:spPr>
-        <p:txBody>
-          <a:bodyPr wrap="square">
-            <a:spAutoFit/>
-          </a:bodyPr>
-          <a:lstStyle/>
-          <a:p>
-            <a:pPr algn="ctr"/>
-            <a:r>
-              <a:rPr sz="1800" b="1">
+          <p:cNvPr id="4" name="TextBox 3"/>
+          <p:cNvSpPr txBox="1"/>
+          <p:nvPr/>
+        </p:nvSpPr>
+        <p:spPr>
+          <a:xfrm>
+            <a:off x="457200" y="411480"/>
+            <a:ext cx="8229600" cy="822960"/>
+          </a:xfrm>
+          <a:prstGeom prst="rect">
+            <a:avLst/>
+          </a:prstGeom>
+          <a:noFill/>
+        </p:spPr>
+        <p:txBody>
+          <a:bodyPr wrap="square">
+            <a:spAutoFit/>
+          </a:bodyPr>
+          <a:lstStyle/>
+          <a:p>
+            <a:pPr algn="ctr"/>
+            <a:r>
+              <a:rPr sz="4000" b="1">
                 <a:solidFill>
                   <a:srgbClr val="FFFFFF"/>
                 </a:solidFill>
                 <a:latin typeface="Calibri"/>
               </a:rPr>
-              <a:t>₹31K Cr</a:t>
-            </a:r>
-          </a:p>
-        </p:txBody>
-      </p:sp>
-      <p:sp>
-        <p:nvSpPr>
-          <p:cNvPr id="12" name="TextBox 11"/>
-          <p:cNvSpPr txBox="1"/>
-          <p:nvPr/>
-        </p:nvSpPr>
-        <p:spPr>
-          <a:xfrm>
-            <a:off x="2651760" y="4270248"/>
-            <a:ext cx="1828800" cy="274320"/>
-          </a:xfrm>
-          <a:prstGeom prst="rect">
-            <a:avLst/>
-          </a:prstGeom>
-          <a:noFill/>
-        </p:spPr>
-        <p:txBody>
-          <a:bodyPr wrap="square">
-            <a:spAutoFit/>
-          </a:bodyPr>
-          <a:lstStyle/>
-          <a:p>
-            <a:pPr algn="ctr"/>
-            <a:r>
-              <a:rPr sz="1000" b="0">
-                <a:solidFill>
-                  <a:srgbClr val="BBDEFB"/>
-                </a:solidFill>
-                <a:latin typeface="Calibri"/>
-              </a:rPr>
-              <a:t>Peak SIP</a:t>
-            </a:r>
-          </a:p>
-        </p:txBody>
-      </p:sp>
-      <p:sp>
-        <p:nvSpPr>
-          <p:cNvPr id="13" name="Rectangle 12"/>
+              <a:t>BLUESTOCK</a:t>
+            </a:r>
+          </a:p>
+        </p:txBody>
+      </p:sp>
+      <p:sp>
+        <p:nvSpPr>
+          <p:cNvPr id="5" name="TextBox 4"/>
+          <p:cNvSpPr txBox="1"/>
+          <p:nvPr/>
+        </p:nvSpPr>
+        <p:spPr>
+          <a:xfrm>
+            <a:off x="457200" y="1280160"/>
+            <a:ext cx="8229600" cy="594360"/>
+          </a:xfrm>
+          <a:prstGeom prst="rect">
+            <a:avLst/>
+          </a:prstGeom>
+          <a:noFill/>
+        </p:spPr>
+        <p:txBody>
+          <a:bodyPr wrap="square">
+            <a:spAutoFit/>
+          </a:bodyPr>
+          <a:lstStyle/>
+          <a:p>
+            <a:pPr algn="ctr"/>
+            <a:r>
+              <a:rPr sz="2200" b="0">
+                <a:solidFill>
+                  <a:srgbClr val="A5D6A7"/>
+                </a:solidFill>
+                <a:latin typeface="Calibri"/>
+              </a:rPr>
+              <a:t>Mutual Fund Analytics</a:t>
+            </a:r>
+          </a:p>
+        </p:txBody>
+      </p:sp>
+      <p:sp>
+        <p:nvSpPr>
+          <p:cNvPr id="6" name="TextBox 5"/>
+          <p:cNvSpPr txBox="1"/>
+          <p:nvPr/>
+        </p:nvSpPr>
+        <p:spPr>
+          <a:xfrm>
+            <a:off x="457200" y="1901952"/>
+            <a:ext cx="8229600" cy="411480"/>
+          </a:xfrm>
+          <a:prstGeom prst="rect">
+            <a:avLst/>
+          </a:prstGeom>
+          <a:noFill/>
+        </p:spPr>
+        <p:txBody>
+          <a:bodyPr wrap="square">
+            <a:spAutoFit/>
+          </a:bodyPr>
+          <a:lstStyle/>
+          <a:p>
+            <a:pPr algn="ctr"/>
+            <a:r>
+              <a:rPr sz="1500" b="0">
+                <a:solidFill>
+                  <a:srgbClr val="C8E6C9"/>
+                </a:solidFill>
+                <a:latin typeface="Calibri"/>
+              </a:rPr>
+              <a:t>Capstone Project Presentation</a:t>
+            </a:r>
+          </a:p>
+        </p:txBody>
+      </p:sp>
+      <p:sp>
+        <p:nvSpPr>
+          <p:cNvPr id="7" name="Rectangle 6"/>
           <p:cNvSpPr/>
           <p:nvPr/>
         </p:nvSpPr>
         <p:spPr>
           <a:xfrm>
-            <a:off x="4754880" y="3840480"/>
-            <a:ext cx="1920240" cy="914400"/>
+            <a:off x="2560320" y="2423160"/>
+            <a:ext cx="4023360" cy="54864"/>
           </a:xfrm>
           <a:prstGeom prst="rect">
             <a:avLst/>
           </a:prstGeom>
           <a:solidFill>
-            <a:srgbClr val="1976D2"/>
+            <a:srgbClr val="FF6D00"/>
           </a:solidFill>
           <a:ln>
-            <a:solidFill>
-              <a:srgbClr val="90CAF9"/>
-            </a:solidFill>
+            <a:noFill/>
           </a:ln>
         </p:spPr>
         <p:style>
@@ -3559,95 +3343,93 @@
       </p:sp>
       <p:sp>
         <p:nvSpPr>
-          <p:cNvPr id="14" name="TextBox 13"/>
-          <p:cNvSpPr txBox="1"/>
-          <p:nvPr/>
-        </p:nvSpPr>
-        <p:spPr>
-          <a:xfrm>
-            <a:off x="4800600" y="3858768"/>
-            <a:ext cx="1828800" cy="411480"/>
-          </a:xfrm>
-          <a:prstGeom prst="rect">
-            <a:avLst/>
-          </a:prstGeom>
-          <a:noFill/>
-        </p:spPr>
-        <p:txBody>
-          <a:bodyPr wrap="square">
-            <a:spAutoFit/>
-          </a:bodyPr>
-          <a:lstStyle/>
-          <a:p>
-            <a:pPr algn="ctr"/>
-            <a:r>
-              <a:rPr sz="1800" b="1">
-                <a:solidFill>
-                  <a:srgbClr val="FFFFFF"/>
-                </a:solidFill>
-                <a:latin typeface="Calibri"/>
-              </a:rPr>
-              <a:t>26.12 Cr</a:t>
-            </a:r>
-          </a:p>
-        </p:txBody>
-      </p:sp>
-      <p:sp>
-        <p:nvSpPr>
-          <p:cNvPr id="15" name="TextBox 14"/>
-          <p:cNvSpPr txBox="1"/>
-          <p:nvPr/>
-        </p:nvSpPr>
-        <p:spPr>
-          <a:xfrm>
-            <a:off x="4800600" y="4270248"/>
-            <a:ext cx="1828800" cy="274320"/>
-          </a:xfrm>
-          <a:prstGeom prst="rect">
-            <a:avLst/>
-          </a:prstGeom>
-          <a:noFill/>
-        </p:spPr>
-        <p:txBody>
-          <a:bodyPr wrap="square">
-            <a:spAutoFit/>
-          </a:bodyPr>
-          <a:lstStyle/>
-          <a:p>
-            <a:pPr algn="ctr"/>
-            <a:r>
-              <a:rPr sz="1000" b="0">
-                <a:solidFill>
-                  <a:srgbClr val="BBDEFB"/>
-                </a:solidFill>
-                <a:latin typeface="Calibri"/>
-              </a:rPr>
-              <a:t>Folios</a:t>
-            </a:r>
-          </a:p>
-        </p:txBody>
-      </p:sp>
-      <p:sp>
-        <p:nvSpPr>
-          <p:cNvPr id="16" name="Rectangle 15"/>
+          <p:cNvPr id="8" name="TextBox 7"/>
+          <p:cNvSpPr txBox="1"/>
+          <p:nvPr/>
+        </p:nvSpPr>
+        <p:spPr>
+          <a:xfrm>
+            <a:off x="457200" y="2578608"/>
+            <a:ext cx="8229600" cy="365760"/>
+          </a:xfrm>
+          <a:prstGeom prst="rect">
+            <a:avLst/>
+          </a:prstGeom>
+          <a:noFill/>
+        </p:spPr>
+        <p:txBody>
+          <a:bodyPr wrap="square">
+            <a:spAutoFit/>
+          </a:bodyPr>
+          <a:lstStyle/>
+          <a:p>
+            <a:pPr algn="ctr"/>
+            <a:r>
+              <a:rPr sz="1200" b="0">
+                <a:solidFill>
+                  <a:srgbClr val="E8F5E9"/>
+                </a:solidFill>
+                <a:latin typeface="Calibri"/>
+              </a:rPr>
+              <a:t>40 Fund Schemes  ·  Jan 2022 – Dec 2025  ·  ₹81 Lakh Crore Industry AUM</a:t>
+            </a:r>
+          </a:p>
+        </p:txBody>
+      </p:sp>
+      <p:sp>
+        <p:nvSpPr>
+          <p:cNvPr id="9" name="TextBox 8"/>
+          <p:cNvSpPr txBox="1"/>
+          <p:nvPr/>
+        </p:nvSpPr>
+        <p:spPr>
+          <a:xfrm>
+            <a:off x="457200" y="3035808"/>
+            <a:ext cx="8229600" cy="347472"/>
+          </a:xfrm>
+          <a:prstGeom prst="rect">
+            <a:avLst/>
+          </a:prstGeom>
+          <a:noFill/>
+        </p:spPr>
+        <p:txBody>
+          <a:bodyPr wrap="square">
+            <a:spAutoFit/>
+          </a:bodyPr>
+          <a:lstStyle/>
+          <a:p>
+            <a:pPr algn="ctr"/>
+            <a:r>
+              <a:rPr sz="1100" b="0">
+                <a:solidFill>
+                  <a:srgbClr val="A5D6A7"/>
+                </a:solidFill>
+                <a:latin typeface="Calibri"/>
+              </a:rPr>
+              <a:t>Bluestock Fintech Internship  ·  June 2026</a:t>
+            </a:r>
+          </a:p>
+        </p:txBody>
+      </p:sp>
+      <p:sp>
+        <p:nvSpPr>
+          <p:cNvPr id="10" name="Rectangle 9"/>
           <p:cNvSpPr/>
           <p:nvPr/>
         </p:nvSpPr>
         <p:spPr>
           <a:xfrm>
-            <a:off x="6903720" y="3840480"/>
-            <a:ext cx="1920240" cy="914400"/>
+            <a:off x="457200" y="3822191"/>
+            <a:ext cx="1965960" cy="932688"/>
           </a:xfrm>
           <a:prstGeom prst="rect">
             <a:avLst/>
           </a:prstGeom>
           <a:solidFill>
-            <a:srgbClr val="1976D2"/>
+            <a:srgbClr val="2E7D32"/>
           </a:solidFill>
           <a:ln>
-            <a:solidFill>
-              <a:srgbClr val="90CAF9"/>
-            </a:solidFill>
+            <a:noFill/>
           </a:ln>
         </p:spPr>
         <p:style>
@@ -3674,34 +3456,373 @@
       </p:sp>
       <p:sp>
         <p:nvSpPr>
+          <p:cNvPr id="11" name="TextBox 10"/>
+          <p:cNvSpPr txBox="1"/>
+          <p:nvPr/>
+        </p:nvSpPr>
+        <p:spPr>
+          <a:xfrm>
+            <a:off x="457200" y="3840480"/>
+            <a:ext cx="1965960" cy="502920"/>
+          </a:xfrm>
+          <a:prstGeom prst="rect">
+            <a:avLst/>
+          </a:prstGeom>
+          <a:noFill/>
+        </p:spPr>
+        <p:txBody>
+          <a:bodyPr wrap="square">
+            <a:spAutoFit/>
+          </a:bodyPr>
+          <a:lstStyle/>
+          <a:p>
+            <a:pPr algn="ctr"/>
+            <a:r>
+              <a:rPr sz="1700" b="1">
+                <a:solidFill>
+                  <a:srgbClr val="FFFFFF"/>
+                </a:solidFill>
+                <a:latin typeface="Calibri"/>
+              </a:rPr>
+              <a:t>₹81L Cr</a:t>
+            </a:r>
+          </a:p>
+        </p:txBody>
+      </p:sp>
+      <p:sp>
+        <p:nvSpPr>
+          <p:cNvPr id="12" name="TextBox 11"/>
+          <p:cNvSpPr txBox="1"/>
+          <p:nvPr/>
+        </p:nvSpPr>
+        <p:spPr>
+          <a:xfrm>
+            <a:off x="457200" y="4315968"/>
+            <a:ext cx="1965960" cy="320040"/>
+          </a:xfrm>
+          <a:prstGeom prst="rect">
+            <a:avLst/>
+          </a:prstGeom>
+          <a:noFill/>
+        </p:spPr>
+        <p:txBody>
+          <a:bodyPr wrap="square">
+            <a:spAutoFit/>
+          </a:bodyPr>
+          <a:lstStyle/>
+          <a:p>
+            <a:pPr algn="ctr"/>
+            <a:r>
+              <a:rPr sz="1000" b="0">
+                <a:solidFill>
+                  <a:srgbClr val="E8F5E9"/>
+                </a:solidFill>
+                <a:latin typeface="Calibri"/>
+              </a:rPr>
+              <a:t>Total AUM</a:t>
+            </a:r>
+          </a:p>
+        </p:txBody>
+      </p:sp>
+      <p:sp>
+        <p:nvSpPr>
+          <p:cNvPr id="13" name="Rectangle 12"/>
+          <p:cNvSpPr/>
+          <p:nvPr/>
+        </p:nvSpPr>
+        <p:spPr>
+          <a:xfrm>
+            <a:off x="2633472" y="3822191"/>
+            <a:ext cx="1965960" cy="932688"/>
+          </a:xfrm>
+          <a:prstGeom prst="rect">
+            <a:avLst/>
+          </a:prstGeom>
+          <a:solidFill>
+            <a:srgbClr val="E65100"/>
+          </a:solidFill>
+          <a:ln>
+            <a:noFill/>
+          </a:ln>
+        </p:spPr>
+        <p:style>
+          <a:lnRef idx="1">
+            <a:schemeClr val="accent1"/>
+          </a:lnRef>
+          <a:fillRef idx="3">
+            <a:schemeClr val="accent1"/>
+          </a:fillRef>
+          <a:effectRef idx="2">
+            <a:schemeClr val="accent1"/>
+          </a:effectRef>
+          <a:fontRef idx="minor">
+            <a:schemeClr val="lt1"/>
+          </a:fontRef>
+        </p:style>
+        <p:txBody>
+          <a:bodyPr rtlCol="0" anchor="ctr"/>
+          <a:lstStyle/>
+          <a:p>
+            <a:pPr algn="ctr"/>
+          </a:p>
+        </p:txBody>
+      </p:sp>
+      <p:sp>
+        <p:nvSpPr>
+          <p:cNvPr id="14" name="TextBox 13"/>
+          <p:cNvSpPr txBox="1"/>
+          <p:nvPr/>
+        </p:nvSpPr>
+        <p:spPr>
+          <a:xfrm>
+            <a:off x="2633472" y="3840480"/>
+            <a:ext cx="1965960" cy="502920"/>
+          </a:xfrm>
+          <a:prstGeom prst="rect">
+            <a:avLst/>
+          </a:prstGeom>
+          <a:noFill/>
+        </p:spPr>
+        <p:txBody>
+          <a:bodyPr wrap="square">
+            <a:spAutoFit/>
+          </a:bodyPr>
+          <a:lstStyle/>
+          <a:p>
+            <a:pPr algn="ctr"/>
+            <a:r>
+              <a:rPr sz="1700" b="1">
+                <a:solidFill>
+                  <a:srgbClr val="FFFFFF"/>
+                </a:solidFill>
+                <a:latin typeface="Calibri"/>
+              </a:rPr>
+              <a:t>₹31K Cr</a:t>
+            </a:r>
+          </a:p>
+        </p:txBody>
+      </p:sp>
+      <p:sp>
+        <p:nvSpPr>
+          <p:cNvPr id="15" name="TextBox 14"/>
+          <p:cNvSpPr txBox="1"/>
+          <p:nvPr/>
+        </p:nvSpPr>
+        <p:spPr>
+          <a:xfrm>
+            <a:off x="2633472" y="4315968"/>
+            <a:ext cx="1965960" cy="320040"/>
+          </a:xfrm>
+          <a:prstGeom prst="rect">
+            <a:avLst/>
+          </a:prstGeom>
+          <a:noFill/>
+        </p:spPr>
+        <p:txBody>
+          <a:bodyPr wrap="square">
+            <a:spAutoFit/>
+          </a:bodyPr>
+          <a:lstStyle/>
+          <a:p>
+            <a:pPr algn="ctr"/>
+            <a:r>
+              <a:rPr sz="1000" b="0">
+                <a:solidFill>
+                  <a:srgbClr val="E8F5E9"/>
+                </a:solidFill>
+                <a:latin typeface="Calibri"/>
+              </a:rPr>
+              <a:t>Peak SIP</a:t>
+            </a:r>
+          </a:p>
+        </p:txBody>
+      </p:sp>
+      <p:sp>
+        <p:nvSpPr>
+          <p:cNvPr id="16" name="Rectangle 15"/>
+          <p:cNvSpPr/>
+          <p:nvPr/>
+        </p:nvSpPr>
+        <p:spPr>
+          <a:xfrm>
+            <a:off x="4809744" y="3822191"/>
+            <a:ext cx="1965960" cy="932688"/>
+          </a:xfrm>
+          <a:prstGeom prst="rect">
+            <a:avLst/>
+          </a:prstGeom>
+          <a:solidFill>
+            <a:srgbClr val="2E7D32"/>
+          </a:solidFill>
+          <a:ln>
+            <a:noFill/>
+          </a:ln>
+        </p:spPr>
+        <p:style>
+          <a:lnRef idx="1">
+            <a:schemeClr val="accent1"/>
+          </a:lnRef>
+          <a:fillRef idx="3">
+            <a:schemeClr val="accent1"/>
+          </a:fillRef>
+          <a:effectRef idx="2">
+            <a:schemeClr val="accent1"/>
+          </a:effectRef>
+          <a:fontRef idx="minor">
+            <a:schemeClr val="lt1"/>
+          </a:fontRef>
+        </p:style>
+        <p:txBody>
+          <a:bodyPr rtlCol="0" anchor="ctr"/>
+          <a:lstStyle/>
+          <a:p>
+            <a:pPr algn="ctr"/>
+          </a:p>
+        </p:txBody>
+      </p:sp>
+      <p:sp>
+        <p:nvSpPr>
           <p:cNvPr id="17" name="TextBox 16"/>
           <p:cNvSpPr txBox="1"/>
           <p:nvPr/>
         </p:nvSpPr>
         <p:spPr>
           <a:xfrm>
-            <a:off x="6949440" y="3858768"/>
-            <a:ext cx="1828800" cy="411480"/>
-          </a:xfrm>
-          <a:prstGeom prst="rect">
-            <a:avLst/>
-          </a:prstGeom>
-          <a:noFill/>
-        </p:spPr>
-        <p:txBody>
-          <a:bodyPr wrap="square">
-            <a:spAutoFit/>
-          </a:bodyPr>
-          <a:lstStyle/>
-          <a:p>
-            <a:pPr algn="ctr"/>
-            <a:r>
-              <a:rPr sz="1800" b="1">
+            <a:off x="4809744" y="3840480"/>
+            <a:ext cx="1965960" cy="502920"/>
+          </a:xfrm>
+          <a:prstGeom prst="rect">
+            <a:avLst/>
+          </a:prstGeom>
+          <a:noFill/>
+        </p:spPr>
+        <p:txBody>
+          <a:bodyPr wrap="square">
+            <a:spAutoFit/>
+          </a:bodyPr>
+          <a:lstStyle/>
+          <a:p>
+            <a:pPr algn="ctr"/>
+            <a:r>
+              <a:rPr sz="1700" b="1">
                 <a:solidFill>
                   <a:srgbClr val="FFFFFF"/>
                 </a:solidFill>
                 <a:latin typeface="Calibri"/>
               </a:rPr>
+              <a:t>26.12 Cr</a:t>
+            </a:r>
+          </a:p>
+        </p:txBody>
+      </p:sp>
+      <p:sp>
+        <p:nvSpPr>
+          <p:cNvPr id="18" name="TextBox 17"/>
+          <p:cNvSpPr txBox="1"/>
+          <p:nvPr/>
+        </p:nvSpPr>
+        <p:spPr>
+          <a:xfrm>
+            <a:off x="4809744" y="4315968"/>
+            <a:ext cx="1965960" cy="320040"/>
+          </a:xfrm>
+          <a:prstGeom prst="rect">
+            <a:avLst/>
+          </a:prstGeom>
+          <a:noFill/>
+        </p:spPr>
+        <p:txBody>
+          <a:bodyPr wrap="square">
+            <a:spAutoFit/>
+          </a:bodyPr>
+          <a:lstStyle/>
+          <a:p>
+            <a:pPr algn="ctr"/>
+            <a:r>
+              <a:rPr sz="1000" b="0">
+                <a:solidFill>
+                  <a:srgbClr val="E8F5E9"/>
+                </a:solidFill>
+                <a:latin typeface="Calibri"/>
+              </a:rPr>
+              <a:t>Folios</a:t>
+            </a:r>
+          </a:p>
+        </p:txBody>
+      </p:sp>
+      <p:sp>
+        <p:nvSpPr>
+          <p:cNvPr id="19" name="Rectangle 18"/>
+          <p:cNvSpPr/>
+          <p:nvPr/>
+        </p:nvSpPr>
+        <p:spPr>
+          <a:xfrm>
+            <a:off x="6986016" y="3822191"/>
+            <a:ext cx="1965960" cy="932688"/>
+          </a:xfrm>
+          <a:prstGeom prst="rect">
+            <a:avLst/>
+          </a:prstGeom>
+          <a:solidFill>
+            <a:srgbClr val="E65100"/>
+          </a:solidFill>
+          <a:ln>
+            <a:noFill/>
+          </a:ln>
+        </p:spPr>
+        <p:style>
+          <a:lnRef idx="1">
+            <a:schemeClr val="accent1"/>
+          </a:lnRef>
+          <a:fillRef idx="3">
+            <a:schemeClr val="accent1"/>
+          </a:fillRef>
+          <a:effectRef idx="2">
+            <a:schemeClr val="accent1"/>
+          </a:effectRef>
+          <a:fontRef idx="minor">
+            <a:schemeClr val="lt1"/>
+          </a:fontRef>
+        </p:style>
+        <p:txBody>
+          <a:bodyPr rtlCol="0" anchor="ctr"/>
+          <a:lstStyle/>
+          <a:p>
+            <a:pPr algn="ctr"/>
+          </a:p>
+        </p:txBody>
+      </p:sp>
+      <p:sp>
+        <p:nvSpPr>
+          <p:cNvPr id="20" name="TextBox 19"/>
+          <p:cNvSpPr txBox="1"/>
+          <p:nvPr/>
+        </p:nvSpPr>
+        <p:spPr>
+          <a:xfrm>
+            <a:off x="6986016" y="3840480"/>
+            <a:ext cx="1965960" cy="502920"/>
+          </a:xfrm>
+          <a:prstGeom prst="rect">
+            <a:avLst/>
+          </a:prstGeom>
+          <a:noFill/>
+        </p:spPr>
+        <p:txBody>
+          <a:bodyPr wrap="square">
+            <a:spAutoFit/>
+          </a:bodyPr>
+          <a:lstStyle/>
+          <a:p>
+            <a:pPr algn="ctr"/>
+            <a:r>
+              <a:rPr sz="1700" b="1">
+                <a:solidFill>
+                  <a:srgbClr val="FFFFFF"/>
+                </a:solidFill>
+                <a:latin typeface="Calibri"/>
+              </a:rPr>
               <a:t>17% YoY</a:t>
             </a:r>
           </a:p>
@@ -3709,14 +3830,14 @@
       </p:sp>
       <p:sp>
         <p:nvSpPr>
-          <p:cNvPr id="18" name="TextBox 17"/>
-          <p:cNvSpPr txBox="1"/>
-          <p:nvPr/>
-        </p:nvSpPr>
-        <p:spPr>
-          <a:xfrm>
-            <a:off x="6949440" y="4270248"/>
-            <a:ext cx="1828800" cy="274320"/>
+          <p:cNvPr id="21" name="TextBox 20"/>
+          <p:cNvSpPr txBox="1"/>
+          <p:nvPr/>
+        </p:nvSpPr>
+        <p:spPr>
+          <a:xfrm>
+            <a:off x="6986016" y="4315968"/>
+            <a:ext cx="1965960" cy="320040"/>
           </a:xfrm>
           <a:prstGeom prst="rect">
             <a:avLst/>
@@ -3733,7 +3854,7 @@
             <a:r>
               <a:rPr sz="1000" b="0">
                 <a:solidFill>
-                  <a:srgbClr val="BBDEFB"/>
+                  <a:srgbClr val="E8F5E9"/>
                 </a:solidFill>
                 <a:latin typeface="Calibri"/>
               </a:rPr>
@@ -3777,13 +3898,13 @@
         <p:spPr>
           <a:xfrm>
             <a:off x="0" y="0"/>
-            <a:ext cx="9144000" cy="1005840"/>
+            <a:ext cx="9144000" cy="960120"/>
           </a:xfrm>
           <a:prstGeom prst="rect">
             <a:avLst/>
           </a:prstGeom>
           <a:solidFill>
-            <a:srgbClr val="1565C0"/>
+            <a:srgbClr val="2E7D32"/>
           </a:solidFill>
           <a:ln>
             <a:noFill/>
@@ -3813,90 +3934,20 @@
       </p:sp>
       <p:sp>
         <p:nvSpPr>
-          <p:cNvPr id="3" name="TextBox 2"/>
-          <p:cNvSpPr txBox="1"/>
-          <p:nvPr/>
-        </p:nvSpPr>
-        <p:spPr>
-          <a:xfrm>
-            <a:off x="182880" y="45720"/>
-            <a:ext cx="8229600" cy="594360"/>
-          </a:xfrm>
-          <a:prstGeom prst="rect">
-            <a:avLst/>
-          </a:prstGeom>
-          <a:noFill/>
-        </p:spPr>
-        <p:txBody>
-          <a:bodyPr wrap="square">
-            <a:spAutoFit/>
-          </a:bodyPr>
-          <a:lstStyle/>
-          <a:p>
-            <a:pPr algn="l"/>
-            <a:r>
-              <a:rPr sz="2400" b="1">
-                <a:solidFill>
-                  <a:srgbClr val="FFFFFF"/>
-                </a:solidFill>
-                <a:latin typeface="Calibri"/>
-              </a:rPr>
-              <a:t>Dashboard — Investor Analytics &amp; SIP Trends</a:t>
-            </a:r>
-          </a:p>
-        </p:txBody>
-      </p:sp>
-      <p:sp>
-        <p:nvSpPr>
-          <p:cNvPr id="4" name="TextBox 3"/>
-          <p:cNvSpPr txBox="1"/>
-          <p:nvPr/>
-        </p:nvSpPr>
-        <p:spPr>
-          <a:xfrm>
-            <a:off x="182880" y="658368"/>
-            <a:ext cx="8229600" cy="320040"/>
-          </a:xfrm>
-          <a:prstGeom prst="rect">
-            <a:avLst/>
-          </a:prstGeom>
-          <a:noFill/>
-        </p:spPr>
-        <p:txBody>
-          <a:bodyPr wrap="square">
-            <a:spAutoFit/>
-          </a:bodyPr>
-          <a:lstStyle/>
-          <a:p>
-            <a:pPr algn="l"/>
-            <a:r>
-              <a:rPr sz="1200" b="0">
-                <a:solidFill>
-                  <a:srgbClr val="BBDEFB"/>
-                </a:solidFill>
-                <a:latin typeface="Calibri"/>
-              </a:rPr>
-              <a:t>Power BI · Page 3 and Page 4</a:t>
-            </a:r>
-          </a:p>
-        </p:txBody>
-      </p:sp>
-      <p:sp>
-        <p:nvSpPr>
-          <p:cNvPr id="5" name="Rectangle 4"/>
+          <p:cNvPr id="3" name="Rectangle 2"/>
           <p:cNvSpPr/>
           <p:nvPr/>
         </p:nvSpPr>
         <p:spPr>
           <a:xfrm>
-            <a:off x="0" y="4800600"/>
-            <a:ext cx="9144000" cy="342900"/>
+            <a:off x="0" y="896112"/>
+            <a:ext cx="9144000" cy="91440"/>
           </a:xfrm>
           <a:prstGeom prst="rect">
             <a:avLst/>
           </a:prstGeom>
           <a:solidFill>
-            <a:srgbClr val="E3F2FD"/>
+            <a:srgbClr val="E65100"/>
           </a:solidFill>
           <a:ln>
             <a:noFill/>
@@ -3926,13 +3977,126 @@
       </p:sp>
       <p:sp>
         <p:nvSpPr>
-          <p:cNvPr id="6" name="TextBox 5"/>
-          <p:cNvSpPr txBox="1"/>
-          <p:nvPr/>
-        </p:nvSpPr>
-        <p:spPr>
-          <a:xfrm>
-            <a:off x="91440" y="4828032"/>
+          <p:cNvPr id="4" name="TextBox 3"/>
+          <p:cNvSpPr txBox="1"/>
+          <p:nvPr/>
+        </p:nvSpPr>
+        <p:spPr>
+          <a:xfrm>
+            <a:off x="182880" y="45720"/>
+            <a:ext cx="8778240" cy="594360"/>
+          </a:xfrm>
+          <a:prstGeom prst="rect">
+            <a:avLst/>
+          </a:prstGeom>
+          <a:noFill/>
+        </p:spPr>
+        <p:txBody>
+          <a:bodyPr wrap="square">
+            <a:spAutoFit/>
+          </a:bodyPr>
+          <a:lstStyle/>
+          <a:p>
+            <a:pPr algn="l"/>
+            <a:r>
+              <a:rPr sz="2200" b="1">
+                <a:solidFill>
+                  <a:srgbClr val="FFFFFF"/>
+                </a:solidFill>
+                <a:latin typeface="Calibri"/>
+              </a:rPr>
+              <a:t>Dashboard — Investor Analytics &amp; SIP Trends</a:t>
+            </a:r>
+          </a:p>
+        </p:txBody>
+      </p:sp>
+      <p:sp>
+        <p:nvSpPr>
+          <p:cNvPr id="5" name="TextBox 4"/>
+          <p:cNvSpPr txBox="1"/>
+          <p:nvPr/>
+        </p:nvSpPr>
+        <p:spPr>
+          <a:xfrm>
+            <a:off x="182880" y="640080"/>
+            <a:ext cx="8778240" cy="292608"/>
+          </a:xfrm>
+          <a:prstGeom prst="rect">
+            <a:avLst/>
+          </a:prstGeom>
+          <a:noFill/>
+        </p:spPr>
+        <p:txBody>
+          <a:bodyPr wrap="square">
+            <a:spAutoFit/>
+          </a:bodyPr>
+          <a:lstStyle/>
+          <a:p>
+            <a:pPr algn="l"/>
+            <a:r>
+              <a:rPr sz="1100" b="0">
+                <a:solidFill>
+                  <a:srgbClr val="C8E6C9"/>
+                </a:solidFill>
+                <a:latin typeface="Calibri"/>
+              </a:rPr>
+              <a:t>Power BI  ·  Page 3 and Page 4</a:t>
+            </a:r>
+          </a:p>
+        </p:txBody>
+      </p:sp>
+      <p:sp>
+        <p:nvSpPr>
+          <p:cNvPr id="6" name="Rectangle 5"/>
+          <p:cNvSpPr/>
+          <p:nvPr/>
+        </p:nvSpPr>
+        <p:spPr>
+          <a:xfrm>
+            <a:off x="0" y="4828032"/>
+            <a:ext cx="9144000" cy="320040"/>
+          </a:xfrm>
+          <a:prstGeom prst="rect">
+            <a:avLst/>
+          </a:prstGeom>
+          <a:solidFill>
+            <a:srgbClr val="E8F5E9"/>
+          </a:solidFill>
+          <a:ln>
+            <a:noFill/>
+          </a:ln>
+        </p:spPr>
+        <p:style>
+          <a:lnRef idx="1">
+            <a:schemeClr val="accent1"/>
+          </a:lnRef>
+          <a:fillRef idx="3">
+            <a:schemeClr val="accent1"/>
+          </a:fillRef>
+          <a:effectRef idx="2">
+            <a:schemeClr val="accent1"/>
+          </a:effectRef>
+          <a:fontRef idx="minor">
+            <a:schemeClr val="lt1"/>
+          </a:fontRef>
+        </p:style>
+        <p:txBody>
+          <a:bodyPr rtlCol="0" anchor="ctr"/>
+          <a:lstStyle/>
+          <a:p>
+            <a:pPr algn="ctr"/>
+          </a:p>
+        </p:txBody>
+      </p:sp>
+      <p:sp>
+        <p:nvSpPr>
+          <p:cNvPr id="7" name="TextBox 6"/>
+          <p:cNvSpPr txBox="1"/>
+          <p:nvPr/>
+        </p:nvSpPr>
+        <p:spPr>
+          <a:xfrm>
+            <a:off x="91440" y="4846320"/>
             <a:ext cx="8961120" cy="274320"/>
           </a:xfrm>
           <a:prstGeom prst="rect">
@@ -3954,14 +4118,14 @@
                 </a:solidFill>
                 <a:latin typeface="Calibri"/>
               </a:rPr>
-              <a:t>Bluestock MF Analytics · Capstone Project 2026</a:t>
+              <a:t>Bluestock MF Analytics  ·  Capstone Project 2026</a:t>
             </a:r>
           </a:p>
         </p:txBody>
       </p:sp>
       <p:pic>
         <p:nvPicPr>
-          <p:cNvPr id="7" name="Picture 6" descr="06a_sip_by_state_bar.png"/>
+          <p:cNvPr id="8" name="Picture 7" descr="06a_sip_by_state_bar.png"/>
           <p:cNvPicPr>
             <a:picLocks noChangeAspect="1"/>
           </p:cNvPicPr>
@@ -3975,8 +4139,8 @@
         </p:blipFill>
         <p:spPr>
           <a:xfrm>
-            <a:off x="182880" y="1051560"/>
-            <a:ext cx="4297680" cy="3047064"/>
+            <a:off x="182880" y="1024128"/>
+            <a:ext cx="4343400" cy="3079480"/>
           </a:xfrm>
           <a:prstGeom prst="rect">
             <a:avLst/>
@@ -3985,7 +4149,7 @@
       </p:pic>
       <p:pic>
         <p:nvPicPr>
-          <p:cNvPr id="8" name="Picture 7" descr="04_category_inflow_heatmap.png"/>
+          <p:cNvPr id="9" name="Picture 8" descr="04_category_inflow_heatmap.png"/>
           <p:cNvPicPr>
             <a:picLocks noChangeAspect="1"/>
           </p:cNvPicPr>
@@ -3999,7 +4163,7 @@
         </p:blipFill>
         <p:spPr>
           <a:xfrm>
-            <a:off x="4663440" y="1051560"/>
+            <a:off x="4681728" y="1024128"/>
             <a:ext cx="4297680" cy="1770144"/>
           </a:xfrm>
           <a:prstGeom prst="rect">
@@ -4009,14 +4173,14 @@
       </p:pic>
       <p:sp>
         <p:nvSpPr>
-          <p:cNvPr id="9" name="TextBox 8"/>
-          <p:cNvSpPr txBox="1"/>
-          <p:nvPr/>
-        </p:nvSpPr>
-        <p:spPr>
-          <a:xfrm>
-            <a:off x="182880" y="4389120"/>
-            <a:ext cx="8778240" cy="411480"/>
+          <p:cNvPr id="10" name="TextBox 9"/>
+          <p:cNvSpPr txBox="1"/>
+          <p:nvPr/>
+        </p:nvSpPr>
+        <p:spPr>
+          <a:xfrm>
+            <a:off x="182880" y="3840480"/>
+            <a:ext cx="4343400" cy="438912"/>
           </a:xfrm>
           <a:prstGeom prst="rect">
             <a:avLst/>
@@ -4033,11 +4197,46 @@
             <a:r>
               <a:rPr sz="900" b="0">
                 <a:solidFill>
-                  <a:srgbClr val="546E7A"/>
-                </a:solidFill>
-                <a:latin typeface="Calibri"/>
-              </a:rPr>
-              <a:t>Dashboard Page 3: SIP by state, age analysis, monthly volume  ·  Page 4: SIP vs Nifty 50, category heatmap</a:t>
+                  <a:srgbClr val="2E7D32"/>
+                </a:solidFill>
+                <a:latin typeface="Calibri"/>
+              </a:rPr>
+              <a:t>Page 3: SIP by state, age analysis, monthly volume</a:t>
+            </a:r>
+          </a:p>
+        </p:txBody>
+      </p:sp>
+      <p:sp>
+        <p:nvSpPr>
+          <p:cNvPr id="11" name="TextBox 10"/>
+          <p:cNvSpPr txBox="1"/>
+          <p:nvPr/>
+        </p:nvSpPr>
+        <p:spPr>
+          <a:xfrm>
+            <a:off x="4681728" y="3840480"/>
+            <a:ext cx="4297680" cy="438912"/>
+          </a:xfrm>
+          <a:prstGeom prst="rect">
+            <a:avLst/>
+          </a:prstGeom>
+          <a:noFill/>
+        </p:spPr>
+        <p:txBody>
+          <a:bodyPr wrap="square">
+            <a:spAutoFit/>
+          </a:bodyPr>
+          <a:lstStyle/>
+          <a:p>
+            <a:pPr algn="ctr"/>
+            <a:r>
+              <a:rPr sz="900" b="0">
+                <a:solidFill>
+                  <a:srgbClr val="E65100"/>
+                </a:solidFill>
+                <a:latin typeface="Calibri"/>
+              </a:rPr>
+              <a:t>Page 4: SIP vs Nifty 50 dual-axis + category heatmap</a:t>
             </a:r>
           </a:p>
         </p:txBody>
@@ -4077,13 +4276,13 @@
         <p:spPr>
           <a:xfrm>
             <a:off x="0" y="0"/>
-            <a:ext cx="9144000" cy="1005840"/>
+            <a:ext cx="9144000" cy="960120"/>
           </a:xfrm>
           <a:prstGeom prst="rect">
             <a:avLst/>
           </a:prstGeom>
           <a:solidFill>
-            <a:srgbClr val="1565C0"/>
+            <a:srgbClr val="2E7D32"/>
           </a:solidFill>
           <a:ln>
             <a:noFill/>
@@ -4113,90 +4312,20 @@
       </p:sp>
       <p:sp>
         <p:nvSpPr>
-          <p:cNvPr id="3" name="TextBox 2"/>
-          <p:cNvSpPr txBox="1"/>
-          <p:nvPr/>
-        </p:nvSpPr>
-        <p:spPr>
-          <a:xfrm>
-            <a:off x="182880" y="45720"/>
-            <a:ext cx="8229600" cy="594360"/>
-          </a:xfrm>
-          <a:prstGeom prst="rect">
-            <a:avLst/>
-          </a:prstGeom>
-          <a:noFill/>
-        </p:spPr>
-        <p:txBody>
-          <a:bodyPr wrap="square">
-            <a:spAutoFit/>
-          </a:bodyPr>
-          <a:lstStyle/>
-          <a:p>
-            <a:pPr algn="l"/>
-            <a:r>
-              <a:rPr sz="2400" b="1">
-                <a:solidFill>
-                  <a:srgbClr val="FFFFFF"/>
-                </a:solidFill>
-                <a:latin typeface="Calibri"/>
-              </a:rPr>
-              <a:t>Key Findings</a:t>
-            </a:r>
-          </a:p>
-        </p:txBody>
-      </p:sp>
-      <p:sp>
-        <p:nvSpPr>
-          <p:cNvPr id="4" name="TextBox 3"/>
-          <p:cNvSpPr txBox="1"/>
-          <p:nvPr/>
-        </p:nvSpPr>
-        <p:spPr>
-          <a:xfrm>
-            <a:off x="182880" y="658368"/>
-            <a:ext cx="8229600" cy="320040"/>
-          </a:xfrm>
-          <a:prstGeom prst="rect">
-            <a:avLst/>
-          </a:prstGeom>
-          <a:noFill/>
-        </p:spPr>
-        <p:txBody>
-          <a:bodyPr wrap="square">
-            <a:spAutoFit/>
-          </a:bodyPr>
-          <a:lstStyle/>
-          <a:p>
-            <a:pPr algn="l"/>
-            <a:r>
-              <a:rPr sz="1200" b="0">
-                <a:solidFill>
-                  <a:srgbClr val="BBDEFB"/>
-                </a:solidFill>
-                <a:latin typeface="Calibri"/>
-              </a:rPr>
-              <a:t>Eight evidence-backed insights from the analysis</a:t>
-            </a:r>
-          </a:p>
-        </p:txBody>
-      </p:sp>
-      <p:sp>
-        <p:nvSpPr>
-          <p:cNvPr id="5" name="Rectangle 4"/>
+          <p:cNvPr id="3" name="Rectangle 2"/>
           <p:cNvSpPr/>
           <p:nvPr/>
         </p:nvSpPr>
         <p:spPr>
           <a:xfrm>
-            <a:off x="0" y="4800600"/>
-            <a:ext cx="9144000" cy="342900"/>
+            <a:off x="0" y="896112"/>
+            <a:ext cx="9144000" cy="91440"/>
           </a:xfrm>
           <a:prstGeom prst="rect">
             <a:avLst/>
           </a:prstGeom>
           <a:solidFill>
-            <a:srgbClr val="E3F2FD"/>
+            <a:srgbClr val="E65100"/>
           </a:solidFill>
           <a:ln>
             <a:noFill/>
@@ -4226,13 +4355,126 @@
       </p:sp>
       <p:sp>
         <p:nvSpPr>
-          <p:cNvPr id="6" name="TextBox 5"/>
-          <p:cNvSpPr txBox="1"/>
-          <p:nvPr/>
-        </p:nvSpPr>
-        <p:spPr>
-          <a:xfrm>
-            <a:off x="91440" y="4828032"/>
+          <p:cNvPr id="4" name="TextBox 3"/>
+          <p:cNvSpPr txBox="1"/>
+          <p:nvPr/>
+        </p:nvSpPr>
+        <p:spPr>
+          <a:xfrm>
+            <a:off x="182880" y="45720"/>
+            <a:ext cx="8778240" cy="594360"/>
+          </a:xfrm>
+          <a:prstGeom prst="rect">
+            <a:avLst/>
+          </a:prstGeom>
+          <a:noFill/>
+        </p:spPr>
+        <p:txBody>
+          <a:bodyPr wrap="square">
+            <a:spAutoFit/>
+          </a:bodyPr>
+          <a:lstStyle/>
+          <a:p>
+            <a:pPr algn="l"/>
+            <a:r>
+              <a:rPr sz="2200" b="1">
+                <a:solidFill>
+                  <a:srgbClr val="FFFFFF"/>
+                </a:solidFill>
+                <a:latin typeface="Calibri"/>
+              </a:rPr>
+              <a:t>Key Findings</a:t>
+            </a:r>
+          </a:p>
+        </p:txBody>
+      </p:sp>
+      <p:sp>
+        <p:nvSpPr>
+          <p:cNvPr id="5" name="TextBox 4"/>
+          <p:cNvSpPr txBox="1"/>
+          <p:nvPr/>
+        </p:nvSpPr>
+        <p:spPr>
+          <a:xfrm>
+            <a:off x="182880" y="640080"/>
+            <a:ext cx="8778240" cy="292608"/>
+          </a:xfrm>
+          <a:prstGeom prst="rect">
+            <a:avLst/>
+          </a:prstGeom>
+          <a:noFill/>
+        </p:spPr>
+        <p:txBody>
+          <a:bodyPr wrap="square">
+            <a:spAutoFit/>
+          </a:bodyPr>
+          <a:lstStyle/>
+          <a:p>
+            <a:pPr algn="l"/>
+            <a:r>
+              <a:rPr sz="1100" b="0">
+                <a:solidFill>
+                  <a:srgbClr val="C8E6C9"/>
+                </a:solidFill>
+                <a:latin typeface="Calibri"/>
+              </a:rPr>
+              <a:t>Eight evidence-backed insights from the analysis</a:t>
+            </a:r>
+          </a:p>
+        </p:txBody>
+      </p:sp>
+      <p:sp>
+        <p:nvSpPr>
+          <p:cNvPr id="6" name="Rectangle 5"/>
+          <p:cNvSpPr/>
+          <p:nvPr/>
+        </p:nvSpPr>
+        <p:spPr>
+          <a:xfrm>
+            <a:off x="0" y="4828032"/>
+            <a:ext cx="9144000" cy="320040"/>
+          </a:xfrm>
+          <a:prstGeom prst="rect">
+            <a:avLst/>
+          </a:prstGeom>
+          <a:solidFill>
+            <a:srgbClr val="E8F5E9"/>
+          </a:solidFill>
+          <a:ln>
+            <a:noFill/>
+          </a:ln>
+        </p:spPr>
+        <p:style>
+          <a:lnRef idx="1">
+            <a:schemeClr val="accent1"/>
+          </a:lnRef>
+          <a:fillRef idx="3">
+            <a:schemeClr val="accent1"/>
+          </a:fillRef>
+          <a:effectRef idx="2">
+            <a:schemeClr val="accent1"/>
+          </a:effectRef>
+          <a:fontRef idx="minor">
+            <a:schemeClr val="lt1"/>
+          </a:fontRef>
+        </p:style>
+        <p:txBody>
+          <a:bodyPr rtlCol="0" anchor="ctr"/>
+          <a:lstStyle/>
+          <a:p>
+            <a:pPr algn="ctr"/>
+          </a:p>
+        </p:txBody>
+      </p:sp>
+      <p:sp>
+        <p:nvSpPr>
+          <p:cNvPr id="7" name="TextBox 6"/>
+          <p:cNvSpPr txBox="1"/>
+          <p:nvPr/>
+        </p:nvSpPr>
+        <p:spPr>
+          <a:xfrm>
+            <a:off x="91440" y="4846320"/>
             <a:ext cx="8961120" cy="274320"/>
           </a:xfrm>
           <a:prstGeom prst="rect">
@@ -4254,21 +4496,21 @@
                 </a:solidFill>
                 <a:latin typeface="Calibri"/>
               </a:rPr>
-              <a:t>Bluestock MF Analytics · Capstone Project 2026</a:t>
-            </a:r>
-          </a:p>
-        </p:txBody>
-      </p:sp>
-      <p:sp>
-        <p:nvSpPr>
-          <p:cNvPr id="7" name="TextBox 6"/>
+              <a:t>Bluestock MF Analytics  ·  Capstone Project 2026</a:t>
+            </a:r>
+          </a:p>
+        </p:txBody>
+      </p:sp>
+      <p:sp>
+        <p:nvSpPr>
+          <p:cNvPr id="8" name="TextBox 7"/>
           <p:cNvSpPr txBox="1"/>
           <p:nvPr/>
         </p:nvSpPr>
         <p:spPr>
           <a:xfrm>
             <a:off x="274320" y="1143000"/>
-            <a:ext cx="1645920" cy="320040"/>
+            <a:ext cx="1691640" cy="347472"/>
           </a:xfrm>
           <a:prstGeom prst="rect">
             <a:avLst/>
@@ -4285,7 +4527,7 @@
             <a:r>
               <a:rPr sz="1000" b="1">
                 <a:solidFill>
-                  <a:srgbClr val="1565C0"/>
+                  <a:srgbClr val="2E7D32"/>
                 </a:solidFill>
                 <a:latin typeface="Calibri"/>
               </a:rPr>
@@ -4296,14 +4538,14 @@
       </p:sp>
       <p:sp>
         <p:nvSpPr>
-          <p:cNvPr id="8" name="TextBox 7"/>
-          <p:cNvSpPr txBox="1"/>
-          <p:nvPr/>
-        </p:nvSpPr>
-        <p:spPr>
-          <a:xfrm>
-            <a:off x="1828800" y="1143000"/>
-            <a:ext cx="2651760" cy="457200"/>
+          <p:cNvPr id="9" name="TextBox 8"/>
+          <p:cNvSpPr txBox="1"/>
+          <p:nvPr/>
+        </p:nvSpPr>
+        <p:spPr>
+          <a:xfrm>
+            <a:off x="1920240" y="1143000"/>
+            <a:ext cx="2560320" cy="457200"/>
           </a:xfrm>
           <a:prstGeom prst="rect">
             <a:avLst/>
@@ -4324,21 +4566,21 @@
                 </a:solidFill>
                 <a:latin typeface="Calibri"/>
               </a:rPr>
-              <a:t>Monthly SIP reached ₹31,002 Cr in Dec 2025 — 17% YoY growth, 30% CAGR over 4 years</a:t>
-            </a:r>
-          </a:p>
-        </p:txBody>
-      </p:sp>
-      <p:sp>
-        <p:nvSpPr>
-          <p:cNvPr id="9" name="TextBox 8"/>
-          <p:cNvSpPr txBox="1"/>
-          <p:nvPr/>
-        </p:nvSpPr>
-        <p:spPr>
-          <a:xfrm>
-            <a:off x="4846320" y="1143000"/>
-            <a:ext cx="1645920" cy="320040"/>
+              <a:t>₹31,002 Cr in Dec 2025 — 17% YoY growth, 30% CAGR over 4 years</a:t>
+            </a:r>
+          </a:p>
+        </p:txBody>
+      </p:sp>
+      <p:sp>
+        <p:nvSpPr>
+          <p:cNvPr id="10" name="TextBox 9"/>
+          <p:cNvSpPr txBox="1"/>
+          <p:nvPr/>
+        </p:nvSpPr>
+        <p:spPr>
+          <a:xfrm>
+            <a:off x="4892040" y="1143000"/>
+            <a:ext cx="1691640" cy="347472"/>
           </a:xfrm>
           <a:prstGeom prst="rect">
             <a:avLst/>
@@ -4355,7 +4597,7 @@
             <a:r>
               <a:rPr sz="1000" b="1">
                 <a:solidFill>
-                  <a:srgbClr val="1565C0"/>
+                  <a:srgbClr val="E65100"/>
                 </a:solidFill>
                 <a:latin typeface="Calibri"/>
               </a:rPr>
@@ -4366,14 +4608,14 @@
       </p:sp>
       <p:sp>
         <p:nvSpPr>
-          <p:cNvPr id="10" name="TextBox 9"/>
-          <p:cNvSpPr txBox="1"/>
-          <p:nvPr/>
-        </p:nvSpPr>
-        <p:spPr>
-          <a:xfrm>
-            <a:off x="6400800" y="1143000"/>
-            <a:ext cx="2651760" cy="457200"/>
+          <p:cNvPr id="11" name="TextBox 10"/>
+          <p:cNvSpPr txBox="1"/>
+          <p:nvPr/>
+        </p:nvSpPr>
+        <p:spPr>
+          <a:xfrm>
+            <a:off x="6537960" y="1143000"/>
+            <a:ext cx="2560320" cy="457200"/>
           </a:xfrm>
           <a:prstGeom prst="rect">
             <a:avLst/>
@@ -4394,21 +4636,21 @@
                 </a:solidFill>
                 <a:latin typeface="Calibri"/>
               </a:rPr>
-              <a:t>SBI MF leads at ₹12.5L Cr; industry total ₹81L Cr — all 10 AMCs grew 45–120%</a:t>
-            </a:r>
-          </a:p>
-        </p:txBody>
-      </p:sp>
-      <p:sp>
-        <p:nvSpPr>
-          <p:cNvPr id="11" name="TextBox 10"/>
+              <a:t>SBI MF ₹12.5L Cr; industry total ₹81L Cr — all AMCs grew 45–120%</a:t>
+            </a:r>
+          </a:p>
+        </p:txBody>
+      </p:sp>
+      <p:sp>
+        <p:nvSpPr>
+          <p:cNvPr id="12" name="TextBox 11"/>
           <p:cNvSpPr txBox="1"/>
           <p:nvPr/>
         </p:nvSpPr>
         <p:spPr>
           <a:xfrm>
             <a:off x="274320" y="1947672"/>
-            <a:ext cx="1645920" cy="320040"/>
+            <a:ext cx="1691640" cy="347472"/>
           </a:xfrm>
           <a:prstGeom prst="rect">
             <a:avLst/>
@@ -4425,7 +4667,7 @@
             <a:r>
               <a:rPr sz="1000" b="1">
                 <a:solidFill>
-                  <a:srgbClr val="1565C0"/>
+                  <a:srgbClr val="2E7D32"/>
                 </a:solidFill>
                 <a:latin typeface="Calibri"/>
               </a:rPr>
@@ -4436,14 +4678,14 @@
       </p:sp>
       <p:sp>
         <p:nvSpPr>
-          <p:cNvPr id="12" name="TextBox 11"/>
-          <p:cNvSpPr txBox="1"/>
-          <p:nvPr/>
-        </p:nvSpPr>
-        <p:spPr>
-          <a:xfrm>
-            <a:off x="1828800" y="1947672"/>
-            <a:ext cx="2651760" cy="457200"/>
+          <p:cNvPr id="13" name="TextBox 12"/>
+          <p:cNvSpPr txBox="1"/>
+          <p:nvPr/>
+        </p:nvSpPr>
+        <p:spPr>
+          <a:xfrm>
+            <a:off x="1920240" y="1947672"/>
+            <a:ext cx="2560320" cy="457200"/>
           </a:xfrm>
           <a:prstGeom prst="rect">
             <a:avLst/>
@@ -4464,21 +4706,21 @@
                 </a:solidFill>
                 <a:latin typeface="Calibri"/>
               </a:rPr>
-              <a:t>Funds with Alpha&gt;1% AND Sharpe&gt;1 form a high-conviction invest. universe (SQL Q10)</a:t>
-            </a:r>
-          </a:p>
-        </p:txBody>
-      </p:sp>
-      <p:sp>
-        <p:nvSpPr>
-          <p:cNvPr id="13" name="TextBox 12"/>
-          <p:cNvSpPr txBox="1"/>
-          <p:nvPr/>
-        </p:nvSpPr>
-        <p:spPr>
-          <a:xfrm>
-            <a:off x="4846320" y="1947672"/>
-            <a:ext cx="1645920" cy="320040"/>
+              <a:t>Alpha&gt;1% AND Sharpe&gt;1 — high-conviction invest. universe (SQL Q10)</a:t>
+            </a:r>
+          </a:p>
+        </p:txBody>
+      </p:sp>
+      <p:sp>
+        <p:nvSpPr>
+          <p:cNvPr id="14" name="TextBox 13"/>
+          <p:cNvSpPr txBox="1"/>
+          <p:nvPr/>
+        </p:nvSpPr>
+        <p:spPr>
+          <a:xfrm>
+            <a:off x="4892040" y="1947672"/>
+            <a:ext cx="1691640" cy="347472"/>
           </a:xfrm>
           <a:prstGeom prst="rect">
             <a:avLst/>
@@ -4495,7 +4737,7 @@
             <a:r>
               <a:rPr sz="1000" b="1">
                 <a:solidFill>
-                  <a:srgbClr val="1565C0"/>
+                  <a:srgbClr val="E65100"/>
                 </a:solidFill>
                 <a:latin typeface="Calibri"/>
               </a:rPr>
@@ -4506,14 +4748,14 @@
       </p:sp>
       <p:sp>
         <p:nvSpPr>
-          <p:cNvPr id="14" name="TextBox 13"/>
-          <p:cNvSpPr txBox="1"/>
-          <p:nvPr/>
-        </p:nvSpPr>
-        <p:spPr>
-          <a:xfrm>
-            <a:off x="6400800" y="1947672"/>
-            <a:ext cx="2651760" cy="457200"/>
+          <p:cNvPr id="15" name="TextBox 14"/>
+          <p:cNvSpPr txBox="1"/>
+          <p:nvPr/>
+        </p:nvSpPr>
+        <p:spPr>
+          <a:xfrm>
+            <a:off x="6537960" y="1947672"/>
+            <a:ext cx="2560320" cy="457200"/>
           </a:xfrm>
           <a:prstGeom prst="rect">
             <a:avLst/>
@@ -4534,21 +4776,21 @@
                 </a:solidFill>
                 <a:latin typeface="Calibri"/>
               </a:rPr>
-              <a:t>Direct plans outperform regular by 50–100 bps p.a. due to lower TER</a:t>
-            </a:r>
-          </a:p>
-        </p:txBody>
-      </p:sp>
-      <p:sp>
-        <p:nvSpPr>
-          <p:cNvPr id="15" name="TextBox 14"/>
+              <a:t>Direct beat Regular by 50–100 bps p.a. due to lower TER</a:t>
+            </a:r>
+          </a:p>
+        </p:txBody>
+      </p:sp>
+      <p:sp>
+        <p:nvSpPr>
+          <p:cNvPr id="16" name="TextBox 15"/>
           <p:cNvSpPr txBox="1"/>
           <p:nvPr/>
         </p:nvSpPr>
         <p:spPr>
           <a:xfrm>
             <a:off x="274320" y="2752344"/>
-            <a:ext cx="1645920" cy="320040"/>
+            <a:ext cx="1691640" cy="347472"/>
           </a:xfrm>
           <a:prstGeom prst="rect">
             <a:avLst/>
@@ -4565,7 +4807,7 @@
             <a:r>
               <a:rPr sz="1000" b="1">
                 <a:solidFill>
-                  <a:srgbClr val="1565C0"/>
+                  <a:srgbClr val="2E7D32"/>
                 </a:solidFill>
                 <a:latin typeface="Calibri"/>
               </a:rPr>
@@ -4576,14 +4818,14 @@
       </p:sp>
       <p:sp>
         <p:nvSpPr>
-          <p:cNvPr id="16" name="TextBox 15"/>
-          <p:cNvSpPr txBox="1"/>
-          <p:nvPr/>
-        </p:nvSpPr>
-        <p:spPr>
-          <a:xfrm>
-            <a:off x="1828800" y="2752344"/>
-            <a:ext cx="2651760" cy="457200"/>
+          <p:cNvPr id="17" name="TextBox 16"/>
+          <p:cNvSpPr txBox="1"/>
+          <p:nvPr/>
+        </p:nvSpPr>
+        <p:spPr>
+          <a:xfrm>
+            <a:off x="1920240" y="2752344"/>
+            <a:ext cx="2560320" cy="457200"/>
           </a:xfrm>
           <a:prstGeom prst="rect">
             <a:avLst/>
@@ -4604,21 +4846,21 @@
                 </a:solidFill>
                 <a:latin typeface="Calibri"/>
               </a:rPr>
-              <a:t>2023 bull run: Sharpe peaked &gt;1.5; 2024 correction: Sharpe compressed to 0.3–0.7</a:t>
-            </a:r>
-          </a:p>
-        </p:txBody>
-      </p:sp>
-      <p:sp>
-        <p:nvSpPr>
-          <p:cNvPr id="17" name="TextBox 16"/>
-          <p:cNvSpPr txBox="1"/>
-          <p:nvPr/>
-        </p:nvSpPr>
-        <p:spPr>
-          <a:xfrm>
-            <a:off x="4846320" y="2752344"/>
-            <a:ext cx="1645920" cy="320040"/>
+              <a:t>2023 bull: Sharpe &gt;1.5; 2024 correction: Sharpe compressed to 0.3–0.7</a:t>
+            </a:r>
+          </a:p>
+        </p:txBody>
+      </p:sp>
+      <p:sp>
+        <p:nvSpPr>
+          <p:cNvPr id="18" name="TextBox 17"/>
+          <p:cNvSpPr txBox="1"/>
+          <p:nvPr/>
+        </p:nvSpPr>
+        <p:spPr>
+          <a:xfrm>
+            <a:off x="4892040" y="2752344"/>
+            <a:ext cx="1691640" cy="347472"/>
           </a:xfrm>
           <a:prstGeom prst="rect">
             <a:avLst/>
@@ -4635,7 +4877,7 @@
             <a:r>
               <a:rPr sz="1000" b="1">
                 <a:solidFill>
-                  <a:srgbClr val="1565C0"/>
+                  <a:srgbClr val="E65100"/>
                 </a:solidFill>
                 <a:latin typeface="Calibri"/>
               </a:rPr>
@@ -4646,14 +4888,14 @@
       </p:sp>
       <p:sp>
         <p:nvSpPr>
-          <p:cNvPr id="18" name="TextBox 17"/>
-          <p:cNvSpPr txBox="1"/>
-          <p:nvPr/>
-        </p:nvSpPr>
-        <p:spPr>
-          <a:xfrm>
-            <a:off x="6400800" y="2752344"/>
-            <a:ext cx="2651760" cy="457200"/>
+          <p:cNvPr id="19" name="TextBox 18"/>
+          <p:cNvSpPr txBox="1"/>
+          <p:nvPr/>
+        </p:nvSpPr>
+        <p:spPr>
+          <a:xfrm>
+            <a:off x="6537960" y="2752344"/>
+            <a:ext cx="2560320" cy="457200"/>
           </a:xfrm>
           <a:prstGeom prst="rect">
             <a:avLst/>
@@ -4674,21 +4916,21 @@
                 </a:solidFill>
                 <a:latin typeface="Calibri"/>
               </a:rPr>
-              <a:t>Maharashtra and Delhi drive &gt;40% of SIP value; B30 cities growing at faster rate</a:t>
-            </a:r>
-          </a:p>
-        </p:txBody>
-      </p:sp>
-      <p:sp>
-        <p:nvSpPr>
-          <p:cNvPr id="19" name="TextBox 18"/>
+              <a:t>Maharashtra + Delhi drive &gt;40% of SIP value; B30 growing faster</a:t>
+            </a:r>
+          </a:p>
+        </p:txBody>
+      </p:sp>
+      <p:sp>
+        <p:nvSpPr>
+          <p:cNvPr id="20" name="TextBox 19"/>
           <p:cNvSpPr txBox="1"/>
           <p:nvPr/>
         </p:nvSpPr>
         <p:spPr>
           <a:xfrm>
             <a:off x="274320" y="3557016"/>
-            <a:ext cx="1645920" cy="320040"/>
+            <a:ext cx="1691640" cy="347472"/>
           </a:xfrm>
           <a:prstGeom prst="rect">
             <a:avLst/>
@@ -4705,7 +4947,7 @@
             <a:r>
               <a:rPr sz="1000" b="1">
                 <a:solidFill>
-                  <a:srgbClr val="1565C0"/>
+                  <a:srgbClr val="2E7D32"/>
                 </a:solidFill>
                 <a:latin typeface="Calibri"/>
               </a:rPr>
@@ -4716,14 +4958,14 @@
       </p:sp>
       <p:sp>
         <p:nvSpPr>
-          <p:cNvPr id="20" name="TextBox 19"/>
-          <p:cNvSpPr txBox="1"/>
-          <p:nvPr/>
-        </p:nvSpPr>
-        <p:spPr>
-          <a:xfrm>
-            <a:off x="1828800" y="3557016"/>
-            <a:ext cx="2651760" cy="457200"/>
+          <p:cNvPr id="21" name="TextBox 20"/>
+          <p:cNvSpPr txBox="1"/>
+          <p:nvPr/>
+        </p:nvSpPr>
+        <p:spPr>
+          <a:xfrm>
+            <a:off x="1920240" y="3557016"/>
+            <a:ext cx="2560320" cy="457200"/>
           </a:xfrm>
           <a:prstGeom prst="rect">
             <a:avLst/>
@@ -4744,21 +4986,21 @@
                 </a:solidFill>
                 <a:latin typeface="Calibri"/>
               </a:rPr>
-              <a:t>82% investors maintain regular SIP cadence; 18% at-risk (gap &gt;35 days)</a:t>
-            </a:r>
-          </a:p>
-        </p:txBody>
-      </p:sp>
-      <p:sp>
-        <p:nvSpPr>
-          <p:cNvPr id="21" name="TextBox 20"/>
-          <p:cNvSpPr txBox="1"/>
-          <p:nvPr/>
-        </p:nvSpPr>
-        <p:spPr>
-          <a:xfrm>
-            <a:off x="4846320" y="3557016"/>
-            <a:ext cx="1645920" cy="320040"/>
+              <a:t>82% investors maintain regular cadence; 18% at-risk (gap&gt;35 days)</a:t>
+            </a:r>
+          </a:p>
+        </p:txBody>
+      </p:sp>
+      <p:sp>
+        <p:nvSpPr>
+          <p:cNvPr id="22" name="TextBox 21"/>
+          <p:cNvSpPr txBox="1"/>
+          <p:nvPr/>
+        </p:nvSpPr>
+        <p:spPr>
+          <a:xfrm>
+            <a:off x="4892040" y="3557016"/>
+            <a:ext cx="1691640" cy="347472"/>
           </a:xfrm>
           <a:prstGeom prst="rect">
             <a:avLst/>
@@ -4775,25 +5017,25 @@
             <a:r>
               <a:rPr sz="1000" b="1">
                 <a:solidFill>
-                  <a:srgbClr val="1565C0"/>
-                </a:solidFill>
-                <a:latin typeface="Calibri"/>
-              </a:rPr>
-              <a:t>• HHI Concentration:</a:t>
-            </a:r>
-          </a:p>
-        </p:txBody>
-      </p:sp>
-      <p:sp>
-        <p:nvSpPr>
-          <p:cNvPr id="22" name="TextBox 21"/>
-          <p:cNvSpPr txBox="1"/>
-          <p:nvPr/>
-        </p:nvSpPr>
-        <p:spPr>
-          <a:xfrm>
-            <a:off x="6400800" y="3557016"/>
-            <a:ext cx="2651760" cy="457200"/>
+                  <a:srgbClr val="E65100"/>
+                </a:solidFill>
+                <a:latin typeface="Calibri"/>
+              </a:rPr>
+              <a:t>• HHI / Sectors:</a:t>
+            </a:r>
+          </a:p>
+        </p:txBody>
+      </p:sp>
+      <p:sp>
+        <p:nvSpPr>
+          <p:cNvPr id="23" name="TextBox 22"/>
+          <p:cNvSpPr txBox="1"/>
+          <p:nvPr/>
+        </p:nvSpPr>
+        <p:spPr>
+          <a:xfrm>
+            <a:off x="6537960" y="3557016"/>
+            <a:ext cx="2560320" cy="457200"/>
           </a:xfrm>
           <a:prstGeom prst="rect">
             <a:avLst/>
@@ -4814,7 +5056,7 @@
                 </a:solidFill>
                 <a:latin typeface="Calibri"/>
               </a:rPr>
-              <a:t>Most equity funds well-diversified (HHI&lt;0.15); Financial Services = top sector ~28%</a:t>
+              <a:t>Most equity funds diversified (HHI&lt;0.15); Fin. Services top sector ~28%</a:t>
             </a:r>
           </a:p>
         </p:txBody>
@@ -4833,7 +5075,7 @@
     <p:bg>
       <p:bgPr>
         <a:solidFill>
-          <a:srgbClr val="1565C0"/>
+          <a:srgbClr val="1B5E20"/>
         </a:solidFill>
         <a:effectLst/>
       </p:bgPr>
@@ -4847,126 +5089,20 @@
       <p:grpSpPr/>
       <p:sp>
         <p:nvSpPr>
-          <p:cNvPr id="2" name="TextBox 1"/>
-          <p:cNvSpPr txBox="1"/>
-          <p:nvPr/>
-        </p:nvSpPr>
-        <p:spPr>
-          <a:xfrm>
-            <a:off x="457200" y="731520"/>
-            <a:ext cx="8229600" cy="914400"/>
-          </a:xfrm>
-          <a:prstGeom prst="rect">
-            <a:avLst/>
-          </a:prstGeom>
-          <a:noFill/>
-        </p:spPr>
-        <p:txBody>
-          <a:bodyPr wrap="square">
-            <a:spAutoFit/>
-          </a:bodyPr>
-          <a:lstStyle/>
-          <a:p>
-            <a:pPr algn="ctr"/>
-            <a:r>
-              <a:rPr sz="4400" b="1">
-                <a:solidFill>
-                  <a:srgbClr val="FFFFFF"/>
-                </a:solidFill>
-                <a:latin typeface="Calibri"/>
-              </a:rPr>
-              <a:t>Thank You</a:t>
-            </a:r>
-          </a:p>
-        </p:txBody>
-      </p:sp>
-      <p:sp>
-        <p:nvSpPr>
-          <p:cNvPr id="3" name="TextBox 2"/>
-          <p:cNvSpPr txBox="1"/>
-          <p:nvPr/>
-        </p:nvSpPr>
-        <p:spPr>
-          <a:xfrm>
-            <a:off x="457200" y="1691640"/>
-            <a:ext cx="8229600" cy="457200"/>
-          </a:xfrm>
-          <a:prstGeom prst="rect">
-            <a:avLst/>
-          </a:prstGeom>
-          <a:noFill/>
-        </p:spPr>
-        <p:txBody>
-          <a:bodyPr wrap="square">
-            <a:spAutoFit/>
-          </a:bodyPr>
-          <a:lstStyle/>
-          <a:p>
-            <a:pPr algn="ctr"/>
-            <a:r>
-              <a:rPr sz="1800" b="0">
-                <a:solidFill>
-                  <a:srgbClr val="BBDEFB"/>
-                </a:solidFill>
-                <a:latin typeface="Calibri"/>
-              </a:rPr>
-              <a:t>Bluestock MF Analytics — Capstone Project v1.0</a:t>
-            </a:r>
-          </a:p>
-        </p:txBody>
-      </p:sp>
-      <p:sp>
-        <p:nvSpPr>
-          <p:cNvPr id="4" name="TextBox 3"/>
-          <p:cNvSpPr txBox="1"/>
-          <p:nvPr/>
-        </p:nvSpPr>
-        <p:spPr>
-          <a:xfrm>
-            <a:off x="457200" y="2331720"/>
-            <a:ext cx="8229600" cy="731520"/>
-          </a:xfrm>
-          <a:prstGeom prst="rect">
-            <a:avLst/>
-          </a:prstGeom>
-          <a:noFill/>
-        </p:spPr>
-        <p:txBody>
-          <a:bodyPr wrap="square">
-            <a:spAutoFit/>
-          </a:bodyPr>
-          <a:lstStyle/>
-          <a:p>
-            <a:pPr algn="ctr"/>
-            <a:r>
-              <a:rPr sz="1300" b="0">
-                <a:solidFill>
-                  <a:srgbClr val="90CAF9"/>
-                </a:solidFill>
-                <a:latin typeface="Calibri"/>
-              </a:rPr>
-              <a:t>Source Code &amp; Documentation
-github.com/&lt;your-username&gt;/MutualFundAnalytics</a:t>
-            </a:r>
-          </a:p>
-        </p:txBody>
-      </p:sp>
-      <p:sp>
-        <p:nvSpPr>
-          <p:cNvPr id="5" name="Rectangle 4"/>
+          <p:cNvPr id="2" name="Rectangle 1"/>
           <p:cNvSpPr/>
           <p:nvPr/>
         </p:nvSpPr>
         <p:spPr>
           <a:xfrm>
-            <a:off x="365760" y="3291840"/>
-            <a:ext cx="2011680" cy="1371600"/>
+            <a:off x="0" y="0"/>
+            <a:ext cx="9144000" cy="164592"/>
           </a:xfrm>
           <a:prstGeom prst="rect">
             <a:avLst/>
           </a:prstGeom>
           <a:solidFill>
-            <a:srgbClr val="1976D2"/>
+            <a:srgbClr val="E65100"/>
           </a:solidFill>
           <a:ln>
             <a:noFill/>
@@ -4996,125 +5132,20 @@
       </p:sp>
       <p:sp>
         <p:nvSpPr>
-          <p:cNvPr id="6" name="TextBox 5"/>
-          <p:cNvSpPr txBox="1"/>
-          <p:nvPr/>
-        </p:nvSpPr>
-        <p:spPr>
-          <a:xfrm>
-            <a:off x="365760" y="3310128"/>
-            <a:ext cx="2011680" cy="411480"/>
-          </a:xfrm>
-          <a:prstGeom prst="rect">
-            <a:avLst/>
-          </a:prstGeom>
-          <a:noFill/>
-        </p:spPr>
-        <p:txBody>
-          <a:bodyPr wrap="square">
-            <a:spAutoFit/>
-          </a:bodyPr>
-          <a:lstStyle/>
-          <a:p>
-            <a:pPr algn="ctr"/>
-            <a:r>
-              <a:rPr sz="2000" b="0">
-                <a:solidFill>
-                  <a:srgbClr val="FFFFFF"/>
-                </a:solidFill>
-                <a:latin typeface="Calibri"/>
-              </a:rPr>
-              <a:t>📂</a:t>
-            </a:r>
-          </a:p>
-        </p:txBody>
-      </p:sp>
-      <p:sp>
-        <p:nvSpPr>
-          <p:cNvPr id="7" name="TextBox 6"/>
-          <p:cNvSpPr txBox="1"/>
-          <p:nvPr/>
-        </p:nvSpPr>
-        <p:spPr>
-          <a:xfrm>
-            <a:off x="365760" y="3703320"/>
-            <a:ext cx="2011680" cy="320040"/>
-          </a:xfrm>
-          <a:prstGeom prst="rect">
-            <a:avLst/>
-          </a:prstGeom>
-          <a:noFill/>
-        </p:spPr>
-        <p:txBody>
-          <a:bodyPr wrap="square">
-            <a:spAutoFit/>
-          </a:bodyPr>
-          <a:lstStyle/>
-          <a:p>
-            <a:pPr algn="ctr"/>
-            <a:r>
-              <a:rPr sz="1100" b="1">
-                <a:solidFill>
-                  <a:srgbClr val="FFFFFF"/>
-                </a:solidFill>
-                <a:latin typeface="Calibri"/>
-              </a:rPr>
-              <a:t>Datasets</a:t>
-            </a:r>
-          </a:p>
-        </p:txBody>
-      </p:sp>
-      <p:sp>
-        <p:nvSpPr>
-          <p:cNvPr id="8" name="TextBox 7"/>
-          <p:cNvSpPr txBox="1"/>
-          <p:nvPr/>
-        </p:nvSpPr>
-        <p:spPr>
-          <a:xfrm>
-            <a:off x="365760" y="4005072"/>
-            <a:ext cx="2011680" cy="502920"/>
-          </a:xfrm>
-          <a:prstGeom prst="rect">
-            <a:avLst/>
-          </a:prstGeom>
-          <a:noFill/>
-        </p:spPr>
-        <p:txBody>
-          <a:bodyPr wrap="square">
-            <a:spAutoFit/>
-          </a:bodyPr>
-          <a:lstStyle/>
-          <a:p>
-            <a:pPr algn="ctr"/>
-            <a:r>
-              <a:rPr sz="800" b="0">
-                <a:solidFill>
-                  <a:srgbClr val="BBDEFB"/>
-                </a:solidFill>
-                <a:latin typeface="Calibri"/>
-              </a:rPr>
-              <a:t>10 cleaned CSVs + 6 analytics outputs</a:t>
-            </a:r>
-          </a:p>
-        </p:txBody>
-      </p:sp>
-      <p:sp>
-        <p:nvSpPr>
-          <p:cNvPr id="9" name="Rectangle 8"/>
+          <p:cNvPr id="3" name="Rectangle 2"/>
           <p:cNvSpPr/>
           <p:nvPr/>
         </p:nvSpPr>
         <p:spPr>
           <a:xfrm>
-            <a:off x="2560320" y="3291840"/>
-            <a:ext cx="2011680" cy="1371600"/>
+            <a:off x="0" y="4974336"/>
+            <a:ext cx="9144000" cy="173736"/>
           </a:xfrm>
           <a:prstGeom prst="rect">
             <a:avLst/>
           </a:prstGeom>
           <a:solidFill>
-            <a:srgbClr val="1976D2"/>
+            <a:srgbClr val="E65100"/>
           </a:solidFill>
           <a:ln>
             <a:noFill/>
@@ -5144,125 +5175,90 @@
       </p:sp>
       <p:sp>
         <p:nvSpPr>
-          <p:cNvPr id="10" name="TextBox 9"/>
-          <p:cNvSpPr txBox="1"/>
-          <p:nvPr/>
-        </p:nvSpPr>
-        <p:spPr>
-          <a:xfrm>
-            <a:off x="2560320" y="3310128"/>
-            <a:ext cx="2011680" cy="411480"/>
-          </a:xfrm>
-          <a:prstGeom prst="rect">
-            <a:avLst/>
-          </a:prstGeom>
-          <a:noFill/>
-        </p:spPr>
-        <p:txBody>
-          <a:bodyPr wrap="square">
-            <a:spAutoFit/>
-          </a:bodyPr>
-          <a:lstStyle/>
-          <a:p>
-            <a:pPr algn="ctr"/>
-            <a:r>
-              <a:rPr sz="2000" b="0">
+          <p:cNvPr id="4" name="TextBox 3"/>
+          <p:cNvSpPr txBox="1"/>
+          <p:nvPr/>
+        </p:nvSpPr>
+        <p:spPr>
+          <a:xfrm>
+            <a:off x="457200" y="566928"/>
+            <a:ext cx="8229600" cy="914400"/>
+          </a:xfrm>
+          <a:prstGeom prst="rect">
+            <a:avLst/>
+          </a:prstGeom>
+          <a:noFill/>
+        </p:spPr>
+        <p:txBody>
+          <a:bodyPr wrap="square">
+            <a:spAutoFit/>
+          </a:bodyPr>
+          <a:lstStyle/>
+          <a:p>
+            <a:pPr algn="ctr"/>
+            <a:r>
+              <a:rPr sz="4400" b="1">
                 <a:solidFill>
                   <a:srgbClr val="FFFFFF"/>
                 </a:solidFill>
                 <a:latin typeface="Calibri"/>
               </a:rPr>
-              <a:t>📊</a:t>
-            </a:r>
-          </a:p>
-        </p:txBody>
-      </p:sp>
-      <p:sp>
-        <p:nvSpPr>
-          <p:cNvPr id="11" name="TextBox 10"/>
-          <p:cNvSpPr txBox="1"/>
-          <p:nvPr/>
-        </p:nvSpPr>
-        <p:spPr>
-          <a:xfrm>
-            <a:off x="2560320" y="3703320"/>
-            <a:ext cx="2011680" cy="320040"/>
-          </a:xfrm>
-          <a:prstGeom prst="rect">
-            <a:avLst/>
-          </a:prstGeom>
-          <a:noFill/>
-        </p:spPr>
-        <p:txBody>
-          <a:bodyPr wrap="square">
-            <a:spAutoFit/>
-          </a:bodyPr>
-          <a:lstStyle/>
-          <a:p>
-            <a:pPr algn="ctr"/>
-            <a:r>
-              <a:rPr sz="1100" b="1">
-                <a:solidFill>
-                  <a:srgbClr val="FFFFFF"/>
-                </a:solidFill>
-                <a:latin typeface="Calibri"/>
-              </a:rPr>
-              <a:t>Charts</a:t>
-            </a:r>
-          </a:p>
-        </p:txBody>
-      </p:sp>
-      <p:sp>
-        <p:nvSpPr>
-          <p:cNvPr id="12" name="TextBox 11"/>
-          <p:cNvSpPr txBox="1"/>
-          <p:nvPr/>
-        </p:nvSpPr>
-        <p:spPr>
-          <a:xfrm>
-            <a:off x="2560320" y="4005072"/>
-            <a:ext cx="2011680" cy="502920"/>
-          </a:xfrm>
-          <a:prstGeom prst="rect">
-            <a:avLst/>
-          </a:prstGeom>
-          <a:noFill/>
-        </p:spPr>
-        <p:txBody>
-          <a:bodyPr wrap="square">
-            <a:spAutoFit/>
-          </a:bodyPr>
-          <a:lstStyle/>
-          <a:p>
-            <a:pPr algn="ctr"/>
-            <a:r>
-              <a:rPr sz="800" b="0">
-                <a:solidFill>
-                  <a:srgbClr val="BBDEFB"/>
-                </a:solidFill>
-                <a:latin typeface="Calibri"/>
-              </a:rPr>
-              <a:t>30 publication-quality PNG charts</a:t>
-            </a:r>
-          </a:p>
-        </p:txBody>
-      </p:sp>
-      <p:sp>
-        <p:nvSpPr>
-          <p:cNvPr id="13" name="Rectangle 12"/>
+              <a:t>Thank You</a:t>
+            </a:r>
+          </a:p>
+        </p:txBody>
+      </p:sp>
+      <p:sp>
+        <p:nvSpPr>
+          <p:cNvPr id="5" name="TextBox 4"/>
+          <p:cNvSpPr txBox="1"/>
+          <p:nvPr/>
+        </p:nvSpPr>
+        <p:spPr>
+          <a:xfrm>
+            <a:off x="457200" y="1536192"/>
+            <a:ext cx="8229600" cy="475488"/>
+          </a:xfrm>
+          <a:prstGeom prst="rect">
+            <a:avLst/>
+          </a:prstGeom>
+          <a:noFill/>
+        </p:spPr>
+        <p:txBody>
+          <a:bodyPr wrap="square">
+            <a:spAutoFit/>
+          </a:bodyPr>
+          <a:lstStyle/>
+          <a:p>
+            <a:pPr algn="ctr"/>
+            <a:r>
+              <a:rPr sz="1800" b="0">
+                <a:solidFill>
+                  <a:srgbClr val="A5D6A7"/>
+                </a:solidFill>
+                <a:latin typeface="Calibri"/>
+              </a:rPr>
+              <a:t>Bluestock MF Analytics — Capstone Project v1.0</a:t>
+            </a:r>
+          </a:p>
+        </p:txBody>
+      </p:sp>
+      <p:sp>
+        <p:nvSpPr>
+          <p:cNvPr id="6" name="Rectangle 5"/>
           <p:cNvSpPr/>
           <p:nvPr/>
         </p:nvSpPr>
         <p:spPr>
           <a:xfrm>
-            <a:off x="4754880" y="3291840"/>
-            <a:ext cx="2011680" cy="1371600"/>
+            <a:off x="2560320" y="2121408"/>
+            <a:ext cx="4023360" cy="54864"/>
           </a:xfrm>
           <a:prstGeom prst="rect">
             <a:avLst/>
           </a:prstGeom>
           <a:solidFill>
-            <a:srgbClr val="1976D2"/>
+            <a:srgbClr val="FF6D00"/>
           </a:solidFill>
           <a:ln>
             <a:noFill/>
@@ -5292,125 +5288,90 @@
       </p:sp>
       <p:sp>
         <p:nvSpPr>
-          <p:cNvPr id="14" name="TextBox 13"/>
-          <p:cNvSpPr txBox="1"/>
-          <p:nvPr/>
-        </p:nvSpPr>
-        <p:spPr>
-          <a:xfrm>
-            <a:off x="4754880" y="3310128"/>
-            <a:ext cx="2011680" cy="411480"/>
-          </a:xfrm>
-          <a:prstGeom prst="rect">
-            <a:avLst/>
-          </a:prstGeom>
-          <a:noFill/>
-        </p:spPr>
-        <p:txBody>
-          <a:bodyPr wrap="square">
-            <a:spAutoFit/>
-          </a:bodyPr>
-          <a:lstStyle/>
-          <a:p>
-            <a:pPr algn="ctr"/>
-            <a:r>
-              <a:rPr sz="2000" b="0">
+          <p:cNvPr id="7" name="TextBox 6"/>
+          <p:cNvSpPr txBox="1"/>
+          <p:nvPr/>
+        </p:nvSpPr>
+        <p:spPr>
+          <a:xfrm>
+            <a:off x="457200" y="2267712"/>
+            <a:ext cx="8229600" cy="365760"/>
+          </a:xfrm>
+          <a:prstGeom prst="rect">
+            <a:avLst/>
+          </a:prstGeom>
+          <a:noFill/>
+        </p:spPr>
+        <p:txBody>
+          <a:bodyPr wrap="square">
+            <a:spAutoFit/>
+          </a:bodyPr>
+          <a:lstStyle/>
+          <a:p>
+            <a:pPr algn="ctr"/>
+            <a:r>
+              <a:rPr sz="1200" b="0">
+                <a:solidFill>
+                  <a:srgbClr val="C8E6C9"/>
+                </a:solidFill>
+                <a:latin typeface="Calibri"/>
+              </a:rPr>
+              <a:t>Source Code &amp; Documentation</a:t>
+            </a:r>
+          </a:p>
+        </p:txBody>
+      </p:sp>
+      <p:sp>
+        <p:nvSpPr>
+          <p:cNvPr id="8" name="TextBox 7"/>
+          <p:cNvSpPr txBox="1"/>
+          <p:nvPr/>
+        </p:nvSpPr>
+        <p:spPr>
+          <a:xfrm>
+            <a:off x="457200" y="2606040"/>
+            <a:ext cx="8229600" cy="384048"/>
+          </a:xfrm>
+          <a:prstGeom prst="rect">
+            <a:avLst/>
+          </a:prstGeom>
+          <a:noFill/>
+        </p:spPr>
+        <p:txBody>
+          <a:bodyPr wrap="square">
+            <a:spAutoFit/>
+          </a:bodyPr>
+          <a:lstStyle/>
+          <a:p>
+            <a:pPr algn="ctr"/>
+            <a:r>
+              <a:rPr sz="1300" b="1">
                 <a:solidFill>
                   <a:srgbClr val="FFFFFF"/>
                 </a:solidFill>
                 <a:latin typeface="Calibri"/>
               </a:rPr>
-              <a:t>🤖</a:t>
-            </a:r>
-          </a:p>
-        </p:txBody>
-      </p:sp>
-      <p:sp>
-        <p:nvSpPr>
-          <p:cNvPr id="15" name="TextBox 14"/>
-          <p:cNvSpPr txBox="1"/>
-          <p:nvPr/>
-        </p:nvSpPr>
-        <p:spPr>
-          <a:xfrm>
-            <a:off x="4754880" y="3703320"/>
-            <a:ext cx="2011680" cy="320040"/>
-          </a:xfrm>
-          <a:prstGeom prst="rect">
-            <a:avLst/>
-          </a:prstGeom>
-          <a:noFill/>
-        </p:spPr>
-        <p:txBody>
-          <a:bodyPr wrap="square">
-            <a:spAutoFit/>
-          </a:bodyPr>
-          <a:lstStyle/>
-          <a:p>
-            <a:pPr algn="ctr"/>
-            <a:r>
-              <a:rPr sz="1100" b="1">
-                <a:solidFill>
-                  <a:srgbClr val="FFFFFF"/>
-                </a:solidFill>
-                <a:latin typeface="Calibri"/>
-              </a:rPr>
-              <a:t>Recommender</a:t>
-            </a:r>
-          </a:p>
-        </p:txBody>
-      </p:sp>
-      <p:sp>
-        <p:nvSpPr>
-          <p:cNvPr id="16" name="TextBox 15"/>
-          <p:cNvSpPr txBox="1"/>
-          <p:nvPr/>
-        </p:nvSpPr>
-        <p:spPr>
-          <a:xfrm>
-            <a:off x="4754880" y="4005072"/>
-            <a:ext cx="2011680" cy="502920"/>
-          </a:xfrm>
-          <a:prstGeom prst="rect">
-            <a:avLst/>
-          </a:prstGeom>
-          <a:noFill/>
-        </p:spPr>
-        <p:txBody>
-          <a:bodyPr wrap="square">
-            <a:spAutoFit/>
-          </a:bodyPr>
-          <a:lstStyle/>
-          <a:p>
-            <a:pPr algn="ctr"/>
-            <a:r>
-              <a:rPr sz="800" b="0">
-                <a:solidFill>
-                  <a:srgbClr val="BBDEFB"/>
-                </a:solidFill>
-                <a:latin typeface="Calibri"/>
-              </a:rPr>
-              <a:t>python recommender.py --risk Moderate</a:t>
-            </a:r>
-          </a:p>
-        </p:txBody>
-      </p:sp>
-      <p:sp>
-        <p:nvSpPr>
-          <p:cNvPr id="17" name="Rectangle 16"/>
+              <a:t>github.com/&lt;your-username&gt;/MutualFundAnalytics</a:t>
+            </a:r>
+          </a:p>
+        </p:txBody>
+      </p:sp>
+      <p:sp>
+        <p:nvSpPr>
+          <p:cNvPr id="9" name="Rectangle 8"/>
           <p:cNvSpPr/>
           <p:nvPr/>
         </p:nvSpPr>
         <p:spPr>
           <a:xfrm>
-            <a:off x="6949440" y="3291840"/>
-            <a:ext cx="2011680" cy="1371600"/>
+            <a:off x="347472" y="3310128"/>
+            <a:ext cx="2011680" cy="1389888"/>
           </a:xfrm>
           <a:prstGeom prst="rect">
             <a:avLst/>
           </a:prstGeom>
           <a:solidFill>
-            <a:srgbClr val="1976D2"/>
+            <a:srgbClr val="2E7D32"/>
           </a:solidFill>
           <a:ln>
             <a:noFill/>
@@ -5440,14 +5401,310 @@
       </p:sp>
       <p:sp>
         <p:nvSpPr>
+          <p:cNvPr id="10" name="TextBox 9"/>
+          <p:cNvSpPr txBox="1"/>
+          <p:nvPr/>
+        </p:nvSpPr>
+        <p:spPr>
+          <a:xfrm>
+            <a:off x="347472" y="3328416"/>
+            <a:ext cx="2011680" cy="457200"/>
+          </a:xfrm>
+          <a:prstGeom prst="rect">
+            <a:avLst/>
+          </a:prstGeom>
+          <a:noFill/>
+        </p:spPr>
+        <p:txBody>
+          <a:bodyPr wrap="square">
+            <a:spAutoFit/>
+          </a:bodyPr>
+          <a:lstStyle/>
+          <a:p>
+            <a:pPr algn="ctr"/>
+            <a:r>
+              <a:rPr sz="2000" b="0">
+                <a:solidFill>
+                  <a:srgbClr val="FFFFFF"/>
+                </a:solidFill>
+                <a:latin typeface="Calibri"/>
+              </a:rPr>
+              <a:t>📂</a:t>
+            </a:r>
+          </a:p>
+        </p:txBody>
+      </p:sp>
+      <p:sp>
+        <p:nvSpPr>
+          <p:cNvPr id="11" name="TextBox 10"/>
+          <p:cNvSpPr txBox="1"/>
+          <p:nvPr/>
+        </p:nvSpPr>
+        <p:spPr>
+          <a:xfrm>
+            <a:off x="347472" y="3749039"/>
+            <a:ext cx="2011680" cy="347472"/>
+          </a:xfrm>
+          <a:prstGeom prst="rect">
+            <a:avLst/>
+          </a:prstGeom>
+          <a:noFill/>
+        </p:spPr>
+        <p:txBody>
+          <a:bodyPr wrap="square">
+            <a:spAutoFit/>
+          </a:bodyPr>
+          <a:lstStyle/>
+          <a:p>
+            <a:pPr algn="ctr"/>
+            <a:r>
+              <a:rPr sz="1100" b="1">
+                <a:solidFill>
+                  <a:srgbClr val="FFFFFF"/>
+                </a:solidFill>
+                <a:latin typeface="Calibri"/>
+              </a:rPr>
+              <a:t>Datasets</a:t>
+            </a:r>
+          </a:p>
+        </p:txBody>
+      </p:sp>
+      <p:sp>
+        <p:nvSpPr>
+          <p:cNvPr id="12" name="TextBox 11"/>
+          <p:cNvSpPr txBox="1"/>
+          <p:nvPr/>
+        </p:nvSpPr>
+        <p:spPr>
+          <a:xfrm>
+            <a:off x="347472" y="4069080"/>
+            <a:ext cx="2011680" cy="530352"/>
+          </a:xfrm>
+          <a:prstGeom prst="rect">
+            <a:avLst/>
+          </a:prstGeom>
+          <a:noFill/>
+        </p:spPr>
+        <p:txBody>
+          <a:bodyPr wrap="square">
+            <a:spAutoFit/>
+          </a:bodyPr>
+          <a:lstStyle/>
+          <a:p>
+            <a:pPr algn="ctr"/>
+            <a:r>
+              <a:rPr sz="800" b="0">
+                <a:solidFill>
+                  <a:srgbClr val="E8F5E9"/>
+                </a:solidFill>
+                <a:latin typeface="Calibri"/>
+              </a:rPr>
+              <a:t>10 CSVs + 6 analytics outputs</a:t>
+            </a:r>
+          </a:p>
+        </p:txBody>
+      </p:sp>
+      <p:sp>
+        <p:nvSpPr>
+          <p:cNvPr id="13" name="Rectangle 12"/>
+          <p:cNvSpPr/>
+          <p:nvPr/>
+        </p:nvSpPr>
+        <p:spPr>
+          <a:xfrm>
+            <a:off x="2523744" y="3310128"/>
+            <a:ext cx="2011680" cy="1389888"/>
+          </a:xfrm>
+          <a:prstGeom prst="rect">
+            <a:avLst/>
+          </a:prstGeom>
+          <a:solidFill>
+            <a:srgbClr val="E65100"/>
+          </a:solidFill>
+          <a:ln>
+            <a:noFill/>
+          </a:ln>
+        </p:spPr>
+        <p:style>
+          <a:lnRef idx="1">
+            <a:schemeClr val="accent1"/>
+          </a:lnRef>
+          <a:fillRef idx="3">
+            <a:schemeClr val="accent1"/>
+          </a:fillRef>
+          <a:effectRef idx="2">
+            <a:schemeClr val="accent1"/>
+          </a:effectRef>
+          <a:fontRef idx="minor">
+            <a:schemeClr val="lt1"/>
+          </a:fontRef>
+        </p:style>
+        <p:txBody>
+          <a:bodyPr rtlCol="0" anchor="ctr"/>
+          <a:lstStyle/>
+          <a:p>
+            <a:pPr algn="ctr"/>
+          </a:p>
+        </p:txBody>
+      </p:sp>
+      <p:sp>
+        <p:nvSpPr>
+          <p:cNvPr id="14" name="TextBox 13"/>
+          <p:cNvSpPr txBox="1"/>
+          <p:nvPr/>
+        </p:nvSpPr>
+        <p:spPr>
+          <a:xfrm>
+            <a:off x="2523744" y="3328416"/>
+            <a:ext cx="2011680" cy="457200"/>
+          </a:xfrm>
+          <a:prstGeom prst="rect">
+            <a:avLst/>
+          </a:prstGeom>
+          <a:noFill/>
+        </p:spPr>
+        <p:txBody>
+          <a:bodyPr wrap="square">
+            <a:spAutoFit/>
+          </a:bodyPr>
+          <a:lstStyle/>
+          <a:p>
+            <a:pPr algn="ctr"/>
+            <a:r>
+              <a:rPr sz="2000" b="0">
+                <a:solidFill>
+                  <a:srgbClr val="FFFFFF"/>
+                </a:solidFill>
+                <a:latin typeface="Calibri"/>
+              </a:rPr>
+              <a:t>📊</a:t>
+            </a:r>
+          </a:p>
+        </p:txBody>
+      </p:sp>
+      <p:sp>
+        <p:nvSpPr>
+          <p:cNvPr id="15" name="TextBox 14"/>
+          <p:cNvSpPr txBox="1"/>
+          <p:nvPr/>
+        </p:nvSpPr>
+        <p:spPr>
+          <a:xfrm>
+            <a:off x="2523744" y="3749039"/>
+            <a:ext cx="2011680" cy="347472"/>
+          </a:xfrm>
+          <a:prstGeom prst="rect">
+            <a:avLst/>
+          </a:prstGeom>
+          <a:noFill/>
+        </p:spPr>
+        <p:txBody>
+          <a:bodyPr wrap="square">
+            <a:spAutoFit/>
+          </a:bodyPr>
+          <a:lstStyle/>
+          <a:p>
+            <a:pPr algn="ctr"/>
+            <a:r>
+              <a:rPr sz="1100" b="1">
+                <a:solidFill>
+                  <a:srgbClr val="FFFFFF"/>
+                </a:solidFill>
+                <a:latin typeface="Calibri"/>
+              </a:rPr>
+              <a:t>Charts</a:t>
+            </a:r>
+          </a:p>
+        </p:txBody>
+      </p:sp>
+      <p:sp>
+        <p:nvSpPr>
+          <p:cNvPr id="16" name="TextBox 15"/>
+          <p:cNvSpPr txBox="1"/>
+          <p:nvPr/>
+        </p:nvSpPr>
+        <p:spPr>
+          <a:xfrm>
+            <a:off x="2523744" y="4069080"/>
+            <a:ext cx="2011680" cy="530352"/>
+          </a:xfrm>
+          <a:prstGeom prst="rect">
+            <a:avLst/>
+          </a:prstGeom>
+          <a:noFill/>
+        </p:spPr>
+        <p:txBody>
+          <a:bodyPr wrap="square">
+            <a:spAutoFit/>
+          </a:bodyPr>
+          <a:lstStyle/>
+          <a:p>
+            <a:pPr algn="ctr"/>
+            <a:r>
+              <a:rPr sz="800" b="0">
+                <a:solidFill>
+                  <a:srgbClr val="FFF3E0"/>
+                </a:solidFill>
+                <a:latin typeface="Calibri"/>
+              </a:rPr>
+              <a:t>30 publication-quality PNGs</a:t>
+            </a:r>
+          </a:p>
+        </p:txBody>
+      </p:sp>
+      <p:sp>
+        <p:nvSpPr>
+          <p:cNvPr id="17" name="Rectangle 16"/>
+          <p:cNvSpPr/>
+          <p:nvPr/>
+        </p:nvSpPr>
+        <p:spPr>
+          <a:xfrm>
+            <a:off x="4700016" y="3310128"/>
+            <a:ext cx="2011680" cy="1389888"/>
+          </a:xfrm>
+          <a:prstGeom prst="rect">
+            <a:avLst/>
+          </a:prstGeom>
+          <a:solidFill>
+            <a:srgbClr val="2E7D32"/>
+          </a:solidFill>
+          <a:ln>
+            <a:noFill/>
+          </a:ln>
+        </p:spPr>
+        <p:style>
+          <a:lnRef idx="1">
+            <a:schemeClr val="accent1"/>
+          </a:lnRef>
+          <a:fillRef idx="3">
+            <a:schemeClr val="accent1"/>
+          </a:fillRef>
+          <a:effectRef idx="2">
+            <a:schemeClr val="accent1"/>
+          </a:effectRef>
+          <a:fontRef idx="minor">
+            <a:schemeClr val="lt1"/>
+          </a:fontRef>
+        </p:style>
+        <p:txBody>
+          <a:bodyPr rtlCol="0" anchor="ctr"/>
+          <a:lstStyle/>
+          <a:p>
+            <a:pPr algn="ctr"/>
+          </a:p>
+        </p:txBody>
+      </p:sp>
+      <p:sp>
+        <p:nvSpPr>
           <p:cNvPr id="18" name="TextBox 17"/>
           <p:cNvSpPr txBox="1"/>
           <p:nvPr/>
         </p:nvSpPr>
         <p:spPr>
           <a:xfrm>
-            <a:off x="6949440" y="3310128"/>
-            <a:ext cx="2011680" cy="411480"/>
+            <a:off x="4700016" y="3328416"/>
+            <a:ext cx="2011680" cy="457200"/>
           </a:xfrm>
           <a:prstGeom prst="rect">
             <a:avLst/>
@@ -5468,6 +5725,154 @@
                 </a:solidFill>
                 <a:latin typeface="Calibri"/>
               </a:rPr>
+              <a:t>🤖</a:t>
+            </a:r>
+          </a:p>
+        </p:txBody>
+      </p:sp>
+      <p:sp>
+        <p:nvSpPr>
+          <p:cNvPr id="19" name="TextBox 18"/>
+          <p:cNvSpPr txBox="1"/>
+          <p:nvPr/>
+        </p:nvSpPr>
+        <p:spPr>
+          <a:xfrm>
+            <a:off x="4700016" y="3749039"/>
+            <a:ext cx="2011680" cy="347472"/>
+          </a:xfrm>
+          <a:prstGeom prst="rect">
+            <a:avLst/>
+          </a:prstGeom>
+          <a:noFill/>
+        </p:spPr>
+        <p:txBody>
+          <a:bodyPr wrap="square">
+            <a:spAutoFit/>
+          </a:bodyPr>
+          <a:lstStyle/>
+          <a:p>
+            <a:pPr algn="ctr"/>
+            <a:r>
+              <a:rPr sz="1100" b="1">
+                <a:solidFill>
+                  <a:srgbClr val="FFFFFF"/>
+                </a:solidFill>
+                <a:latin typeface="Calibri"/>
+              </a:rPr>
+              <a:t>Recommender</a:t>
+            </a:r>
+          </a:p>
+        </p:txBody>
+      </p:sp>
+      <p:sp>
+        <p:nvSpPr>
+          <p:cNvPr id="20" name="TextBox 19"/>
+          <p:cNvSpPr txBox="1"/>
+          <p:nvPr/>
+        </p:nvSpPr>
+        <p:spPr>
+          <a:xfrm>
+            <a:off x="4700016" y="4069080"/>
+            <a:ext cx="2011680" cy="530352"/>
+          </a:xfrm>
+          <a:prstGeom prst="rect">
+            <a:avLst/>
+          </a:prstGeom>
+          <a:noFill/>
+        </p:spPr>
+        <p:txBody>
+          <a:bodyPr wrap="square">
+            <a:spAutoFit/>
+          </a:bodyPr>
+          <a:lstStyle/>
+          <a:p>
+            <a:pPr algn="ctr"/>
+            <a:r>
+              <a:rPr sz="800" b="0">
+                <a:solidFill>
+                  <a:srgbClr val="E8F5E9"/>
+                </a:solidFill>
+                <a:latin typeface="Calibri"/>
+              </a:rPr>
+              <a:t>python recommender.py --risk Moderate</a:t>
+            </a:r>
+          </a:p>
+        </p:txBody>
+      </p:sp>
+      <p:sp>
+        <p:nvSpPr>
+          <p:cNvPr id="21" name="Rectangle 20"/>
+          <p:cNvSpPr/>
+          <p:nvPr/>
+        </p:nvSpPr>
+        <p:spPr>
+          <a:xfrm>
+            <a:off x="6876288" y="3310128"/>
+            <a:ext cx="2011680" cy="1389888"/>
+          </a:xfrm>
+          <a:prstGeom prst="rect">
+            <a:avLst/>
+          </a:prstGeom>
+          <a:solidFill>
+            <a:srgbClr val="E65100"/>
+          </a:solidFill>
+          <a:ln>
+            <a:noFill/>
+          </a:ln>
+        </p:spPr>
+        <p:style>
+          <a:lnRef idx="1">
+            <a:schemeClr val="accent1"/>
+          </a:lnRef>
+          <a:fillRef idx="3">
+            <a:schemeClr val="accent1"/>
+          </a:fillRef>
+          <a:effectRef idx="2">
+            <a:schemeClr val="accent1"/>
+          </a:effectRef>
+          <a:fontRef idx="minor">
+            <a:schemeClr val="lt1"/>
+          </a:fontRef>
+        </p:style>
+        <p:txBody>
+          <a:bodyPr rtlCol="0" anchor="ctr"/>
+          <a:lstStyle/>
+          <a:p>
+            <a:pPr algn="ctr"/>
+          </a:p>
+        </p:txBody>
+      </p:sp>
+      <p:sp>
+        <p:nvSpPr>
+          <p:cNvPr id="22" name="TextBox 21"/>
+          <p:cNvSpPr txBox="1"/>
+          <p:nvPr/>
+        </p:nvSpPr>
+        <p:spPr>
+          <a:xfrm>
+            <a:off x="6876288" y="3328416"/>
+            <a:ext cx="2011680" cy="457200"/>
+          </a:xfrm>
+          <a:prstGeom prst="rect">
+            <a:avLst/>
+          </a:prstGeom>
+          <a:noFill/>
+        </p:spPr>
+        <p:txBody>
+          <a:bodyPr wrap="square">
+            <a:spAutoFit/>
+          </a:bodyPr>
+          <a:lstStyle/>
+          <a:p>
+            <a:pPr algn="ctr"/>
+            <a:r>
+              <a:rPr sz="2000" b="0">
+                <a:solidFill>
+                  <a:srgbClr val="FFFFFF"/>
+                </a:solidFill>
+                <a:latin typeface="Calibri"/>
+              </a:rPr>
               <a:t>📋</a:t>
             </a:r>
           </a:p>
@@ -5475,14 +5880,14 @@
       </p:sp>
       <p:sp>
         <p:nvSpPr>
-          <p:cNvPr id="19" name="TextBox 18"/>
-          <p:cNvSpPr txBox="1"/>
-          <p:nvPr/>
-        </p:nvSpPr>
-        <p:spPr>
-          <a:xfrm>
-            <a:off x="6949440" y="3703320"/>
-            <a:ext cx="2011680" cy="320040"/>
+          <p:cNvPr id="23" name="TextBox 22"/>
+          <p:cNvSpPr txBox="1"/>
+          <p:nvPr/>
+        </p:nvSpPr>
+        <p:spPr>
+          <a:xfrm>
+            <a:off x="6876288" y="3749039"/>
+            <a:ext cx="2011680" cy="347472"/>
           </a:xfrm>
           <a:prstGeom prst="rect">
             <a:avLst/>
@@ -5510,14 +5915,14 @@
       </p:sp>
       <p:sp>
         <p:nvSpPr>
-          <p:cNvPr id="20" name="TextBox 19"/>
-          <p:cNvSpPr txBox="1"/>
-          <p:nvPr/>
-        </p:nvSpPr>
-        <p:spPr>
-          <a:xfrm>
-            <a:off x="6949440" y="4005072"/>
-            <a:ext cx="2011680" cy="502920"/>
+          <p:cNvPr id="24" name="TextBox 23"/>
+          <p:cNvSpPr txBox="1"/>
+          <p:nvPr/>
+        </p:nvSpPr>
+        <p:spPr>
+          <a:xfrm>
+            <a:off x="6876288" y="4069080"/>
+            <a:ext cx="2011680" cy="530352"/>
           </a:xfrm>
           <a:prstGeom prst="rect">
             <a:avLst/>
@@ -5534,7 +5939,7 @@
             <a:r>
               <a:rPr sz="800" b="0">
                 <a:solidFill>
-                  <a:srgbClr val="BBDEFB"/>
+                  <a:srgbClr val="FFF3E0"/>
                 </a:solidFill>
                 <a:latin typeface="Calibri"/>
               </a:rPr>
@@ -5578,13 +5983,13 @@
         <p:spPr>
           <a:xfrm>
             <a:off x="0" y="0"/>
-            <a:ext cx="9144000" cy="1005840"/>
+            <a:ext cx="9144000" cy="960120"/>
           </a:xfrm>
           <a:prstGeom prst="rect">
             <a:avLst/>
           </a:prstGeom>
           <a:solidFill>
-            <a:srgbClr val="1565C0"/>
+            <a:srgbClr val="2E7D32"/>
           </a:solidFill>
           <a:ln>
             <a:noFill/>
@@ -5614,90 +6019,20 @@
       </p:sp>
       <p:sp>
         <p:nvSpPr>
-          <p:cNvPr id="3" name="TextBox 2"/>
-          <p:cNvSpPr txBox="1"/>
-          <p:nvPr/>
-        </p:nvSpPr>
-        <p:spPr>
-          <a:xfrm>
-            <a:off x="182880" y="45720"/>
-            <a:ext cx="8229600" cy="594360"/>
-          </a:xfrm>
-          <a:prstGeom prst="rect">
-            <a:avLst/>
-          </a:prstGeom>
-          <a:noFill/>
-        </p:spPr>
-        <p:txBody>
-          <a:bodyPr wrap="square">
-            <a:spAutoFit/>
-          </a:bodyPr>
-          <a:lstStyle/>
-          <a:p>
-            <a:pPr algn="l"/>
-            <a:r>
-              <a:rPr sz="2400" b="1">
-                <a:solidFill>
-                  <a:srgbClr val="FFFFFF"/>
-                </a:solidFill>
-                <a:latin typeface="Calibri"/>
-              </a:rPr>
-              <a:t>Problem &amp; Objective</a:t>
-            </a:r>
-          </a:p>
-        </p:txBody>
-      </p:sp>
-      <p:sp>
-        <p:nvSpPr>
-          <p:cNvPr id="4" name="TextBox 3"/>
-          <p:cNvSpPr txBox="1"/>
-          <p:nvPr/>
-        </p:nvSpPr>
-        <p:spPr>
-          <a:xfrm>
-            <a:off x="182880" y="658368"/>
-            <a:ext cx="8229600" cy="320040"/>
-          </a:xfrm>
-          <a:prstGeom prst="rect">
-            <a:avLst/>
-          </a:prstGeom>
-          <a:noFill/>
-        </p:spPr>
-        <p:txBody>
-          <a:bodyPr wrap="square">
-            <a:spAutoFit/>
-          </a:bodyPr>
-          <a:lstStyle/>
-          <a:p>
-            <a:pPr algn="l"/>
-            <a:r>
-              <a:rPr sz="1200" b="0">
-                <a:solidFill>
-                  <a:srgbClr val="BBDEFB"/>
-                </a:solidFill>
-                <a:latin typeface="Calibri"/>
-              </a:rPr>
-              <a:t>Why mutual fund analytics? What does this project solve?</a:t>
-            </a:r>
-          </a:p>
-        </p:txBody>
-      </p:sp>
-      <p:sp>
-        <p:nvSpPr>
-          <p:cNvPr id="5" name="Rectangle 4"/>
+          <p:cNvPr id="3" name="Rectangle 2"/>
           <p:cNvSpPr/>
           <p:nvPr/>
         </p:nvSpPr>
         <p:spPr>
           <a:xfrm>
-            <a:off x="0" y="4800600"/>
-            <a:ext cx="9144000" cy="342900"/>
+            <a:off x="0" y="896112"/>
+            <a:ext cx="9144000" cy="91440"/>
           </a:xfrm>
           <a:prstGeom prst="rect">
             <a:avLst/>
           </a:prstGeom>
           <a:solidFill>
-            <a:srgbClr val="E3F2FD"/>
+            <a:srgbClr val="E65100"/>
           </a:solidFill>
           <a:ln>
             <a:noFill/>
@@ -5727,60 +6062,93 @@
       </p:sp>
       <p:sp>
         <p:nvSpPr>
-          <p:cNvPr id="6" name="TextBox 5"/>
-          <p:cNvSpPr txBox="1"/>
-          <p:nvPr/>
-        </p:nvSpPr>
-        <p:spPr>
-          <a:xfrm>
-            <a:off x="91440" y="4828032"/>
-            <a:ext cx="8961120" cy="274320"/>
-          </a:xfrm>
-          <a:prstGeom prst="rect">
-            <a:avLst/>
-          </a:prstGeom>
-          <a:noFill/>
-        </p:spPr>
-        <p:txBody>
-          <a:bodyPr wrap="square">
-            <a:spAutoFit/>
-          </a:bodyPr>
-          <a:lstStyle/>
-          <a:p>
-            <a:pPr algn="ctr"/>
-            <a:r>
-              <a:rPr sz="800" b="0">
-                <a:solidFill>
-                  <a:srgbClr val="546E7A"/>
-                </a:solidFill>
-                <a:latin typeface="Calibri"/>
-              </a:rPr>
-              <a:t>Bluestock MF Analytics · Capstone Project 2026</a:t>
-            </a:r>
-          </a:p>
-        </p:txBody>
-      </p:sp>
-      <p:sp>
-        <p:nvSpPr>
-          <p:cNvPr id="7" name="Rectangle 6"/>
+          <p:cNvPr id="4" name="TextBox 3"/>
+          <p:cNvSpPr txBox="1"/>
+          <p:nvPr/>
+        </p:nvSpPr>
+        <p:spPr>
+          <a:xfrm>
+            <a:off x="182880" y="45720"/>
+            <a:ext cx="8778240" cy="594360"/>
+          </a:xfrm>
+          <a:prstGeom prst="rect">
+            <a:avLst/>
+          </a:prstGeom>
+          <a:noFill/>
+        </p:spPr>
+        <p:txBody>
+          <a:bodyPr wrap="square">
+            <a:spAutoFit/>
+          </a:bodyPr>
+          <a:lstStyle/>
+          <a:p>
+            <a:pPr algn="l"/>
+            <a:r>
+              <a:rPr sz="2200" b="1">
+                <a:solidFill>
+                  <a:srgbClr val="FFFFFF"/>
+                </a:solidFill>
+                <a:latin typeface="Calibri"/>
+              </a:rPr>
+              <a:t>Problem &amp; Objective</a:t>
+            </a:r>
+          </a:p>
+        </p:txBody>
+      </p:sp>
+      <p:sp>
+        <p:nvSpPr>
+          <p:cNvPr id="5" name="TextBox 4"/>
+          <p:cNvSpPr txBox="1"/>
+          <p:nvPr/>
+        </p:nvSpPr>
+        <p:spPr>
+          <a:xfrm>
+            <a:off x="182880" y="640080"/>
+            <a:ext cx="8778240" cy="292608"/>
+          </a:xfrm>
+          <a:prstGeom prst="rect">
+            <a:avLst/>
+          </a:prstGeom>
+          <a:noFill/>
+        </p:spPr>
+        <p:txBody>
+          <a:bodyPr wrap="square">
+            <a:spAutoFit/>
+          </a:bodyPr>
+          <a:lstStyle/>
+          <a:p>
+            <a:pPr algn="l"/>
+            <a:r>
+              <a:rPr sz="1100" b="0">
+                <a:solidFill>
+                  <a:srgbClr val="C8E6C9"/>
+                </a:solidFill>
+                <a:latin typeface="Calibri"/>
+              </a:rPr>
+              <a:t>Why mutual fund analytics? What does this project solve?</a:t>
+            </a:r>
+          </a:p>
+        </p:txBody>
+      </p:sp>
+      <p:sp>
+        <p:nvSpPr>
+          <p:cNvPr id="6" name="Rectangle 5"/>
           <p:cNvSpPr/>
           <p:nvPr/>
         </p:nvSpPr>
         <p:spPr>
           <a:xfrm>
-            <a:off x="274320" y="1143000"/>
-            <a:ext cx="8595360" cy="1005840"/>
+            <a:off x="0" y="4828032"/>
+            <a:ext cx="9144000" cy="320040"/>
           </a:xfrm>
           <a:prstGeom prst="rect">
             <a:avLst/>
           </a:prstGeom>
           <a:solidFill>
-            <a:srgbClr val="FFFFFF"/>
+            <a:srgbClr val="E8F5E9"/>
           </a:solidFill>
-          <a:ln w="12700">
-            <a:solidFill>
-              <a:srgbClr val="1565C0"/>
-            </a:solidFill>
+          <a:ln>
+            <a:noFill/>
           </a:ln>
         </p:spPr>
         <p:style>
@@ -5807,94 +6175,59 @@
       </p:sp>
       <p:sp>
         <p:nvSpPr>
-          <p:cNvPr id="8" name="TextBox 7"/>
-          <p:cNvSpPr txBox="1"/>
-          <p:nvPr/>
-        </p:nvSpPr>
-        <p:spPr>
-          <a:xfrm>
-            <a:off x="411480" y="1170432"/>
-            <a:ext cx="1828800" cy="411480"/>
-          </a:xfrm>
-          <a:prstGeom prst="rect">
-            <a:avLst/>
-          </a:prstGeom>
-          <a:noFill/>
-        </p:spPr>
-        <p:txBody>
-          <a:bodyPr wrap="square">
-            <a:spAutoFit/>
-          </a:bodyPr>
-          <a:lstStyle/>
-          <a:p>
-            <a:pPr algn="l"/>
-            <a:r>
-              <a:rPr sz="1300" b="1">
-                <a:solidFill>
-                  <a:srgbClr val="1565C0"/>
-                </a:solidFill>
-                <a:latin typeface="Calibri"/>
-              </a:rPr>
-              <a:t>📊 Problem</a:t>
-            </a:r>
-          </a:p>
-        </p:txBody>
-      </p:sp>
-      <p:sp>
-        <p:nvSpPr>
-          <p:cNvPr id="9" name="TextBox 8"/>
-          <p:cNvSpPr txBox="1"/>
-          <p:nvPr/>
-        </p:nvSpPr>
-        <p:spPr>
-          <a:xfrm>
-            <a:off x="2103120" y="1170432"/>
-            <a:ext cx="6583680" cy="548640"/>
-          </a:xfrm>
-          <a:prstGeom prst="rect">
-            <a:avLst/>
-          </a:prstGeom>
-          <a:noFill/>
-        </p:spPr>
-        <p:txBody>
-          <a:bodyPr wrap="square">
-            <a:spAutoFit/>
-          </a:bodyPr>
-          <a:lstStyle/>
-          <a:p>
-            <a:pPr algn="l"/>
-            <a:r>
-              <a:rPr sz="1100" b="0">
-                <a:solidFill>
-                  <a:srgbClr val="37474F"/>
-                </a:solidFill>
-                <a:latin typeface="Calibri"/>
-              </a:rPr>
-              <a:t>Retail investors lack quantitative tools to compare 1,900+ mutual funds on risk-adjusted metrics beyond simple returns.</a:t>
-            </a:r>
-          </a:p>
-        </p:txBody>
-      </p:sp>
-      <p:sp>
-        <p:nvSpPr>
-          <p:cNvPr id="10" name="Rectangle 9"/>
+          <p:cNvPr id="7" name="TextBox 6"/>
+          <p:cNvSpPr txBox="1"/>
+          <p:nvPr/>
+        </p:nvSpPr>
+        <p:spPr>
+          <a:xfrm>
+            <a:off x="91440" y="4846320"/>
+            <a:ext cx="8961120" cy="274320"/>
+          </a:xfrm>
+          <a:prstGeom prst="rect">
+            <a:avLst/>
+          </a:prstGeom>
+          <a:noFill/>
+        </p:spPr>
+        <p:txBody>
+          <a:bodyPr wrap="square">
+            <a:spAutoFit/>
+          </a:bodyPr>
+          <a:lstStyle/>
+          <a:p>
+            <a:pPr algn="ctr"/>
+            <a:r>
+              <a:rPr sz="800" b="0">
+                <a:solidFill>
+                  <a:srgbClr val="546E7A"/>
+                </a:solidFill>
+                <a:latin typeface="Calibri"/>
+              </a:rPr>
+              <a:t>Bluestock MF Analytics  ·  Capstone Project 2026</a:t>
+            </a:r>
+          </a:p>
+        </p:txBody>
+      </p:sp>
+      <p:sp>
+        <p:nvSpPr>
+          <p:cNvPr id="8" name="Rectangle 7"/>
           <p:cNvSpPr/>
           <p:nvPr/>
         </p:nvSpPr>
         <p:spPr>
           <a:xfrm>
-            <a:off x="274320" y="2286000"/>
-            <a:ext cx="8595360" cy="1005840"/>
+            <a:off x="274320" y="1143000"/>
+            <a:ext cx="8595360" cy="1024128"/>
           </a:xfrm>
           <a:prstGeom prst="rect">
             <a:avLst/>
           </a:prstGeom>
           <a:solidFill>
-            <a:srgbClr val="FFFFFF"/>
+            <a:srgbClr val="E8F5E9"/>
           </a:solidFill>
-          <a:ln w="12700">
+          <a:ln>
             <a:solidFill>
-              <a:srgbClr val="1565C0"/>
+              <a:srgbClr val="2E7D32"/>
             </a:solidFill>
           </a:ln>
         </p:spPr>
@@ -5922,14 +6255,14 @@
       </p:sp>
       <p:sp>
         <p:nvSpPr>
-          <p:cNvPr id="11" name="TextBox 10"/>
-          <p:cNvSpPr txBox="1"/>
-          <p:nvPr/>
-        </p:nvSpPr>
-        <p:spPr>
-          <a:xfrm>
-            <a:off x="411480" y="2313432"/>
-            <a:ext cx="1828800" cy="411480"/>
+          <p:cNvPr id="9" name="TextBox 8"/>
+          <p:cNvSpPr txBox="1"/>
+          <p:nvPr/>
+        </p:nvSpPr>
+        <p:spPr>
+          <a:xfrm>
+            <a:off x="384048" y="1170432"/>
+            <a:ext cx="1828800" cy="457200"/>
           </a:xfrm>
           <a:prstGeom prst="rect">
             <a:avLst/>
@@ -5944,27 +6277,27 @@
           <a:p>
             <a:pPr algn="l"/>
             <a:r>
-              <a:rPr sz="1300" b="1">
-                <a:solidFill>
-                  <a:srgbClr val="1565C0"/>
-                </a:solidFill>
-                <a:latin typeface="Calibri"/>
-              </a:rPr>
-              <a:t>🎯 Objective</a:t>
-            </a:r>
-          </a:p>
-        </p:txBody>
-      </p:sp>
-      <p:sp>
-        <p:nvSpPr>
-          <p:cNvPr id="12" name="TextBox 11"/>
-          <p:cNvSpPr txBox="1"/>
-          <p:nvPr/>
-        </p:nvSpPr>
-        <p:spPr>
-          <a:xfrm>
-            <a:off x="2103120" y="2313432"/>
-            <a:ext cx="6583680" cy="548640"/>
+              <a:rPr sz="1200" b="1">
+                <a:solidFill>
+                  <a:srgbClr val="2E7D32"/>
+                </a:solidFill>
+                <a:latin typeface="Calibri"/>
+              </a:rPr>
+              <a:t>📊  Problem</a:t>
+            </a:r>
+          </a:p>
+        </p:txBody>
+      </p:sp>
+      <p:sp>
+        <p:nvSpPr>
+          <p:cNvPr id="10" name="TextBox 9"/>
+          <p:cNvSpPr txBox="1"/>
+          <p:nvPr/>
+        </p:nvSpPr>
+        <p:spPr>
+          <a:xfrm>
+            <a:off x="2148840" y="1170432"/>
+            <a:ext cx="6583680" cy="594360"/>
           </a:xfrm>
           <a:prstGeom prst="rect">
             <a:avLst/>
@@ -5979,37 +6312,37 @@
           <a:p>
             <a:pPr algn="l"/>
             <a:r>
-              <a:rPr sz="1100" b="0">
+              <a:rPr sz="1000" b="0">
                 <a:solidFill>
                   <a:srgbClr val="37474F"/>
                 </a:solidFill>
                 <a:latin typeface="Calibri"/>
               </a:rPr>
-              <a:t>Build an end-to-end analytics platform: data ingestion → ETL → performance analytics → interactive dashboard → fund recommender.</a:t>
-            </a:r>
-          </a:p>
-        </p:txBody>
-      </p:sp>
-      <p:sp>
-        <p:nvSpPr>
-          <p:cNvPr id="13" name="Rectangle 12"/>
+              <a:t>Retail investors lack quantitative tools to compare 1,900+ MF schemes on risk-adjusted metrics beyond simple returns.</a:t>
+            </a:r>
+          </a:p>
+        </p:txBody>
+      </p:sp>
+      <p:sp>
+        <p:nvSpPr>
+          <p:cNvPr id="11" name="Rectangle 10"/>
           <p:cNvSpPr/>
           <p:nvPr/>
         </p:nvSpPr>
         <p:spPr>
           <a:xfrm>
-            <a:off x="274320" y="3429000"/>
-            <a:ext cx="8595360" cy="1005840"/>
+            <a:off x="274320" y="2286000"/>
+            <a:ext cx="8595360" cy="1024128"/>
           </a:xfrm>
           <a:prstGeom prst="rect">
             <a:avLst/>
           </a:prstGeom>
           <a:solidFill>
-            <a:srgbClr val="FFFFFF"/>
+            <a:srgbClr val="FFF3E0"/>
           </a:solidFill>
-          <a:ln w="12700">
+          <a:ln>
             <a:solidFill>
-              <a:srgbClr val="1565C0"/>
+              <a:srgbClr val="E65100"/>
             </a:solidFill>
           </a:ln>
         </p:spPr>
@@ -6037,14 +6370,14 @@
       </p:sp>
       <p:sp>
         <p:nvSpPr>
-          <p:cNvPr id="14" name="TextBox 13"/>
-          <p:cNvSpPr txBox="1"/>
-          <p:nvPr/>
-        </p:nvSpPr>
-        <p:spPr>
-          <a:xfrm>
-            <a:off x="411480" y="3456432"/>
-            <a:ext cx="1828800" cy="411480"/>
+          <p:cNvPr id="12" name="TextBox 11"/>
+          <p:cNvSpPr txBox="1"/>
+          <p:nvPr/>
+        </p:nvSpPr>
+        <p:spPr>
+          <a:xfrm>
+            <a:off x="384048" y="2313432"/>
+            <a:ext cx="1828800" cy="457200"/>
           </a:xfrm>
           <a:prstGeom prst="rect">
             <a:avLst/>
@@ -6059,14 +6392,94 @@
           <a:p>
             <a:pPr algn="l"/>
             <a:r>
-              <a:rPr sz="1300" b="1">
-                <a:solidFill>
-                  <a:srgbClr val="1565C0"/>
-                </a:solidFill>
-                <a:latin typeface="Calibri"/>
-              </a:rPr>
-              <a:t>📈 Scope</a:t>
-            </a:r>
+              <a:rPr sz="1200" b="1">
+                <a:solidFill>
+                  <a:srgbClr val="E65100"/>
+                </a:solidFill>
+                <a:latin typeface="Calibri"/>
+              </a:rPr>
+              <a:t>🎯  Objective</a:t>
+            </a:r>
+          </a:p>
+        </p:txBody>
+      </p:sp>
+      <p:sp>
+        <p:nvSpPr>
+          <p:cNvPr id="13" name="TextBox 12"/>
+          <p:cNvSpPr txBox="1"/>
+          <p:nvPr/>
+        </p:nvSpPr>
+        <p:spPr>
+          <a:xfrm>
+            <a:off x="2148840" y="2313432"/>
+            <a:ext cx="6583680" cy="594360"/>
+          </a:xfrm>
+          <a:prstGeom prst="rect">
+            <a:avLst/>
+          </a:prstGeom>
+          <a:noFill/>
+        </p:spPr>
+        <p:txBody>
+          <a:bodyPr wrap="square">
+            <a:spAutoFit/>
+          </a:bodyPr>
+          <a:lstStyle/>
+          <a:p>
+            <a:pPr algn="l"/>
+            <a:r>
+              <a:rPr sz="1000" b="0">
+                <a:solidFill>
+                  <a:srgbClr val="37474F"/>
+                </a:solidFill>
+                <a:latin typeface="Calibri"/>
+              </a:rPr>
+              <a:t>Build an end-to-end platform: data ingestion → ETL → performance analytics → interactive Power BI dashboard → CLI fund recommender.</a:t>
+            </a:r>
+          </a:p>
+        </p:txBody>
+      </p:sp>
+      <p:sp>
+        <p:nvSpPr>
+          <p:cNvPr id="14" name="Rectangle 13"/>
+          <p:cNvSpPr/>
+          <p:nvPr/>
+        </p:nvSpPr>
+        <p:spPr>
+          <a:xfrm>
+            <a:off x="274320" y="3429000"/>
+            <a:ext cx="8595360" cy="1024128"/>
+          </a:xfrm>
+          <a:prstGeom prst="rect">
+            <a:avLst/>
+          </a:prstGeom>
+          <a:solidFill>
+            <a:srgbClr val="E8F5E9"/>
+          </a:solidFill>
+          <a:ln>
+            <a:solidFill>
+              <a:srgbClr val="2E7D32"/>
+            </a:solidFill>
+          </a:ln>
+        </p:spPr>
+        <p:style>
+          <a:lnRef idx="1">
+            <a:schemeClr val="accent1"/>
+          </a:lnRef>
+          <a:fillRef idx="3">
+            <a:schemeClr val="accent1"/>
+          </a:fillRef>
+          <a:effectRef idx="2">
+            <a:schemeClr val="accent1"/>
+          </a:effectRef>
+          <a:fontRef idx="minor">
+            <a:schemeClr val="lt1"/>
+          </a:fontRef>
+        </p:style>
+        <p:txBody>
+          <a:bodyPr rtlCol="0" anchor="ctr"/>
+          <a:lstStyle/>
+          <a:p>
+            <a:pPr algn="ctr"/>
           </a:p>
         </p:txBody>
       </p:sp>
@@ -6078,8 +6491,8 @@
         </p:nvSpPr>
         <p:spPr>
           <a:xfrm>
-            <a:off x="2103120" y="3456432"/>
-            <a:ext cx="6583680" cy="548640"/>
+            <a:off x="384048" y="3456432"/>
+            <a:ext cx="1828800" cy="457200"/>
           </a:xfrm>
           <a:prstGeom prst="rect">
             <a:avLst/>
@@ -6094,13 +6507,48 @@
           <a:p>
             <a:pPr algn="l"/>
             <a:r>
-              <a:rPr sz="1100" b="0">
+              <a:rPr sz="1200" b="1">
+                <a:solidFill>
+                  <a:srgbClr val="2E7D32"/>
+                </a:solidFill>
+                <a:latin typeface="Calibri"/>
+              </a:rPr>
+              <a:t>📈  Scope</a:t>
+            </a:r>
+          </a:p>
+        </p:txBody>
+      </p:sp>
+      <p:sp>
+        <p:nvSpPr>
+          <p:cNvPr id="16" name="TextBox 15"/>
+          <p:cNvSpPr txBox="1"/>
+          <p:nvPr/>
+        </p:nvSpPr>
+        <p:spPr>
+          <a:xfrm>
+            <a:off x="2148840" y="3456432"/>
+            <a:ext cx="6583680" cy="594360"/>
+          </a:xfrm>
+          <a:prstGeom prst="rect">
+            <a:avLst/>
+          </a:prstGeom>
+          <a:noFill/>
+        </p:spPr>
+        <p:txBody>
+          <a:bodyPr wrap="square">
+            <a:spAutoFit/>
+          </a:bodyPr>
+          <a:lstStyle/>
+          <a:p>
+            <a:pPr algn="l"/>
+            <a:r>
+              <a:rPr sz="1000" b="0">
                 <a:solidFill>
                   <a:srgbClr val="37474F"/>
                 </a:solidFill>
                 <a:latin typeface="Calibri"/>
               </a:rPr>
-              <a:t>40 SEBI-regulated schemes (Large Cap, Mid/Small Cap, Debt, Hybrid), 2022–2025, covering NAV history, transactions, AUM, SIP flows.</a:t>
+              <a:t>40 SEBI-regulated schemes (Large/Mid/Small Cap, Debt, Hybrid), 2022–2025, covering NAV history, transactions, AUM, SIP flows.</a:t>
             </a:r>
           </a:p>
         </p:txBody>
@@ -6140,13 +6588,13 @@
         <p:spPr>
           <a:xfrm>
             <a:off x="0" y="0"/>
-            <a:ext cx="9144000" cy="1005840"/>
+            <a:ext cx="9144000" cy="960120"/>
           </a:xfrm>
           <a:prstGeom prst="rect">
             <a:avLst/>
           </a:prstGeom>
           <a:solidFill>
-            <a:srgbClr val="1565C0"/>
+            <a:srgbClr val="2E7D32"/>
           </a:solidFill>
           <a:ln>
             <a:noFill/>
@@ -6176,90 +6624,20 @@
       </p:sp>
       <p:sp>
         <p:nvSpPr>
-          <p:cNvPr id="3" name="TextBox 2"/>
-          <p:cNvSpPr txBox="1"/>
-          <p:nvPr/>
-        </p:nvSpPr>
-        <p:spPr>
-          <a:xfrm>
-            <a:off x="182880" y="45720"/>
-            <a:ext cx="8229600" cy="594360"/>
-          </a:xfrm>
-          <a:prstGeom prst="rect">
-            <a:avLst/>
-          </a:prstGeom>
-          <a:noFill/>
-        </p:spPr>
-        <p:txBody>
-          <a:bodyPr wrap="square">
-            <a:spAutoFit/>
-          </a:bodyPr>
-          <a:lstStyle/>
-          <a:p>
-            <a:pPr algn="l"/>
-            <a:r>
-              <a:rPr sz="2400" b="1">
-                <a:solidFill>
-                  <a:srgbClr val="FFFFFF"/>
-                </a:solidFill>
-                <a:latin typeface="Calibri"/>
-              </a:rPr>
-              <a:t>Data Sources</a:t>
-            </a:r>
-          </a:p>
-        </p:txBody>
-      </p:sp>
-      <p:sp>
-        <p:nvSpPr>
-          <p:cNvPr id="4" name="TextBox 3"/>
-          <p:cNvSpPr txBox="1"/>
-          <p:nvPr/>
-        </p:nvSpPr>
-        <p:spPr>
-          <a:xfrm>
-            <a:off x="182880" y="658368"/>
-            <a:ext cx="8229600" cy="320040"/>
-          </a:xfrm>
-          <a:prstGeom prst="rect">
-            <a:avLst/>
-          </a:prstGeom>
-          <a:noFill/>
-        </p:spPr>
-        <p:txBody>
-          <a:bodyPr wrap="square">
-            <a:spAutoFit/>
-          </a:bodyPr>
-          <a:lstStyle/>
-          <a:p>
-            <a:pPr algn="l"/>
-            <a:r>
-              <a:rPr sz="1200" b="0">
-                <a:solidFill>
-                  <a:srgbClr val="BBDEFB"/>
-                </a:solidFill>
-                <a:latin typeface="Calibri"/>
-              </a:rPr>
-              <a:t>10 structured datasets + live AMFI API</a:t>
-            </a:r>
-          </a:p>
-        </p:txBody>
-      </p:sp>
-      <p:sp>
-        <p:nvSpPr>
-          <p:cNvPr id="5" name="Rectangle 4"/>
+          <p:cNvPr id="3" name="Rectangle 2"/>
           <p:cNvSpPr/>
           <p:nvPr/>
         </p:nvSpPr>
         <p:spPr>
           <a:xfrm>
-            <a:off x="0" y="4800600"/>
-            <a:ext cx="9144000" cy="342900"/>
+            <a:off x="0" y="896112"/>
+            <a:ext cx="9144000" cy="91440"/>
           </a:xfrm>
           <a:prstGeom prst="rect">
             <a:avLst/>
           </a:prstGeom>
           <a:solidFill>
-            <a:srgbClr val="E3F2FD"/>
+            <a:srgbClr val="E65100"/>
           </a:solidFill>
           <a:ln>
             <a:noFill/>
@@ -6289,13 +6667,126 @@
       </p:sp>
       <p:sp>
         <p:nvSpPr>
-          <p:cNvPr id="6" name="TextBox 5"/>
-          <p:cNvSpPr txBox="1"/>
-          <p:nvPr/>
-        </p:nvSpPr>
-        <p:spPr>
-          <a:xfrm>
-            <a:off x="91440" y="4828032"/>
+          <p:cNvPr id="4" name="TextBox 3"/>
+          <p:cNvSpPr txBox="1"/>
+          <p:nvPr/>
+        </p:nvSpPr>
+        <p:spPr>
+          <a:xfrm>
+            <a:off x="182880" y="45720"/>
+            <a:ext cx="8778240" cy="594360"/>
+          </a:xfrm>
+          <a:prstGeom prst="rect">
+            <a:avLst/>
+          </a:prstGeom>
+          <a:noFill/>
+        </p:spPr>
+        <p:txBody>
+          <a:bodyPr wrap="square">
+            <a:spAutoFit/>
+          </a:bodyPr>
+          <a:lstStyle/>
+          <a:p>
+            <a:pPr algn="l"/>
+            <a:r>
+              <a:rPr sz="2200" b="1">
+                <a:solidFill>
+                  <a:srgbClr val="FFFFFF"/>
+                </a:solidFill>
+                <a:latin typeface="Calibri"/>
+              </a:rPr>
+              <a:t>Data Sources</a:t>
+            </a:r>
+          </a:p>
+        </p:txBody>
+      </p:sp>
+      <p:sp>
+        <p:nvSpPr>
+          <p:cNvPr id="5" name="TextBox 4"/>
+          <p:cNvSpPr txBox="1"/>
+          <p:nvPr/>
+        </p:nvSpPr>
+        <p:spPr>
+          <a:xfrm>
+            <a:off x="182880" y="640080"/>
+            <a:ext cx="8778240" cy="292608"/>
+          </a:xfrm>
+          <a:prstGeom prst="rect">
+            <a:avLst/>
+          </a:prstGeom>
+          <a:noFill/>
+        </p:spPr>
+        <p:txBody>
+          <a:bodyPr wrap="square">
+            <a:spAutoFit/>
+          </a:bodyPr>
+          <a:lstStyle/>
+          <a:p>
+            <a:pPr algn="l"/>
+            <a:r>
+              <a:rPr sz="1100" b="0">
+                <a:solidFill>
+                  <a:srgbClr val="C8E6C9"/>
+                </a:solidFill>
+                <a:latin typeface="Calibri"/>
+              </a:rPr>
+              <a:t>10 structured datasets + live AMFI API (mfapi.in)</a:t>
+            </a:r>
+          </a:p>
+        </p:txBody>
+      </p:sp>
+      <p:sp>
+        <p:nvSpPr>
+          <p:cNvPr id="6" name="Rectangle 5"/>
+          <p:cNvSpPr/>
+          <p:nvPr/>
+        </p:nvSpPr>
+        <p:spPr>
+          <a:xfrm>
+            <a:off x="0" y="4828032"/>
+            <a:ext cx="9144000" cy="320040"/>
+          </a:xfrm>
+          <a:prstGeom prst="rect">
+            <a:avLst/>
+          </a:prstGeom>
+          <a:solidFill>
+            <a:srgbClr val="E8F5E9"/>
+          </a:solidFill>
+          <a:ln>
+            <a:noFill/>
+          </a:ln>
+        </p:spPr>
+        <p:style>
+          <a:lnRef idx="1">
+            <a:schemeClr val="accent1"/>
+          </a:lnRef>
+          <a:fillRef idx="3">
+            <a:schemeClr val="accent1"/>
+          </a:fillRef>
+          <a:effectRef idx="2">
+            <a:schemeClr val="accent1"/>
+          </a:effectRef>
+          <a:fontRef idx="minor">
+            <a:schemeClr val="lt1"/>
+          </a:fontRef>
+        </p:style>
+        <p:txBody>
+          <a:bodyPr rtlCol="0" anchor="ctr"/>
+          <a:lstStyle/>
+          <a:p>
+            <a:pPr algn="ctr"/>
+          </a:p>
+        </p:txBody>
+      </p:sp>
+      <p:sp>
+        <p:nvSpPr>
+          <p:cNvPr id="7" name="TextBox 6"/>
+          <p:cNvSpPr txBox="1"/>
+          <p:nvPr/>
+        </p:nvSpPr>
+        <p:spPr>
+          <a:xfrm>
+            <a:off x="91440" y="4846320"/>
             <a:ext cx="8961120" cy="274320"/>
           </a:xfrm>
           <a:prstGeom prst="rect">
@@ -6317,21 +6808,21 @@
                 </a:solidFill>
                 <a:latin typeface="Calibri"/>
               </a:rPr>
-              <a:t>Bluestock MF Analytics · Capstone Project 2026</a:t>
-            </a:r>
-          </a:p>
-        </p:txBody>
-      </p:sp>
-      <p:sp>
-        <p:nvSpPr>
-          <p:cNvPr id="7" name="TextBox 6"/>
+              <a:t>Bluestock MF Analytics  ·  Capstone Project 2026</a:t>
+            </a:r>
+          </a:p>
+        </p:txBody>
+      </p:sp>
+      <p:sp>
+        <p:nvSpPr>
+          <p:cNvPr id="8" name="TextBox 7"/>
           <p:cNvSpPr txBox="1"/>
           <p:nvPr/>
         </p:nvSpPr>
         <p:spPr>
           <a:xfrm>
             <a:off x="274320" y="1143000"/>
-            <a:ext cx="4114800" cy="320040"/>
+            <a:ext cx="4297680" cy="347472"/>
           </a:xfrm>
           <a:prstGeom prst="rect">
             <a:avLst/>
@@ -6348,7 +6839,7 @@
             <a:r>
               <a:rPr sz="1100" b="1">
                 <a:solidFill>
-                  <a:srgbClr val="1565C0"/>
+                  <a:srgbClr val="2E7D32"/>
                 </a:solidFill>
                 <a:latin typeface="Calibri"/>
               </a:rPr>
@@ -6359,14 +6850,14 @@
       </p:sp>
       <p:sp>
         <p:nvSpPr>
-          <p:cNvPr id="8" name="TextBox 7"/>
-          <p:cNvSpPr txBox="1"/>
-          <p:nvPr/>
-        </p:nvSpPr>
-        <p:spPr>
-          <a:xfrm>
-            <a:off x="274320" y="1463040"/>
-            <a:ext cx="4114800" cy="320040"/>
+          <p:cNvPr id="9" name="TextBox 8"/>
+          <p:cNvSpPr txBox="1"/>
+          <p:nvPr/>
+        </p:nvSpPr>
+        <p:spPr>
+          <a:xfrm>
+            <a:off x="274320" y="1490472"/>
+            <a:ext cx="4297680" cy="274320"/>
           </a:xfrm>
           <a:prstGeom prst="rect">
             <a:avLst/>
@@ -6387,21 +6878,21 @@
                 </a:solidFill>
                 <a:latin typeface="Calibri"/>
               </a:rPr>
-              <a:t>AMFI codes, fund house, risk grade, expense ratio</a:t>
-            </a:r>
-          </a:p>
-        </p:txBody>
-      </p:sp>
-      <p:sp>
-        <p:nvSpPr>
-          <p:cNvPr id="9" name="TextBox 8"/>
-          <p:cNvSpPr txBox="1"/>
-          <p:nvPr/>
-        </p:nvSpPr>
-        <p:spPr>
-          <a:xfrm>
-            <a:off x="4846320" y="1143000"/>
-            <a:ext cx="4114800" cy="320040"/>
+              <a:t>AMFI codes, risk grade, expense ratio</a:t>
+            </a:r>
+          </a:p>
+        </p:txBody>
+      </p:sp>
+      <p:sp>
+        <p:nvSpPr>
+          <p:cNvPr id="10" name="TextBox 9"/>
+          <p:cNvSpPr txBox="1"/>
+          <p:nvPr/>
+        </p:nvSpPr>
+        <p:spPr>
+          <a:xfrm>
+            <a:off x="4892040" y="1143000"/>
+            <a:ext cx="4297680" cy="347472"/>
           </a:xfrm>
           <a:prstGeom prst="rect">
             <a:avLst/>
@@ -6418,7 +6909,7 @@
             <a:r>
               <a:rPr sz="1100" b="1">
                 <a:solidFill>
-                  <a:srgbClr val="1565C0"/>
+                  <a:srgbClr val="E65100"/>
                 </a:solidFill>
                 <a:latin typeface="Calibri"/>
               </a:rPr>
@@ -6429,14 +6920,14 @@
       </p:sp>
       <p:sp>
         <p:nvSpPr>
-          <p:cNvPr id="10" name="TextBox 9"/>
-          <p:cNvSpPr txBox="1"/>
-          <p:nvPr/>
-        </p:nvSpPr>
-        <p:spPr>
-          <a:xfrm>
-            <a:off x="4846320" y="1463040"/>
-            <a:ext cx="4114800" cy="320040"/>
+          <p:cNvPr id="11" name="TextBox 10"/>
+          <p:cNvSpPr txBox="1"/>
+          <p:nvPr/>
+        </p:nvSpPr>
+        <p:spPr>
+          <a:xfrm>
+            <a:off x="4892040" y="1490472"/>
+            <a:ext cx="4297680" cy="274320"/>
           </a:xfrm>
           <a:prstGeom prst="rect">
             <a:avLst/>
@@ -6457,21 +6948,21 @@
                 </a:solidFill>
                 <a:latin typeface="Calibri"/>
               </a:rPr>
-              <a:t>Daily NAV per scheme, 2022–2025, forward-filled</a:t>
-            </a:r>
-          </a:p>
-        </p:txBody>
-      </p:sp>
-      <p:sp>
-        <p:nvSpPr>
-          <p:cNvPr id="11" name="TextBox 10"/>
+              <a:t>Daily NAV, 2022–2025, ffilled</a:t>
+            </a:r>
+          </a:p>
+        </p:txBody>
+      </p:sp>
+      <p:sp>
+        <p:nvSpPr>
+          <p:cNvPr id="12" name="TextBox 11"/>
           <p:cNvSpPr txBox="1"/>
           <p:nvPr/>
         </p:nvSpPr>
         <p:spPr>
           <a:xfrm>
             <a:off x="274320" y="1947672"/>
-            <a:ext cx="4114800" cy="320040"/>
+            <a:ext cx="4297680" cy="347472"/>
           </a:xfrm>
           <a:prstGeom prst="rect">
             <a:avLst/>
@@ -6488,7 +6979,7 @@
             <a:r>
               <a:rPr sz="1100" b="1">
                 <a:solidFill>
-                  <a:srgbClr val="1565C0"/>
+                  <a:srgbClr val="2E7D32"/>
                 </a:solidFill>
                 <a:latin typeface="Calibri"/>
               </a:rPr>
@@ -6499,14 +6990,14 @@
       </p:sp>
       <p:sp>
         <p:nvSpPr>
-          <p:cNvPr id="12" name="TextBox 11"/>
-          <p:cNvSpPr txBox="1"/>
-          <p:nvPr/>
-        </p:nvSpPr>
-        <p:spPr>
-          <a:xfrm>
-            <a:off x="274320" y="2267712"/>
-            <a:ext cx="4114800" cy="320040"/>
+          <p:cNvPr id="13" name="TextBox 12"/>
+          <p:cNvSpPr txBox="1"/>
+          <p:nvPr/>
+        </p:nvSpPr>
+        <p:spPr>
+          <a:xfrm>
+            <a:off x="274320" y="2295144"/>
+            <a:ext cx="4297680" cy="274320"/>
           </a:xfrm>
           <a:prstGeom prst="rect">
             <a:avLst/>
@@ -6527,21 +7018,21 @@
                 </a:solidFill>
                 <a:latin typeface="Calibri"/>
               </a:rPr>
-              <a:t>Quarterly AUM per fund house (₹ Crore)</a:t>
-            </a:r>
-          </a:p>
-        </p:txBody>
-      </p:sp>
-      <p:sp>
-        <p:nvSpPr>
-          <p:cNvPr id="13" name="TextBox 12"/>
-          <p:cNvSpPr txBox="1"/>
-          <p:nvPr/>
-        </p:nvSpPr>
-        <p:spPr>
-          <a:xfrm>
-            <a:off x="4846320" y="1947672"/>
-            <a:ext cx="4114800" cy="320040"/>
+              <a:t>Quarterly AUM per fund house</a:t>
+            </a:r>
+          </a:p>
+        </p:txBody>
+      </p:sp>
+      <p:sp>
+        <p:nvSpPr>
+          <p:cNvPr id="14" name="TextBox 13"/>
+          <p:cNvSpPr txBox="1"/>
+          <p:nvPr/>
+        </p:nvSpPr>
+        <p:spPr>
+          <a:xfrm>
+            <a:off x="4892040" y="1947672"/>
+            <a:ext cx="4297680" cy="347472"/>
           </a:xfrm>
           <a:prstGeom prst="rect">
             <a:avLst/>
@@ -6558,25 +7049,25 @@
             <a:r>
               <a:rPr sz="1100" b="1">
                 <a:solidFill>
-                  <a:srgbClr val="1565C0"/>
-                </a:solidFill>
-                <a:latin typeface="Calibri"/>
-              </a:rPr>
-              <a:t>• Monthly SIP Inflows (48 rows)</a:t>
-            </a:r>
-          </a:p>
-        </p:txBody>
-      </p:sp>
-      <p:sp>
-        <p:nvSpPr>
-          <p:cNvPr id="14" name="TextBox 13"/>
-          <p:cNvSpPr txBox="1"/>
-          <p:nvPr/>
-        </p:nvSpPr>
-        <p:spPr>
-          <a:xfrm>
-            <a:off x="4846320" y="2267712"/>
-            <a:ext cx="4114800" cy="320040"/>
+                  <a:srgbClr val="E65100"/>
+                </a:solidFill>
+                <a:latin typeface="Calibri"/>
+              </a:rPr>
+              <a:t>• Monthly SIP Inflows (48)</a:t>
+            </a:r>
+          </a:p>
+        </p:txBody>
+      </p:sp>
+      <p:sp>
+        <p:nvSpPr>
+          <p:cNvPr id="15" name="TextBox 14"/>
+          <p:cNvSpPr txBox="1"/>
+          <p:nvPr/>
+        </p:nvSpPr>
+        <p:spPr>
+          <a:xfrm>
+            <a:off x="4892040" y="2295144"/>
+            <a:ext cx="4297680" cy="274320"/>
           </a:xfrm>
           <a:prstGeom prst="rect">
             <a:avLst/>
@@ -6597,21 +7088,21 @@
                 </a:solidFill>
                 <a:latin typeface="Calibri"/>
               </a:rPr>
-              <a:t>Industry SIP inflow, accounts, YoY growth</a:t>
-            </a:r>
-          </a:p>
-        </p:txBody>
-      </p:sp>
-      <p:sp>
-        <p:nvSpPr>
-          <p:cNvPr id="15" name="TextBox 14"/>
+              <a:t>Inflows, accounts, YoY growth</a:t>
+            </a:r>
+          </a:p>
+        </p:txBody>
+      </p:sp>
+      <p:sp>
+        <p:nvSpPr>
+          <p:cNvPr id="16" name="TextBox 15"/>
           <p:cNvSpPr txBox="1"/>
           <p:nvPr/>
         </p:nvSpPr>
         <p:spPr>
           <a:xfrm>
             <a:off x="274320" y="2752344"/>
-            <a:ext cx="4114800" cy="320040"/>
+            <a:ext cx="4297680" cy="347472"/>
           </a:xfrm>
           <a:prstGeom prst="rect">
             <a:avLst/>
@@ -6628,7 +7119,7 @@
             <a:r>
               <a:rPr sz="1100" b="1">
                 <a:solidFill>
-                  <a:srgbClr val="1565C0"/>
+                  <a:srgbClr val="2E7D32"/>
                 </a:solidFill>
                 <a:latin typeface="Calibri"/>
               </a:rPr>
@@ -6639,14 +7130,14 @@
       </p:sp>
       <p:sp>
         <p:nvSpPr>
-          <p:cNvPr id="16" name="TextBox 15"/>
-          <p:cNvSpPr txBox="1"/>
-          <p:nvPr/>
-        </p:nvSpPr>
-        <p:spPr>
-          <a:xfrm>
-            <a:off x="274320" y="3072384"/>
-            <a:ext cx="4114800" cy="320040"/>
+          <p:cNvPr id="17" name="TextBox 16"/>
+          <p:cNvSpPr txBox="1"/>
+          <p:nvPr/>
+        </p:nvSpPr>
+        <p:spPr>
+          <a:xfrm>
+            <a:off x="274320" y="3099815"/>
+            <a:ext cx="4297680" cy="274320"/>
           </a:xfrm>
           <a:prstGeom prst="rect">
             <a:avLst/>
@@ -6667,21 +7158,21 @@
                 </a:solidFill>
                 <a:latin typeface="Calibri"/>
               </a:rPr>
-              <a:t>SIP/Lumpsum/Redemption with demographics</a:t>
-            </a:r>
-          </a:p>
-        </p:txBody>
-      </p:sp>
-      <p:sp>
-        <p:nvSpPr>
-          <p:cNvPr id="17" name="TextBox 16"/>
-          <p:cNvSpPr txBox="1"/>
-          <p:nvPr/>
-        </p:nvSpPr>
-        <p:spPr>
-          <a:xfrm>
-            <a:off x="4846320" y="2752344"/>
-            <a:ext cx="4114800" cy="320040"/>
+              <a:t>SIP/Lumpsum/Redemption + demographics</a:t>
+            </a:r>
+          </a:p>
+        </p:txBody>
+      </p:sp>
+      <p:sp>
+        <p:nvSpPr>
+          <p:cNvPr id="18" name="TextBox 17"/>
+          <p:cNvSpPr txBox="1"/>
+          <p:nvPr/>
+        </p:nvSpPr>
+        <p:spPr>
+          <a:xfrm>
+            <a:off x="4892040" y="2752344"/>
+            <a:ext cx="4297680" cy="347472"/>
           </a:xfrm>
           <a:prstGeom prst="rect">
             <a:avLst/>
@@ -6698,25 +7189,25 @@
             <a:r>
               <a:rPr sz="1100" b="1">
                 <a:solidFill>
-                  <a:srgbClr val="1565C0"/>
-                </a:solidFill>
-                <a:latin typeface="Calibri"/>
-              </a:rPr>
-              <a:t>• Benchmark Indices (~3.8K)</a:t>
-            </a:r>
-          </a:p>
-        </p:txBody>
-      </p:sp>
-      <p:sp>
-        <p:nvSpPr>
-          <p:cNvPr id="18" name="TextBox 17"/>
-          <p:cNvSpPr txBox="1"/>
-          <p:nvPr/>
-        </p:nvSpPr>
-        <p:spPr>
-          <a:xfrm>
-            <a:off x="4846320" y="3072384"/>
-            <a:ext cx="4114800" cy="320040"/>
+                  <a:srgbClr val="E65100"/>
+                </a:solidFill>
+                <a:latin typeface="Calibri"/>
+              </a:rPr>
+              <a:t>• Benchmark Indices (~3.8K rows)</a:t>
+            </a:r>
+          </a:p>
+        </p:txBody>
+      </p:sp>
+      <p:sp>
+        <p:nvSpPr>
+          <p:cNvPr id="19" name="TextBox 18"/>
+          <p:cNvSpPr txBox="1"/>
+          <p:nvPr/>
+        </p:nvSpPr>
+        <p:spPr>
+          <a:xfrm>
+            <a:off x="4892040" y="3099815"/>
+            <a:ext cx="4297680" cy="274320"/>
           </a:xfrm>
           <a:prstGeom prst="rect">
             <a:avLst/>
@@ -6737,21 +7228,21 @@
                 </a:solidFill>
                 <a:latin typeface="Calibri"/>
               </a:rPr>
-              <a:t>Daily NIFTY50, NIFTY100 close values</a:t>
-            </a:r>
-          </a:p>
-        </p:txBody>
-      </p:sp>
-      <p:sp>
-        <p:nvSpPr>
-          <p:cNvPr id="19" name="TextBox 18"/>
+              <a:t>Daily NIFTY50, NIFTY100</a:t>
+            </a:r>
+          </a:p>
+        </p:txBody>
+      </p:sp>
+      <p:sp>
+        <p:nvSpPr>
+          <p:cNvPr id="20" name="TextBox 19"/>
           <p:cNvSpPr txBox="1"/>
           <p:nvPr/>
         </p:nvSpPr>
         <p:spPr>
           <a:xfrm>
             <a:off x="274320" y="3557016"/>
-            <a:ext cx="4114800" cy="320040"/>
+            <a:ext cx="4297680" cy="347472"/>
           </a:xfrm>
           <a:prstGeom prst="rect">
             <a:avLst/>
@@ -6768,25 +7259,25 @@
             <a:r>
               <a:rPr sz="1100" b="1">
                 <a:solidFill>
-                  <a:srgbClr val="1565C0"/>
-                </a:solidFill>
-                <a:latin typeface="Calibri"/>
-              </a:rPr>
-              <a:t>• Live NAV API (mfapi.in)</a:t>
-            </a:r>
-          </a:p>
-        </p:txBody>
-      </p:sp>
-      <p:sp>
-        <p:nvSpPr>
-          <p:cNvPr id="20" name="TextBox 19"/>
-          <p:cNvSpPr txBox="1"/>
-          <p:nvPr/>
-        </p:nvSpPr>
-        <p:spPr>
-          <a:xfrm>
-            <a:off x="274320" y="3877056"/>
-            <a:ext cx="4114800" cy="320040"/>
+                  <a:srgbClr val="2E7D32"/>
+                </a:solidFill>
+                <a:latin typeface="Calibri"/>
+              </a:rPr>
+              <a:t>• Live NAV — mfapi.in REST API</a:t>
+            </a:r>
+          </a:p>
+        </p:txBody>
+      </p:sp>
+      <p:sp>
+        <p:nvSpPr>
+          <p:cNvPr id="21" name="TextBox 20"/>
+          <p:cNvSpPr txBox="1"/>
+          <p:nvPr/>
+        </p:nvSpPr>
+        <p:spPr>
+          <a:xfrm>
+            <a:off x="274320" y="3904487"/>
+            <a:ext cx="4297680" cy="274320"/>
           </a:xfrm>
           <a:prstGeom prst="rect">
             <a:avLst/>
@@ -6807,7 +7298,7 @@
                 </a:solidFill>
                 <a:latin typeface="Calibri"/>
               </a:rPr>
-              <a:t>6 key funds — real-time historical NAV fetch</a:t>
+              <a:t>6 key funds fetched live</a:t>
             </a:r>
           </a:p>
         </p:txBody>
@@ -6847,13 +7338,13 @@
         <p:spPr>
           <a:xfrm>
             <a:off x="0" y="0"/>
-            <a:ext cx="9144000" cy="1005840"/>
+            <a:ext cx="9144000" cy="960120"/>
           </a:xfrm>
           <a:prstGeom prst="rect">
             <a:avLst/>
           </a:prstGeom>
           <a:solidFill>
-            <a:srgbClr val="1565C0"/>
+            <a:srgbClr val="2E7D32"/>
           </a:solidFill>
           <a:ln>
             <a:noFill/>
@@ -6883,90 +7374,20 @@
       </p:sp>
       <p:sp>
         <p:nvSpPr>
-          <p:cNvPr id="3" name="TextBox 2"/>
-          <p:cNvSpPr txBox="1"/>
-          <p:nvPr/>
-        </p:nvSpPr>
-        <p:spPr>
-          <a:xfrm>
-            <a:off x="182880" y="45720"/>
-            <a:ext cx="8229600" cy="594360"/>
-          </a:xfrm>
-          <a:prstGeom prst="rect">
-            <a:avLst/>
-          </a:prstGeom>
-          <a:noFill/>
-        </p:spPr>
-        <p:txBody>
-          <a:bodyPr wrap="square">
-            <a:spAutoFit/>
-          </a:bodyPr>
-          <a:lstStyle/>
-          <a:p>
-            <a:pPr algn="l"/>
-            <a:r>
-              <a:rPr sz="2400" b="1">
-                <a:solidFill>
-                  <a:srgbClr val="FFFFFF"/>
-                </a:solidFill>
-                <a:latin typeface="Calibri"/>
-              </a:rPr>
-              <a:t>ETL Architecture</a:t>
-            </a:r>
-          </a:p>
-        </p:txBody>
-      </p:sp>
-      <p:sp>
-        <p:nvSpPr>
-          <p:cNvPr id="4" name="TextBox 3"/>
-          <p:cNvSpPr txBox="1"/>
-          <p:nvPr/>
-        </p:nvSpPr>
-        <p:spPr>
-          <a:xfrm>
-            <a:off x="182880" y="658368"/>
-            <a:ext cx="8229600" cy="320040"/>
-          </a:xfrm>
-          <a:prstGeom prst="rect">
-            <a:avLst/>
-          </a:prstGeom>
-          <a:noFill/>
-        </p:spPr>
-        <p:txBody>
-          <a:bodyPr wrap="square">
-            <a:spAutoFit/>
-          </a:bodyPr>
-          <a:lstStyle/>
-          <a:p>
-            <a:pPr algn="l"/>
-            <a:r>
-              <a:rPr sz="1200" b="0">
-                <a:solidFill>
-                  <a:srgbClr val="BBDEFB"/>
-                </a:solidFill>
-                <a:latin typeface="Calibri"/>
-              </a:rPr>
-              <a:t>Four-stage pipeline: Ingest → Clean → Analyse → Visualise</a:t>
-            </a:r>
-          </a:p>
-        </p:txBody>
-      </p:sp>
-      <p:sp>
-        <p:nvSpPr>
-          <p:cNvPr id="5" name="Rectangle 4"/>
+          <p:cNvPr id="3" name="Rectangle 2"/>
           <p:cNvSpPr/>
           <p:nvPr/>
         </p:nvSpPr>
         <p:spPr>
           <a:xfrm>
-            <a:off x="0" y="4800600"/>
-            <a:ext cx="9144000" cy="342900"/>
+            <a:off x="0" y="896112"/>
+            <a:ext cx="9144000" cy="91440"/>
           </a:xfrm>
           <a:prstGeom prst="rect">
             <a:avLst/>
           </a:prstGeom>
           <a:solidFill>
-            <a:srgbClr val="E3F2FD"/>
+            <a:srgbClr val="E65100"/>
           </a:solidFill>
           <a:ln>
             <a:noFill/>
@@ -6996,55 +7417,90 @@
       </p:sp>
       <p:sp>
         <p:nvSpPr>
-          <p:cNvPr id="6" name="TextBox 5"/>
-          <p:cNvSpPr txBox="1"/>
-          <p:nvPr/>
-        </p:nvSpPr>
-        <p:spPr>
-          <a:xfrm>
-            <a:off x="91440" y="4828032"/>
-            <a:ext cx="8961120" cy="274320"/>
-          </a:xfrm>
-          <a:prstGeom prst="rect">
-            <a:avLst/>
-          </a:prstGeom>
-          <a:noFill/>
-        </p:spPr>
-        <p:txBody>
-          <a:bodyPr wrap="square">
-            <a:spAutoFit/>
-          </a:bodyPr>
-          <a:lstStyle/>
-          <a:p>
-            <a:pPr algn="ctr"/>
-            <a:r>
-              <a:rPr sz="800" b="0">
-                <a:solidFill>
-                  <a:srgbClr val="546E7A"/>
-                </a:solidFill>
-                <a:latin typeface="Calibri"/>
-              </a:rPr>
-              <a:t>Bluestock MF Analytics · Capstone Project 2026</a:t>
-            </a:r>
-          </a:p>
-        </p:txBody>
-      </p:sp>
-      <p:sp>
-        <p:nvSpPr>
-          <p:cNvPr id="7" name="Rectangle 6"/>
+          <p:cNvPr id="4" name="TextBox 3"/>
+          <p:cNvSpPr txBox="1"/>
+          <p:nvPr/>
+        </p:nvSpPr>
+        <p:spPr>
+          <a:xfrm>
+            <a:off x="182880" y="45720"/>
+            <a:ext cx="8778240" cy="594360"/>
+          </a:xfrm>
+          <a:prstGeom prst="rect">
+            <a:avLst/>
+          </a:prstGeom>
+          <a:noFill/>
+        </p:spPr>
+        <p:txBody>
+          <a:bodyPr wrap="square">
+            <a:spAutoFit/>
+          </a:bodyPr>
+          <a:lstStyle/>
+          <a:p>
+            <a:pPr algn="l"/>
+            <a:r>
+              <a:rPr sz="2200" b="1">
+                <a:solidFill>
+                  <a:srgbClr val="FFFFFF"/>
+                </a:solidFill>
+                <a:latin typeface="Calibri"/>
+              </a:rPr>
+              <a:t>ETL Architecture</a:t>
+            </a:r>
+          </a:p>
+        </p:txBody>
+      </p:sp>
+      <p:sp>
+        <p:nvSpPr>
+          <p:cNvPr id="5" name="TextBox 4"/>
+          <p:cNvSpPr txBox="1"/>
+          <p:nvPr/>
+        </p:nvSpPr>
+        <p:spPr>
+          <a:xfrm>
+            <a:off x="182880" y="640080"/>
+            <a:ext cx="8778240" cy="292608"/>
+          </a:xfrm>
+          <a:prstGeom prst="rect">
+            <a:avLst/>
+          </a:prstGeom>
+          <a:noFill/>
+        </p:spPr>
+        <p:txBody>
+          <a:bodyPr wrap="square">
+            <a:spAutoFit/>
+          </a:bodyPr>
+          <a:lstStyle/>
+          <a:p>
+            <a:pPr algn="l"/>
+            <a:r>
+              <a:rPr sz="1100" b="0">
+                <a:solidFill>
+                  <a:srgbClr val="C8E6C9"/>
+                </a:solidFill>
+                <a:latin typeface="Calibri"/>
+              </a:rPr>
+              <a:t>Four-stage pipeline — run_pipeline.py orchestrates all stages</a:t>
+            </a:r>
+          </a:p>
+        </p:txBody>
+      </p:sp>
+      <p:sp>
+        <p:nvSpPr>
+          <p:cNvPr id="6" name="Rectangle 5"/>
           <p:cNvSpPr/>
           <p:nvPr/>
         </p:nvSpPr>
         <p:spPr>
           <a:xfrm>
-            <a:off x="457200" y="1280160"/>
-            <a:ext cx="1920240" cy="2194560"/>
+            <a:off x="0" y="4828032"/>
+            <a:ext cx="9144000" cy="320040"/>
           </a:xfrm>
           <a:prstGeom prst="rect">
             <a:avLst/>
           </a:prstGeom>
           <a:solidFill>
-            <a:srgbClr val="1565C0"/>
+            <a:srgbClr val="E8F5E9"/>
           </a:solidFill>
           <a:ln>
             <a:noFill/>
@@ -7074,127 +7530,55 @@
       </p:sp>
       <p:sp>
         <p:nvSpPr>
-          <p:cNvPr id="8" name="TextBox 7"/>
-          <p:cNvSpPr txBox="1"/>
-          <p:nvPr/>
-        </p:nvSpPr>
-        <p:spPr>
-          <a:xfrm>
-            <a:off x="457200" y="1298448"/>
-            <a:ext cx="1920240" cy="822960"/>
-          </a:xfrm>
-          <a:prstGeom prst="rect">
-            <a:avLst/>
-          </a:prstGeom>
-          <a:noFill/>
-        </p:spPr>
-        <p:txBody>
-          <a:bodyPr wrap="square">
-            <a:spAutoFit/>
-          </a:bodyPr>
-          <a:lstStyle/>
-          <a:p>
-            <a:pPr algn="ctr"/>
-            <a:r>
-              <a:rPr sz="2200" b="1">
-                <a:solidFill>
-                  <a:srgbClr val="FFFFFF"/>
-                </a:solidFill>
-                <a:latin typeface="Calibri"/>
-              </a:rPr>
-              <a:t>1
-Fetch</a:t>
-            </a:r>
-          </a:p>
-        </p:txBody>
-      </p:sp>
-      <p:sp>
-        <p:nvSpPr>
-          <p:cNvPr id="9" name="TextBox 8"/>
-          <p:cNvSpPr txBox="1"/>
-          <p:nvPr/>
-        </p:nvSpPr>
-        <p:spPr>
-          <a:xfrm>
-            <a:off x="457200" y="2103120"/>
-            <a:ext cx="1920240" cy="1005840"/>
-          </a:xfrm>
-          <a:prstGeom prst="rect">
-            <a:avLst/>
-          </a:prstGeom>
-          <a:noFill/>
-        </p:spPr>
-        <p:txBody>
-          <a:bodyPr wrap="square">
-            <a:spAutoFit/>
-          </a:bodyPr>
-          <a:lstStyle/>
-          <a:p>
-            <a:pPr algn="ctr"/>
-            <a:r>
-              <a:rPr sz="900" b="0">
-                <a:solidFill>
-                  <a:srgbClr val="E3F2FD"/>
-                </a:solidFill>
-                <a:latin typeface="Calibri"/>
-              </a:rPr>
-              <a:t>live_nav_fetch.py
-mfapi.in API</a:t>
-            </a:r>
-          </a:p>
-        </p:txBody>
-      </p:sp>
-      <p:sp>
-        <p:nvSpPr>
-          <p:cNvPr id="10" name="TextBox 9"/>
-          <p:cNvSpPr txBox="1"/>
-          <p:nvPr/>
-        </p:nvSpPr>
-        <p:spPr>
-          <a:xfrm>
-            <a:off x="2331720" y="2011680"/>
-            <a:ext cx="365760" cy="548640"/>
-          </a:xfrm>
-          <a:prstGeom prst="rect">
-            <a:avLst/>
-          </a:prstGeom>
-          <a:noFill/>
-        </p:spPr>
-        <p:txBody>
-          <a:bodyPr wrap="square">
-            <a:spAutoFit/>
-          </a:bodyPr>
-          <a:lstStyle/>
-          <a:p>
-            <a:pPr algn="ctr"/>
-            <a:r>
-              <a:rPr sz="2200" b="1">
-                <a:solidFill>
-                  <a:srgbClr val="1565C0"/>
-                </a:solidFill>
-                <a:latin typeface="Calibri"/>
-              </a:rPr>
-              <a:t>→</a:t>
-            </a:r>
-          </a:p>
-        </p:txBody>
-      </p:sp>
-      <p:sp>
-        <p:nvSpPr>
-          <p:cNvPr id="11" name="Rectangle 10"/>
+          <p:cNvPr id="7" name="TextBox 6"/>
+          <p:cNvSpPr txBox="1"/>
+          <p:nvPr/>
+        </p:nvSpPr>
+        <p:spPr>
+          <a:xfrm>
+            <a:off x="91440" y="4846320"/>
+            <a:ext cx="8961120" cy="274320"/>
+          </a:xfrm>
+          <a:prstGeom prst="rect">
+            <a:avLst/>
+          </a:prstGeom>
+          <a:noFill/>
+        </p:spPr>
+        <p:txBody>
+          <a:bodyPr wrap="square">
+            <a:spAutoFit/>
+          </a:bodyPr>
+          <a:lstStyle/>
+          <a:p>
+            <a:pPr algn="ctr"/>
+            <a:r>
+              <a:rPr sz="800" b="0">
+                <a:solidFill>
+                  <a:srgbClr val="546E7A"/>
+                </a:solidFill>
+                <a:latin typeface="Calibri"/>
+              </a:rPr>
+              <a:t>Bluestock MF Analytics  ·  Capstone Project 2026</a:t>
+            </a:r>
+          </a:p>
+        </p:txBody>
+      </p:sp>
+      <p:sp>
+        <p:nvSpPr>
+          <p:cNvPr id="8" name="Rectangle 7"/>
           <p:cNvSpPr/>
           <p:nvPr/>
         </p:nvSpPr>
         <p:spPr>
           <a:xfrm>
-            <a:off x="2606040" y="1280160"/>
-            <a:ext cx="1920240" cy="2194560"/>
+            <a:off x="457200" y="1234440"/>
+            <a:ext cx="1965960" cy="2286000"/>
           </a:xfrm>
           <a:prstGeom prst="rect">
             <a:avLst/>
           </a:prstGeom>
           <a:solidFill>
-            <a:srgbClr val="1976D2"/>
+            <a:srgbClr val="2E7D32"/>
           </a:solidFill>
           <a:ln>
             <a:noFill/>
@@ -7224,14 +7608,86 @@
       </p:sp>
       <p:sp>
         <p:nvSpPr>
-          <p:cNvPr id="12" name="TextBox 11"/>
-          <p:cNvSpPr txBox="1"/>
-          <p:nvPr/>
-        </p:nvSpPr>
-        <p:spPr>
-          <a:xfrm>
-            <a:off x="2606040" y="1298448"/>
-            <a:ext cx="1920240" cy="822960"/>
+          <p:cNvPr id="9" name="TextBox 8"/>
+          <p:cNvSpPr txBox="1"/>
+          <p:nvPr/>
+        </p:nvSpPr>
+        <p:spPr>
+          <a:xfrm>
+            <a:off x="457200" y="1252728"/>
+            <a:ext cx="1965960" cy="804672"/>
+          </a:xfrm>
+          <a:prstGeom prst="rect">
+            <a:avLst/>
+          </a:prstGeom>
+          <a:noFill/>
+        </p:spPr>
+        <p:txBody>
+          <a:bodyPr wrap="square">
+            <a:spAutoFit/>
+          </a:bodyPr>
+          <a:lstStyle/>
+          <a:p>
+            <a:pPr algn="ctr"/>
+            <a:r>
+              <a:rPr sz="2000" b="1">
+                <a:solidFill>
+                  <a:srgbClr val="FFFFFF"/>
+                </a:solidFill>
+                <a:latin typeface="Calibri"/>
+              </a:rPr>
+              <a:t>1
+Fetch</a:t>
+            </a:r>
+          </a:p>
+        </p:txBody>
+      </p:sp>
+      <p:sp>
+        <p:nvSpPr>
+          <p:cNvPr id="10" name="TextBox 9"/>
+          <p:cNvSpPr txBox="1"/>
+          <p:nvPr/>
+        </p:nvSpPr>
+        <p:spPr>
+          <a:xfrm>
+            <a:off x="457200" y="2029968"/>
+            <a:ext cx="1965960" cy="987552"/>
+          </a:xfrm>
+          <a:prstGeom prst="rect">
+            <a:avLst/>
+          </a:prstGeom>
+          <a:noFill/>
+        </p:spPr>
+        <p:txBody>
+          <a:bodyPr wrap="square">
+            <a:spAutoFit/>
+          </a:bodyPr>
+          <a:lstStyle/>
+          <a:p>
+            <a:pPr algn="ctr"/>
+            <a:r>
+              <a:rPr sz="900" b="0">
+                <a:solidFill>
+                  <a:srgbClr val="E8F5E9"/>
+                </a:solidFill>
+                <a:latin typeface="Calibri"/>
+              </a:rPr>
+              <a:t>live_nav_fetch.py
+mfapi.in API</a:t>
+            </a:r>
+          </a:p>
+        </p:txBody>
+      </p:sp>
+      <p:sp>
+        <p:nvSpPr>
+          <p:cNvPr id="11" name="TextBox 10"/>
+          <p:cNvSpPr txBox="1"/>
+          <p:nvPr/>
+        </p:nvSpPr>
+        <p:spPr>
+          <a:xfrm>
+            <a:off x="2377440" y="2331720"/>
+            <a:ext cx="365760" cy="548640"/>
           </a:xfrm>
           <a:prstGeom prst="rect">
             <a:avLst/>
@@ -7248,79 +7704,7 @@
             <a:r>
               <a:rPr sz="2200" b="1">
                 <a:solidFill>
-                  <a:srgbClr val="FFFFFF"/>
-                </a:solidFill>
-                <a:latin typeface="Calibri"/>
-              </a:rPr>
-              <a:t>2
-Clean</a:t>
-            </a:r>
-          </a:p>
-        </p:txBody>
-      </p:sp>
-      <p:sp>
-        <p:nvSpPr>
-          <p:cNvPr id="13" name="TextBox 12"/>
-          <p:cNvSpPr txBox="1"/>
-          <p:nvPr/>
-        </p:nvSpPr>
-        <p:spPr>
-          <a:xfrm>
-            <a:off x="2606040" y="2103120"/>
-            <a:ext cx="1920240" cy="1005840"/>
-          </a:xfrm>
-          <a:prstGeom prst="rect">
-            <a:avLst/>
-          </a:prstGeom>
-          <a:noFill/>
-        </p:spPr>
-        <p:txBody>
-          <a:bodyPr wrap="square">
-            <a:spAutoFit/>
-          </a:bodyPr>
-          <a:lstStyle/>
-          <a:p>
-            <a:pPr algn="ctr"/>
-            <a:r>
-              <a:rPr sz="900" b="0">
-                <a:solidFill>
-                  <a:srgbClr val="E3F2FD"/>
-                </a:solidFill>
-                <a:latin typeface="Calibri"/>
-              </a:rPr>
-              <a:t>data_ingestion.py
-Validate &amp; ffill</a:t>
-            </a:r>
-          </a:p>
-        </p:txBody>
-      </p:sp>
-      <p:sp>
-        <p:nvSpPr>
-          <p:cNvPr id="14" name="TextBox 13"/>
-          <p:cNvSpPr txBox="1"/>
-          <p:nvPr/>
-        </p:nvSpPr>
-        <p:spPr>
-          <a:xfrm>
-            <a:off x="4480560" y="2011680"/>
-            <a:ext cx="365760" cy="548640"/>
-          </a:xfrm>
-          <a:prstGeom prst="rect">
-            <a:avLst/>
-          </a:prstGeom>
-          <a:noFill/>
-        </p:spPr>
-        <p:txBody>
-          <a:bodyPr wrap="square">
-            <a:spAutoFit/>
-          </a:bodyPr>
-          <a:lstStyle/>
-          <a:p>
-            <a:pPr algn="ctr"/>
-            <a:r>
-              <a:rPr sz="2200" b="1">
-                <a:solidFill>
-                  <a:srgbClr val="1565C0"/>
+                  <a:srgbClr val="E65100"/>
                 </a:solidFill>
                 <a:latin typeface="Calibri"/>
               </a:rPr>
@@ -7331,20 +7715,20 @@
       </p:sp>
       <p:sp>
         <p:nvSpPr>
-          <p:cNvPr id="15" name="Rectangle 14"/>
+          <p:cNvPr id="12" name="Rectangle 11"/>
           <p:cNvSpPr/>
           <p:nvPr/>
         </p:nvSpPr>
         <p:spPr>
           <a:xfrm>
-            <a:off x="4754880" y="1280160"/>
-            <a:ext cx="1920240" cy="2194560"/>
+            <a:off x="2633472" y="1234440"/>
+            <a:ext cx="1965960" cy="2286000"/>
           </a:xfrm>
           <a:prstGeom prst="rect">
             <a:avLst/>
           </a:prstGeom>
           <a:solidFill>
-            <a:srgbClr val="1E88E5"/>
+            <a:srgbClr val="E65100"/>
           </a:solidFill>
           <a:ln>
             <a:noFill/>
@@ -7374,14 +7758,86 @@
       </p:sp>
       <p:sp>
         <p:nvSpPr>
-          <p:cNvPr id="16" name="TextBox 15"/>
-          <p:cNvSpPr txBox="1"/>
-          <p:nvPr/>
-        </p:nvSpPr>
-        <p:spPr>
-          <a:xfrm>
-            <a:off x="4754880" y="1298448"/>
-            <a:ext cx="1920240" cy="822960"/>
+          <p:cNvPr id="13" name="TextBox 12"/>
+          <p:cNvSpPr txBox="1"/>
+          <p:nvPr/>
+        </p:nvSpPr>
+        <p:spPr>
+          <a:xfrm>
+            <a:off x="2633472" y="1252728"/>
+            <a:ext cx="1965960" cy="804672"/>
+          </a:xfrm>
+          <a:prstGeom prst="rect">
+            <a:avLst/>
+          </a:prstGeom>
+          <a:noFill/>
+        </p:spPr>
+        <p:txBody>
+          <a:bodyPr wrap="square">
+            <a:spAutoFit/>
+          </a:bodyPr>
+          <a:lstStyle/>
+          <a:p>
+            <a:pPr algn="ctr"/>
+            <a:r>
+              <a:rPr sz="2000" b="1">
+                <a:solidFill>
+                  <a:srgbClr val="FFFFFF"/>
+                </a:solidFill>
+                <a:latin typeface="Calibri"/>
+              </a:rPr>
+              <a:t>2
+Clean</a:t>
+            </a:r>
+          </a:p>
+        </p:txBody>
+      </p:sp>
+      <p:sp>
+        <p:nvSpPr>
+          <p:cNvPr id="14" name="TextBox 13"/>
+          <p:cNvSpPr txBox="1"/>
+          <p:nvPr/>
+        </p:nvSpPr>
+        <p:spPr>
+          <a:xfrm>
+            <a:off x="2633472" y="2029968"/>
+            <a:ext cx="1965960" cy="987552"/>
+          </a:xfrm>
+          <a:prstGeom prst="rect">
+            <a:avLst/>
+          </a:prstGeom>
+          <a:noFill/>
+        </p:spPr>
+        <p:txBody>
+          <a:bodyPr wrap="square">
+            <a:spAutoFit/>
+          </a:bodyPr>
+          <a:lstStyle/>
+          <a:p>
+            <a:pPr algn="ctr"/>
+            <a:r>
+              <a:rPr sz="900" b="0">
+                <a:solidFill>
+                  <a:srgbClr val="FFF3E0"/>
+                </a:solidFill>
+                <a:latin typeface="Calibri"/>
+              </a:rPr>
+              <a:t>data_ingestion.py
+Validate &amp; ffill</a:t>
+            </a:r>
+          </a:p>
+        </p:txBody>
+      </p:sp>
+      <p:sp>
+        <p:nvSpPr>
+          <p:cNvPr id="15" name="TextBox 14"/>
+          <p:cNvSpPr txBox="1"/>
+          <p:nvPr/>
+        </p:nvSpPr>
+        <p:spPr>
+          <a:xfrm>
+            <a:off x="4553712" y="2331720"/>
+            <a:ext cx="365760" cy="548640"/>
           </a:xfrm>
           <a:prstGeom prst="rect">
             <a:avLst/>
@@ -7398,79 +7854,7 @@
             <a:r>
               <a:rPr sz="2200" b="1">
                 <a:solidFill>
-                  <a:srgbClr val="FFFFFF"/>
-                </a:solidFill>
-                <a:latin typeface="Calibri"/>
-              </a:rPr>
-              <a:t>3
-Analyse</a:t>
-            </a:r>
-          </a:p>
-        </p:txBody>
-      </p:sp>
-      <p:sp>
-        <p:nvSpPr>
-          <p:cNvPr id="17" name="TextBox 16"/>
-          <p:cNvSpPr txBox="1"/>
-          <p:nvPr/>
-        </p:nvSpPr>
-        <p:spPr>
-          <a:xfrm>
-            <a:off x="4754880" y="2103120"/>
-            <a:ext cx="1920240" cy="1005840"/>
-          </a:xfrm>
-          <a:prstGeom prst="rect">
-            <a:avLst/>
-          </a:prstGeom>
-          <a:noFill/>
-        </p:spPr>
-        <p:txBody>
-          <a:bodyPr wrap="square">
-            <a:spAutoFit/>
-          </a:bodyPr>
-          <a:lstStyle/>
-          <a:p>
-            <a:pPr algn="ctr"/>
-            <a:r>
-              <a:rPr sz="900" b="0">
-                <a:solidFill>
-                  <a:srgbClr val="E3F2FD"/>
-                </a:solidFill>
-                <a:latin typeface="Calibri"/>
-              </a:rPr>
-              <a:t>performance_analytics.py
-advanced_analytics.py</a:t>
-            </a:r>
-          </a:p>
-        </p:txBody>
-      </p:sp>
-      <p:sp>
-        <p:nvSpPr>
-          <p:cNvPr id="18" name="TextBox 17"/>
-          <p:cNvSpPr txBox="1"/>
-          <p:nvPr/>
-        </p:nvSpPr>
-        <p:spPr>
-          <a:xfrm>
-            <a:off x="6629400" y="2011680"/>
-            <a:ext cx="365760" cy="548640"/>
-          </a:xfrm>
-          <a:prstGeom prst="rect">
-            <a:avLst/>
-          </a:prstGeom>
-          <a:noFill/>
-        </p:spPr>
-        <p:txBody>
-          <a:bodyPr wrap="square">
-            <a:spAutoFit/>
-          </a:bodyPr>
-          <a:lstStyle/>
-          <a:p>
-            <a:pPr algn="ctr"/>
-            <a:r>
-              <a:rPr sz="2200" b="1">
-                <a:solidFill>
-                  <a:srgbClr val="1565C0"/>
+                  <a:srgbClr val="E65100"/>
                 </a:solidFill>
                 <a:latin typeface="Calibri"/>
               </a:rPr>
@@ -7481,20 +7865,20 @@
       </p:sp>
       <p:sp>
         <p:nvSpPr>
-          <p:cNvPr id="19" name="Rectangle 18"/>
+          <p:cNvPr id="16" name="Rectangle 15"/>
           <p:cNvSpPr/>
           <p:nvPr/>
         </p:nvSpPr>
         <p:spPr>
           <a:xfrm>
-            <a:off x="6903720" y="1280160"/>
-            <a:ext cx="1920240" cy="2194560"/>
+            <a:off x="4809744" y="1234440"/>
+            <a:ext cx="1965960" cy="2286000"/>
           </a:xfrm>
           <a:prstGeom prst="rect">
             <a:avLst/>
           </a:prstGeom>
           <a:solidFill>
-            <a:srgbClr val="42A5F5"/>
+            <a:srgbClr val="2E7D32"/>
           </a:solidFill>
           <a:ln>
             <a:noFill/>
@@ -7524,14 +7908,86 @@
       </p:sp>
       <p:sp>
         <p:nvSpPr>
-          <p:cNvPr id="20" name="TextBox 19"/>
-          <p:cNvSpPr txBox="1"/>
-          <p:nvPr/>
-        </p:nvSpPr>
-        <p:spPr>
-          <a:xfrm>
-            <a:off x="6903720" y="1298448"/>
-            <a:ext cx="1920240" cy="822960"/>
+          <p:cNvPr id="17" name="TextBox 16"/>
+          <p:cNvSpPr txBox="1"/>
+          <p:nvPr/>
+        </p:nvSpPr>
+        <p:spPr>
+          <a:xfrm>
+            <a:off x="4809744" y="1252728"/>
+            <a:ext cx="1965960" cy="804672"/>
+          </a:xfrm>
+          <a:prstGeom prst="rect">
+            <a:avLst/>
+          </a:prstGeom>
+          <a:noFill/>
+        </p:spPr>
+        <p:txBody>
+          <a:bodyPr wrap="square">
+            <a:spAutoFit/>
+          </a:bodyPr>
+          <a:lstStyle/>
+          <a:p>
+            <a:pPr algn="ctr"/>
+            <a:r>
+              <a:rPr sz="2000" b="1">
+                <a:solidFill>
+                  <a:srgbClr val="FFFFFF"/>
+                </a:solidFill>
+                <a:latin typeface="Calibri"/>
+              </a:rPr>
+              <a:t>3
+Analyse</a:t>
+            </a:r>
+          </a:p>
+        </p:txBody>
+      </p:sp>
+      <p:sp>
+        <p:nvSpPr>
+          <p:cNvPr id="18" name="TextBox 17"/>
+          <p:cNvSpPr txBox="1"/>
+          <p:nvPr/>
+        </p:nvSpPr>
+        <p:spPr>
+          <a:xfrm>
+            <a:off x="4809744" y="2029968"/>
+            <a:ext cx="1965960" cy="987552"/>
+          </a:xfrm>
+          <a:prstGeom prst="rect">
+            <a:avLst/>
+          </a:prstGeom>
+          <a:noFill/>
+        </p:spPr>
+        <p:txBody>
+          <a:bodyPr wrap="square">
+            <a:spAutoFit/>
+          </a:bodyPr>
+          <a:lstStyle/>
+          <a:p>
+            <a:pPr algn="ctr"/>
+            <a:r>
+              <a:rPr sz="900" b="0">
+                <a:solidFill>
+                  <a:srgbClr val="E8F5E9"/>
+                </a:solidFill>
+                <a:latin typeface="Calibri"/>
+              </a:rPr>
+              <a:t>performance_analytics.py
+advanced_analytics.py</a:t>
+            </a:r>
+          </a:p>
+        </p:txBody>
+      </p:sp>
+      <p:sp>
+        <p:nvSpPr>
+          <p:cNvPr id="19" name="TextBox 18"/>
+          <p:cNvSpPr txBox="1"/>
+          <p:nvPr/>
+        </p:nvSpPr>
+        <p:spPr>
+          <a:xfrm>
+            <a:off x="6729983" y="2331720"/>
+            <a:ext cx="365760" cy="548640"/>
           </a:xfrm>
           <a:prstGeom prst="rect">
             <a:avLst/>
@@ -7547,6 +8003,84 @@
             <a:pPr algn="ctr"/>
             <a:r>
               <a:rPr sz="2200" b="1">
+                <a:solidFill>
+                  <a:srgbClr val="E65100"/>
+                </a:solidFill>
+                <a:latin typeface="Calibri"/>
+              </a:rPr>
+              <a:t>→</a:t>
+            </a:r>
+          </a:p>
+        </p:txBody>
+      </p:sp>
+      <p:sp>
+        <p:nvSpPr>
+          <p:cNvPr id="20" name="Rectangle 19"/>
+          <p:cNvSpPr/>
+          <p:nvPr/>
+        </p:nvSpPr>
+        <p:spPr>
+          <a:xfrm>
+            <a:off x="6986016" y="1234440"/>
+            <a:ext cx="1965960" cy="2286000"/>
+          </a:xfrm>
+          <a:prstGeom prst="rect">
+            <a:avLst/>
+          </a:prstGeom>
+          <a:solidFill>
+            <a:srgbClr val="E65100"/>
+          </a:solidFill>
+          <a:ln>
+            <a:noFill/>
+          </a:ln>
+        </p:spPr>
+        <p:style>
+          <a:lnRef idx="1">
+            <a:schemeClr val="accent1"/>
+          </a:lnRef>
+          <a:fillRef idx="3">
+            <a:schemeClr val="accent1"/>
+          </a:fillRef>
+          <a:effectRef idx="2">
+            <a:schemeClr val="accent1"/>
+          </a:effectRef>
+          <a:fontRef idx="minor">
+            <a:schemeClr val="lt1"/>
+          </a:fontRef>
+        </p:style>
+        <p:txBody>
+          <a:bodyPr rtlCol="0" anchor="ctr"/>
+          <a:lstStyle/>
+          <a:p>
+            <a:pPr algn="ctr"/>
+          </a:p>
+        </p:txBody>
+      </p:sp>
+      <p:sp>
+        <p:nvSpPr>
+          <p:cNvPr id="21" name="TextBox 20"/>
+          <p:cNvSpPr txBox="1"/>
+          <p:nvPr/>
+        </p:nvSpPr>
+        <p:spPr>
+          <a:xfrm>
+            <a:off x="6986016" y="1252728"/>
+            <a:ext cx="1965960" cy="804672"/>
+          </a:xfrm>
+          <a:prstGeom prst="rect">
+            <a:avLst/>
+          </a:prstGeom>
+          <a:noFill/>
+        </p:spPr>
+        <p:txBody>
+          <a:bodyPr wrap="square">
+            <a:spAutoFit/>
+          </a:bodyPr>
+          <a:lstStyle/>
+          <a:p>
+            <a:pPr algn="ctr"/>
+            <a:r>
+              <a:rPr sz="2000" b="1">
                 <a:solidFill>
                   <a:srgbClr val="FFFFFF"/>
                 </a:solidFill>
@@ -7560,14 +8094,14 @@
       </p:sp>
       <p:sp>
         <p:nvSpPr>
-          <p:cNvPr id="21" name="TextBox 20"/>
-          <p:cNvSpPr txBox="1"/>
-          <p:nvPr/>
-        </p:nvSpPr>
-        <p:spPr>
-          <a:xfrm>
-            <a:off x="6903720" y="2103120"/>
-            <a:ext cx="1920240" cy="1005840"/>
+          <p:cNvPr id="22" name="TextBox 21"/>
+          <p:cNvSpPr txBox="1"/>
+          <p:nvPr/>
+        </p:nvSpPr>
+        <p:spPr>
+          <a:xfrm>
+            <a:off x="6986016" y="2029968"/>
+            <a:ext cx="1965960" cy="987552"/>
           </a:xfrm>
           <a:prstGeom prst="rect">
             <a:avLst/>
@@ -7584,7 +8118,7 @@
             <a:r>
               <a:rPr sz="900" b="0">
                 <a:solidFill>
-                  <a:srgbClr val="E3F2FD"/>
+                  <a:srgbClr val="FFF3E0"/>
                 </a:solidFill>
                 <a:latin typeface="Calibri"/>
               </a:rPr>
@@ -7596,35 +8130,35 @@
       </p:sp>
       <p:sp>
         <p:nvSpPr>
-          <p:cNvPr id="22" name="TextBox 21"/>
-          <p:cNvSpPr txBox="1"/>
-          <p:nvPr/>
-        </p:nvSpPr>
-        <p:spPr>
-          <a:xfrm>
-            <a:off x="274320" y="3749039"/>
-            <a:ext cx="8595360" cy="640080"/>
-          </a:xfrm>
-          <a:prstGeom prst="rect">
-            <a:avLst/>
-          </a:prstGeom>
-          <a:noFill/>
-        </p:spPr>
-        <p:txBody>
-          <a:bodyPr wrap="square">
-            <a:spAutoFit/>
-          </a:bodyPr>
-          <a:lstStyle/>
-          <a:p>
-            <a:pPr algn="ctr"/>
-            <a:r>
-              <a:rPr sz="1000" b="0">
+          <p:cNvPr id="23" name="TextBox 22"/>
+          <p:cNvSpPr txBox="1"/>
+          <p:nvPr/>
+        </p:nvSpPr>
+        <p:spPr>
+          <a:xfrm>
+            <a:off x="274320" y="3767328"/>
+            <a:ext cx="8595360" cy="502920"/>
+          </a:xfrm>
+          <a:prstGeom prst="rect">
+            <a:avLst/>
+          </a:prstGeom>
+          <a:noFill/>
+        </p:spPr>
+        <p:txBody>
+          <a:bodyPr wrap="square">
+            <a:spAutoFit/>
+          </a:bodyPr>
+          <a:lstStyle/>
+          <a:p>
+            <a:pPr algn="ctr"/>
+            <a:r>
+              <a:rPr sz="900" b="0">
                 <a:solidFill>
                   <a:srgbClr val="546E7A"/>
                 </a:solidFill>
                 <a:latin typeface="Calibri"/>
               </a:rPr>
-              <a:t>Database: SQLite star schema (dim_fund, dim_date, fact_nav, fact_transactions, fact_performance, fact_aum)  ·  run_pipeline.py orchestrates all stages</a:t>
+              <a:t>Database: SQLite star schema  ·  dim_fund, dim_date, fact_nav, fact_transactions, fact_performance, fact_aum</a:t>
             </a:r>
           </a:p>
         </p:txBody>
@@ -7664,13 +8198,13 @@
         <p:spPr>
           <a:xfrm>
             <a:off x="0" y="0"/>
-            <a:ext cx="9144000" cy="1005840"/>
+            <a:ext cx="9144000" cy="960120"/>
           </a:xfrm>
           <a:prstGeom prst="rect">
             <a:avLst/>
           </a:prstGeom>
           <a:solidFill>
-            <a:srgbClr val="1565C0"/>
+            <a:srgbClr val="2E7D32"/>
           </a:solidFill>
           <a:ln>
             <a:noFill/>
@@ -7700,90 +8234,20 @@
       </p:sp>
       <p:sp>
         <p:nvSpPr>
-          <p:cNvPr id="3" name="TextBox 2"/>
-          <p:cNvSpPr txBox="1"/>
-          <p:nvPr/>
-        </p:nvSpPr>
-        <p:spPr>
-          <a:xfrm>
-            <a:off x="182880" y="45720"/>
-            <a:ext cx="8229600" cy="594360"/>
-          </a:xfrm>
-          <a:prstGeom prst="rect">
-            <a:avLst/>
-          </a:prstGeom>
-          <a:noFill/>
-        </p:spPr>
-        <p:txBody>
-          <a:bodyPr wrap="square">
-            <a:spAutoFit/>
-          </a:bodyPr>
-          <a:lstStyle/>
-          <a:p>
-            <a:pPr algn="l"/>
-            <a:r>
-              <a:rPr sz="2400" b="1">
-                <a:solidFill>
-                  <a:srgbClr val="FFFFFF"/>
-                </a:solidFill>
-                <a:latin typeface="Calibri"/>
-              </a:rPr>
-              <a:t>EDA Highlights — Industry Growth</a:t>
-            </a:r>
-          </a:p>
-        </p:txBody>
-      </p:sp>
-      <p:sp>
-        <p:nvSpPr>
-          <p:cNvPr id="4" name="TextBox 3"/>
-          <p:cNvSpPr txBox="1"/>
-          <p:nvPr/>
-        </p:nvSpPr>
-        <p:spPr>
-          <a:xfrm>
-            <a:off x="182880" y="658368"/>
-            <a:ext cx="8229600" cy="320040"/>
-          </a:xfrm>
-          <a:prstGeom prst="rect">
-            <a:avLst/>
-          </a:prstGeom>
-          <a:noFill/>
-        </p:spPr>
-        <p:txBody>
-          <a:bodyPr wrap="square">
-            <a:spAutoFit/>
-          </a:bodyPr>
-          <a:lstStyle/>
-          <a:p>
-            <a:pPr algn="l"/>
-            <a:r>
-              <a:rPr sz="1200" b="0">
-                <a:solidFill>
-                  <a:srgbClr val="BBDEFB"/>
-                </a:solidFill>
-                <a:latin typeface="Calibri"/>
-              </a:rPr>
-              <a:t>SIP momentum and AUM dominance</a:t>
-            </a:r>
-          </a:p>
-        </p:txBody>
-      </p:sp>
-      <p:sp>
-        <p:nvSpPr>
-          <p:cNvPr id="5" name="Rectangle 4"/>
+          <p:cNvPr id="3" name="Rectangle 2"/>
           <p:cNvSpPr/>
           <p:nvPr/>
         </p:nvSpPr>
         <p:spPr>
           <a:xfrm>
-            <a:off x="0" y="4800600"/>
-            <a:ext cx="9144000" cy="342900"/>
+            <a:off x="0" y="896112"/>
+            <a:ext cx="9144000" cy="91440"/>
           </a:xfrm>
           <a:prstGeom prst="rect">
             <a:avLst/>
           </a:prstGeom>
           <a:solidFill>
-            <a:srgbClr val="E3F2FD"/>
+            <a:srgbClr val="E65100"/>
           </a:solidFill>
           <a:ln>
             <a:noFill/>
@@ -7813,13 +8277,126 @@
       </p:sp>
       <p:sp>
         <p:nvSpPr>
-          <p:cNvPr id="6" name="TextBox 5"/>
-          <p:cNvSpPr txBox="1"/>
-          <p:nvPr/>
-        </p:nvSpPr>
-        <p:spPr>
-          <a:xfrm>
-            <a:off x="91440" y="4828032"/>
+          <p:cNvPr id="4" name="TextBox 3"/>
+          <p:cNvSpPr txBox="1"/>
+          <p:nvPr/>
+        </p:nvSpPr>
+        <p:spPr>
+          <a:xfrm>
+            <a:off x="182880" y="45720"/>
+            <a:ext cx="8778240" cy="594360"/>
+          </a:xfrm>
+          <a:prstGeom prst="rect">
+            <a:avLst/>
+          </a:prstGeom>
+          <a:noFill/>
+        </p:spPr>
+        <p:txBody>
+          <a:bodyPr wrap="square">
+            <a:spAutoFit/>
+          </a:bodyPr>
+          <a:lstStyle/>
+          <a:p>
+            <a:pPr algn="l"/>
+            <a:r>
+              <a:rPr sz="2200" b="1">
+                <a:solidFill>
+                  <a:srgbClr val="FFFFFF"/>
+                </a:solidFill>
+                <a:latin typeface="Calibri"/>
+              </a:rPr>
+              <a:t>EDA Highlights — Industry Growth</a:t>
+            </a:r>
+          </a:p>
+        </p:txBody>
+      </p:sp>
+      <p:sp>
+        <p:nvSpPr>
+          <p:cNvPr id="5" name="TextBox 4"/>
+          <p:cNvSpPr txBox="1"/>
+          <p:nvPr/>
+        </p:nvSpPr>
+        <p:spPr>
+          <a:xfrm>
+            <a:off x="182880" y="640080"/>
+            <a:ext cx="8778240" cy="292608"/>
+          </a:xfrm>
+          <a:prstGeom prst="rect">
+            <a:avLst/>
+          </a:prstGeom>
+          <a:noFill/>
+        </p:spPr>
+        <p:txBody>
+          <a:bodyPr wrap="square">
+            <a:spAutoFit/>
+          </a:bodyPr>
+          <a:lstStyle/>
+          <a:p>
+            <a:pPr algn="l"/>
+            <a:r>
+              <a:rPr sz="1100" b="0">
+                <a:solidFill>
+                  <a:srgbClr val="C8E6C9"/>
+                </a:solidFill>
+                <a:latin typeface="Calibri"/>
+              </a:rPr>
+              <a:t>SIP momentum &amp; AUM dominance (2022–2025)</a:t>
+            </a:r>
+          </a:p>
+        </p:txBody>
+      </p:sp>
+      <p:sp>
+        <p:nvSpPr>
+          <p:cNvPr id="6" name="Rectangle 5"/>
+          <p:cNvSpPr/>
+          <p:nvPr/>
+        </p:nvSpPr>
+        <p:spPr>
+          <a:xfrm>
+            <a:off x="0" y="4828032"/>
+            <a:ext cx="9144000" cy="320040"/>
+          </a:xfrm>
+          <a:prstGeom prst="rect">
+            <a:avLst/>
+          </a:prstGeom>
+          <a:solidFill>
+            <a:srgbClr val="E8F5E9"/>
+          </a:solidFill>
+          <a:ln>
+            <a:noFill/>
+          </a:ln>
+        </p:spPr>
+        <p:style>
+          <a:lnRef idx="1">
+            <a:schemeClr val="accent1"/>
+          </a:lnRef>
+          <a:fillRef idx="3">
+            <a:schemeClr val="accent1"/>
+          </a:fillRef>
+          <a:effectRef idx="2">
+            <a:schemeClr val="accent1"/>
+          </a:effectRef>
+          <a:fontRef idx="minor">
+            <a:schemeClr val="lt1"/>
+          </a:fontRef>
+        </p:style>
+        <p:txBody>
+          <a:bodyPr rtlCol="0" anchor="ctr"/>
+          <a:lstStyle/>
+          <a:p>
+            <a:pPr algn="ctr"/>
+          </a:p>
+        </p:txBody>
+      </p:sp>
+      <p:sp>
+        <p:nvSpPr>
+          <p:cNvPr id="7" name="TextBox 6"/>
+          <p:cNvSpPr txBox="1"/>
+          <p:nvPr/>
+        </p:nvSpPr>
+        <p:spPr>
+          <a:xfrm>
+            <a:off x="91440" y="4846320"/>
             <a:ext cx="8961120" cy="274320"/>
           </a:xfrm>
           <a:prstGeom prst="rect">
@@ -7841,14 +8418,14 @@
                 </a:solidFill>
                 <a:latin typeface="Calibri"/>
               </a:rPr>
-              <a:t>Bluestock MF Analytics · Capstone Project 2026</a:t>
+              <a:t>Bluestock MF Analytics  ·  Capstone Project 2026</a:t>
             </a:r>
           </a:p>
         </p:txBody>
       </p:sp>
       <p:pic>
         <p:nvPicPr>
-          <p:cNvPr id="7" name="Picture 6" descr="03_sip_inflow_timeseries.png"/>
+          <p:cNvPr id="8" name="Picture 7" descr="03_sip_inflow_timeseries.png"/>
           <p:cNvPicPr>
             <a:picLocks noChangeAspect="1"/>
           </p:cNvPicPr>
@@ -7862,8 +8439,8 @@
         </p:blipFill>
         <p:spPr>
           <a:xfrm>
-            <a:off x="182880" y="1097280"/>
-            <a:ext cx="4754880" cy="1630245"/>
+            <a:off x="182880" y="1024128"/>
+            <a:ext cx="4846320" cy="1661595"/>
           </a:xfrm>
           <a:prstGeom prst="rect">
             <a:avLst/>
@@ -7872,7 +8449,7 @@
       </p:pic>
       <p:pic>
         <p:nvPicPr>
-          <p:cNvPr id="8" name="Picture 7" descr="02_aum_grouped_bar.png"/>
+          <p:cNvPr id="9" name="Picture 8" descr="02_aum_grouped_bar.png"/>
           <p:cNvPicPr>
             <a:picLocks noChangeAspect="1"/>
           </p:cNvPicPr>
@@ -7886,8 +8463,8 @@
         </p:blipFill>
         <p:spPr>
           <a:xfrm>
-            <a:off x="5029200" y="1097280"/>
-            <a:ext cx="3931920" cy="1689380"/>
+            <a:off x="5074920" y="1024128"/>
+            <a:ext cx="3886200" cy="1669736"/>
           </a:xfrm>
           <a:prstGeom prst="rect">
             <a:avLst/>
@@ -7896,14 +8473,14 @@
       </p:pic>
       <p:sp>
         <p:nvSpPr>
-          <p:cNvPr id="9" name="TextBox 8"/>
-          <p:cNvSpPr txBox="1"/>
-          <p:nvPr/>
-        </p:nvSpPr>
-        <p:spPr>
-          <a:xfrm>
-            <a:off x="182880" y="3840480"/>
-            <a:ext cx="4754880" cy="457200"/>
+          <p:cNvPr id="10" name="TextBox 9"/>
+          <p:cNvSpPr txBox="1"/>
+          <p:nvPr/>
+        </p:nvSpPr>
+        <p:spPr>
+          <a:xfrm>
+            <a:off x="182880" y="3822191"/>
+            <a:ext cx="4846320" cy="457200"/>
           </a:xfrm>
           <a:prstGeom prst="rect">
             <a:avLst/>
@@ -7920,25 +8497,25 @@
             <a:r>
               <a:rPr sz="1000" b="0">
                 <a:solidFill>
-                  <a:srgbClr val="546E7A"/>
-                </a:solidFill>
-                <a:latin typeface="Calibri"/>
-              </a:rPr>
-              <a:t>Monthly SIP: ₹11K Cr → ₹31K Cr ATH</a:t>
-            </a:r>
-          </a:p>
-        </p:txBody>
-      </p:sp>
-      <p:sp>
-        <p:nvSpPr>
-          <p:cNvPr id="10" name="TextBox 9"/>
-          <p:cNvSpPr txBox="1"/>
-          <p:nvPr/>
-        </p:nvSpPr>
-        <p:spPr>
-          <a:xfrm>
-            <a:off x="5029200" y="3840480"/>
-            <a:ext cx="3931920" cy="457200"/>
+                  <a:srgbClr val="2E7D32"/>
+                </a:solidFill>
+                <a:latin typeface="Calibri"/>
+              </a:rPr>
+              <a:t>SIP: ₹11K Cr → ₹31K Cr ATH (Dec 2025)</a:t>
+            </a:r>
+          </a:p>
+        </p:txBody>
+      </p:sp>
+      <p:sp>
+        <p:nvSpPr>
+          <p:cNvPr id="11" name="TextBox 10"/>
+          <p:cNvSpPr txBox="1"/>
+          <p:nvPr/>
+        </p:nvSpPr>
+        <p:spPr>
+          <a:xfrm>
+            <a:off x="5074920" y="3822191"/>
+            <a:ext cx="3886200" cy="457200"/>
           </a:xfrm>
           <a:prstGeom prst="rect">
             <a:avLst/>
@@ -7955,7 +8532,7 @@
             <a:r>
               <a:rPr sz="1000" b="0">
                 <a:solidFill>
-                  <a:srgbClr val="546E7A"/>
+                  <a:srgbClr val="E65100"/>
                 </a:solidFill>
                 <a:latin typeface="Calibri"/>
               </a:rPr>
@@ -7999,13 +8576,13 @@
         <p:spPr>
           <a:xfrm>
             <a:off x="0" y="0"/>
-            <a:ext cx="9144000" cy="1005840"/>
+            <a:ext cx="9144000" cy="960120"/>
           </a:xfrm>
           <a:prstGeom prst="rect">
             <a:avLst/>
           </a:prstGeom>
           <a:solidFill>
-            <a:srgbClr val="1565C0"/>
+            <a:srgbClr val="2E7D32"/>
           </a:solidFill>
           <a:ln>
             <a:noFill/>
@@ -8035,90 +8612,20 @@
       </p:sp>
       <p:sp>
         <p:nvSpPr>
-          <p:cNvPr id="3" name="TextBox 2"/>
-          <p:cNvSpPr txBox="1"/>
-          <p:nvPr/>
-        </p:nvSpPr>
-        <p:spPr>
-          <a:xfrm>
-            <a:off x="182880" y="45720"/>
-            <a:ext cx="8229600" cy="594360"/>
-          </a:xfrm>
-          <a:prstGeom prst="rect">
-            <a:avLst/>
-          </a:prstGeom>
-          <a:noFill/>
-        </p:spPr>
-        <p:txBody>
-          <a:bodyPr wrap="square">
-            <a:spAutoFit/>
-          </a:bodyPr>
-          <a:lstStyle/>
-          <a:p>
-            <a:pPr algn="l"/>
-            <a:r>
-              <a:rPr sz="2400" b="1">
-                <a:solidFill>
-                  <a:srgbClr val="FFFFFF"/>
-                </a:solidFill>
-                <a:latin typeface="Calibri"/>
-              </a:rPr>
-              <a:t>EDA Highlights — Investor Behaviour</a:t>
-            </a:r>
-          </a:p>
-        </p:txBody>
-      </p:sp>
-      <p:sp>
-        <p:nvSpPr>
-          <p:cNvPr id="4" name="TextBox 3"/>
-          <p:cNvSpPr txBox="1"/>
-          <p:nvPr/>
-        </p:nvSpPr>
-        <p:spPr>
-          <a:xfrm>
-            <a:off x="182880" y="658368"/>
-            <a:ext cx="8229600" cy="320040"/>
-          </a:xfrm>
-          <a:prstGeom prst="rect">
-            <a:avLst/>
-          </a:prstGeom>
-          <a:noFill/>
-        </p:spPr>
-        <p:txBody>
-          <a:bodyPr wrap="square">
-            <a:spAutoFit/>
-          </a:bodyPr>
-          <a:lstStyle/>
-          <a:p>
-            <a:pPr algn="l"/>
-            <a:r>
-              <a:rPr sz="1200" b="0">
-                <a:solidFill>
-                  <a:srgbClr val="BBDEFB"/>
-                </a:solidFill>
-                <a:latin typeface="Calibri"/>
-              </a:rPr>
-              <a:t>Demographics, geography, folio growth</a:t>
-            </a:r>
-          </a:p>
-        </p:txBody>
-      </p:sp>
-      <p:sp>
-        <p:nvSpPr>
-          <p:cNvPr id="5" name="Rectangle 4"/>
+          <p:cNvPr id="3" name="Rectangle 2"/>
           <p:cNvSpPr/>
           <p:nvPr/>
         </p:nvSpPr>
         <p:spPr>
           <a:xfrm>
-            <a:off x="0" y="4800600"/>
-            <a:ext cx="9144000" cy="342900"/>
+            <a:off x="0" y="896112"/>
+            <a:ext cx="9144000" cy="91440"/>
           </a:xfrm>
           <a:prstGeom prst="rect">
             <a:avLst/>
           </a:prstGeom>
           <a:solidFill>
-            <a:srgbClr val="E3F2FD"/>
+            <a:srgbClr val="E65100"/>
           </a:solidFill>
           <a:ln>
             <a:noFill/>
@@ -8148,13 +8655,126 @@
       </p:sp>
       <p:sp>
         <p:nvSpPr>
-          <p:cNvPr id="6" name="TextBox 5"/>
-          <p:cNvSpPr txBox="1"/>
-          <p:nvPr/>
-        </p:nvSpPr>
-        <p:spPr>
-          <a:xfrm>
-            <a:off x="91440" y="4828032"/>
+          <p:cNvPr id="4" name="TextBox 3"/>
+          <p:cNvSpPr txBox="1"/>
+          <p:nvPr/>
+        </p:nvSpPr>
+        <p:spPr>
+          <a:xfrm>
+            <a:off x="182880" y="45720"/>
+            <a:ext cx="8778240" cy="594360"/>
+          </a:xfrm>
+          <a:prstGeom prst="rect">
+            <a:avLst/>
+          </a:prstGeom>
+          <a:noFill/>
+        </p:spPr>
+        <p:txBody>
+          <a:bodyPr wrap="square">
+            <a:spAutoFit/>
+          </a:bodyPr>
+          <a:lstStyle/>
+          <a:p>
+            <a:pPr algn="l"/>
+            <a:r>
+              <a:rPr sz="2200" b="1">
+                <a:solidFill>
+                  <a:srgbClr val="FFFFFF"/>
+                </a:solidFill>
+                <a:latin typeface="Calibri"/>
+              </a:rPr>
+              <a:t>EDA Highlights — Investors &amp; Folios</a:t>
+            </a:r>
+          </a:p>
+        </p:txBody>
+      </p:sp>
+      <p:sp>
+        <p:nvSpPr>
+          <p:cNvPr id="5" name="TextBox 4"/>
+          <p:cNvSpPr txBox="1"/>
+          <p:nvPr/>
+        </p:nvSpPr>
+        <p:spPr>
+          <a:xfrm>
+            <a:off x="182880" y="640080"/>
+            <a:ext cx="8778240" cy="292608"/>
+          </a:xfrm>
+          <a:prstGeom prst="rect">
+            <a:avLst/>
+          </a:prstGeom>
+          <a:noFill/>
+        </p:spPr>
+        <p:txBody>
+          <a:bodyPr wrap="square">
+            <a:spAutoFit/>
+          </a:bodyPr>
+          <a:lstStyle/>
+          <a:p>
+            <a:pPr algn="l"/>
+            <a:r>
+              <a:rPr sz="1100" b="0">
+                <a:solidFill>
+                  <a:srgbClr val="C8E6C9"/>
+                </a:solidFill>
+                <a:latin typeface="Calibri"/>
+              </a:rPr>
+              <a:t>Demographics, geography, folio growth</a:t>
+            </a:r>
+          </a:p>
+        </p:txBody>
+      </p:sp>
+      <p:sp>
+        <p:nvSpPr>
+          <p:cNvPr id="6" name="Rectangle 5"/>
+          <p:cNvSpPr/>
+          <p:nvPr/>
+        </p:nvSpPr>
+        <p:spPr>
+          <a:xfrm>
+            <a:off x="0" y="4828032"/>
+            <a:ext cx="9144000" cy="320040"/>
+          </a:xfrm>
+          <a:prstGeom prst="rect">
+            <a:avLst/>
+          </a:prstGeom>
+          <a:solidFill>
+            <a:srgbClr val="E8F5E9"/>
+          </a:solidFill>
+          <a:ln>
+            <a:noFill/>
+          </a:ln>
+        </p:spPr>
+        <p:style>
+          <a:lnRef idx="1">
+            <a:schemeClr val="accent1"/>
+          </a:lnRef>
+          <a:fillRef idx="3">
+            <a:schemeClr val="accent1"/>
+          </a:fillRef>
+          <a:effectRef idx="2">
+            <a:schemeClr val="accent1"/>
+          </a:effectRef>
+          <a:fontRef idx="minor">
+            <a:schemeClr val="lt1"/>
+          </a:fontRef>
+        </p:style>
+        <p:txBody>
+          <a:bodyPr rtlCol="0" anchor="ctr"/>
+          <a:lstStyle/>
+          <a:p>
+            <a:pPr algn="ctr"/>
+          </a:p>
+        </p:txBody>
+      </p:sp>
+      <p:sp>
+        <p:nvSpPr>
+          <p:cNvPr id="7" name="TextBox 6"/>
+          <p:cNvSpPr txBox="1"/>
+          <p:nvPr/>
+        </p:nvSpPr>
+        <p:spPr>
+          <a:xfrm>
+            <a:off x="91440" y="4846320"/>
             <a:ext cx="8961120" cy="274320"/>
           </a:xfrm>
           <a:prstGeom prst="rect">
@@ -8176,14 +8796,14 @@
                 </a:solidFill>
                 <a:latin typeface="Calibri"/>
               </a:rPr>
-              <a:t>Bluestock MF Analytics · Capstone Project 2026</a:t>
+              <a:t>Bluestock MF Analytics  ·  Capstone Project 2026</a:t>
             </a:r>
           </a:p>
         </p:txBody>
       </p:sp>
       <p:pic>
         <p:nvPicPr>
-          <p:cNvPr id="7" name="Picture 6" descr="07_folio_count_growth.png"/>
+          <p:cNvPr id="8" name="Picture 7" descr="07_folio_count_growth.png"/>
           <p:cNvPicPr>
             <a:picLocks noChangeAspect="1"/>
           </p:cNvPicPr>
@@ -8197,7 +8817,7 @@
         </p:blipFill>
         <p:spPr>
           <a:xfrm>
-            <a:off x="182880" y="1097280"/>
+            <a:off x="182880" y="1024128"/>
             <a:ext cx="5029200" cy="1724297"/>
           </a:xfrm>
           <a:prstGeom prst="rect">
@@ -8207,7 +8827,7 @@
       </p:pic>
       <p:pic>
         <p:nvPicPr>
-          <p:cNvPr id="8" name="Picture 7" descr="05a_age_group_pie.png"/>
+          <p:cNvPr id="9" name="Picture 8" descr="05a_age_group_pie.png"/>
           <p:cNvPicPr>
             <a:picLocks noChangeAspect="1"/>
           </p:cNvPicPr>
@@ -8221,8 +8841,8 @@
         </p:blipFill>
         <p:spPr>
           <a:xfrm>
-            <a:off x="5303520" y="1097280"/>
-            <a:ext cx="3474720" cy="2481943"/>
+            <a:off x="5303520" y="1024128"/>
+            <a:ext cx="3566160" cy="2547257"/>
           </a:xfrm>
           <a:prstGeom prst="rect">
             <a:avLst/>
@@ -8231,13 +8851,13 @@
       </p:pic>
       <p:sp>
         <p:nvSpPr>
-          <p:cNvPr id="9" name="TextBox 8"/>
-          <p:cNvSpPr txBox="1"/>
-          <p:nvPr/>
-        </p:nvSpPr>
-        <p:spPr>
-          <a:xfrm>
-            <a:off x="182880" y="3840480"/>
+          <p:cNvPr id="10" name="TextBox 9"/>
+          <p:cNvSpPr txBox="1"/>
+          <p:nvPr/>
+        </p:nvSpPr>
+        <p:spPr>
+          <a:xfrm>
+            <a:off x="182880" y="3822191"/>
             <a:ext cx="5029200" cy="457200"/>
           </a:xfrm>
           <a:prstGeom prst="rect">
@@ -8255,7 +8875,7 @@
             <a:r>
               <a:rPr sz="1000" b="0">
                 <a:solidFill>
-                  <a:srgbClr val="546E7A"/>
+                  <a:srgbClr val="2E7D32"/>
                 </a:solidFill>
                 <a:latin typeface="Calibri"/>
               </a:rPr>
@@ -8266,14 +8886,14 @@
       </p:sp>
       <p:sp>
         <p:nvSpPr>
-          <p:cNvPr id="10" name="TextBox 9"/>
-          <p:cNvSpPr txBox="1"/>
-          <p:nvPr/>
-        </p:nvSpPr>
-        <p:spPr>
-          <a:xfrm>
-            <a:off x="5303520" y="3840480"/>
-            <a:ext cx="3474720" cy="457200"/>
+          <p:cNvPr id="11" name="TextBox 10"/>
+          <p:cNvSpPr txBox="1"/>
+          <p:nvPr/>
+        </p:nvSpPr>
+        <p:spPr>
+          <a:xfrm>
+            <a:off x="5303520" y="3822191"/>
+            <a:ext cx="3566160" cy="457200"/>
           </a:xfrm>
           <a:prstGeom prst="rect">
             <a:avLst/>
@@ -8290,7 +8910,7 @@
             <a:r>
               <a:rPr sz="1000" b="0">
                 <a:solidFill>
-                  <a:srgbClr val="546E7A"/>
+                  <a:srgbClr val="E65100"/>
                 </a:solidFill>
                 <a:latin typeface="Calibri"/>
               </a:rPr>
@@ -8334,13 +8954,13 @@
         <p:spPr>
           <a:xfrm>
             <a:off x="0" y="0"/>
-            <a:ext cx="9144000" cy="1005840"/>
+            <a:ext cx="9144000" cy="960120"/>
           </a:xfrm>
           <a:prstGeom prst="rect">
             <a:avLst/>
           </a:prstGeom>
           <a:solidFill>
-            <a:srgbClr val="1565C0"/>
+            <a:srgbClr val="2E7D32"/>
           </a:solidFill>
           <a:ln>
             <a:noFill/>
@@ -8370,90 +8990,20 @@
       </p:sp>
       <p:sp>
         <p:nvSpPr>
-          <p:cNvPr id="3" name="TextBox 2"/>
-          <p:cNvSpPr txBox="1"/>
-          <p:nvPr/>
-        </p:nvSpPr>
-        <p:spPr>
-          <a:xfrm>
-            <a:off x="182880" y="45720"/>
-            <a:ext cx="8229600" cy="594360"/>
-          </a:xfrm>
-          <a:prstGeom prst="rect">
-            <a:avLst/>
-          </a:prstGeom>
-          <a:noFill/>
-        </p:spPr>
-        <p:txBody>
-          <a:bodyPr wrap="square">
-            <a:spAutoFit/>
-          </a:bodyPr>
-          <a:lstStyle/>
-          <a:p>
-            <a:pPr algn="l"/>
-            <a:r>
-              <a:rPr sz="2400" b="1">
-                <a:solidFill>
-                  <a:srgbClr val="FFFFFF"/>
-                </a:solidFill>
-                <a:latin typeface="Calibri"/>
-              </a:rPr>
-              <a:t>Performance Metrics — Benchmark Comparison</a:t>
-            </a:r>
-          </a:p>
-        </p:txBody>
-      </p:sp>
-      <p:sp>
-        <p:nvSpPr>
-          <p:cNvPr id="4" name="TextBox 3"/>
-          <p:cNvSpPr txBox="1"/>
-          <p:nvPr/>
-        </p:nvSpPr>
-        <p:spPr>
-          <a:xfrm>
-            <a:off x="182880" y="658368"/>
-            <a:ext cx="8229600" cy="320040"/>
-          </a:xfrm>
-          <a:prstGeom prst="rect">
-            <a:avLst/>
-          </a:prstGeom>
-          <a:noFill/>
-        </p:spPr>
-        <p:txBody>
-          <a:bodyPr wrap="square">
-            <a:spAutoFit/>
-          </a:bodyPr>
-          <a:lstStyle/>
-          <a:p>
-            <a:pPr algn="l"/>
-            <a:r>
-              <a:rPr sz="1200" b="0">
-                <a:solidFill>
-                  <a:srgbClr val="BBDEFB"/>
-                </a:solidFill>
-                <a:latin typeface="Calibri"/>
-              </a:rPr>
-              <a:t>Top 5 funds vs NIFTY 50 &amp; NIFTY 100 (3-year, indexed to 100)</a:t>
-            </a:r>
-          </a:p>
-        </p:txBody>
-      </p:sp>
-      <p:sp>
-        <p:nvSpPr>
-          <p:cNvPr id="5" name="Rectangle 4"/>
+          <p:cNvPr id="3" name="Rectangle 2"/>
           <p:cNvSpPr/>
           <p:nvPr/>
         </p:nvSpPr>
         <p:spPr>
           <a:xfrm>
-            <a:off x="0" y="4800600"/>
-            <a:ext cx="9144000" cy="342900"/>
+            <a:off x="0" y="896112"/>
+            <a:ext cx="9144000" cy="91440"/>
           </a:xfrm>
           <a:prstGeom prst="rect">
             <a:avLst/>
           </a:prstGeom>
           <a:solidFill>
-            <a:srgbClr val="E3F2FD"/>
+            <a:srgbClr val="E65100"/>
           </a:solidFill>
           <a:ln>
             <a:noFill/>
@@ -8483,13 +9033,126 @@
       </p:sp>
       <p:sp>
         <p:nvSpPr>
-          <p:cNvPr id="6" name="TextBox 5"/>
-          <p:cNvSpPr txBox="1"/>
-          <p:nvPr/>
-        </p:nvSpPr>
-        <p:spPr>
-          <a:xfrm>
-            <a:off x="91440" y="4828032"/>
+          <p:cNvPr id="4" name="TextBox 3"/>
+          <p:cNvSpPr txBox="1"/>
+          <p:nvPr/>
+        </p:nvSpPr>
+        <p:spPr>
+          <a:xfrm>
+            <a:off x="182880" y="45720"/>
+            <a:ext cx="8778240" cy="594360"/>
+          </a:xfrm>
+          <a:prstGeom prst="rect">
+            <a:avLst/>
+          </a:prstGeom>
+          <a:noFill/>
+        </p:spPr>
+        <p:txBody>
+          <a:bodyPr wrap="square">
+            <a:spAutoFit/>
+          </a:bodyPr>
+          <a:lstStyle/>
+          <a:p>
+            <a:pPr algn="l"/>
+            <a:r>
+              <a:rPr sz="2200" b="1">
+                <a:solidFill>
+                  <a:srgbClr val="FFFFFF"/>
+                </a:solidFill>
+                <a:latin typeface="Calibri"/>
+              </a:rPr>
+              <a:t>Performance — Benchmark Comparison</a:t>
+            </a:r>
+          </a:p>
+        </p:txBody>
+      </p:sp>
+      <p:sp>
+        <p:nvSpPr>
+          <p:cNvPr id="5" name="TextBox 4"/>
+          <p:cNvSpPr txBox="1"/>
+          <p:nvPr/>
+        </p:nvSpPr>
+        <p:spPr>
+          <a:xfrm>
+            <a:off x="182880" y="640080"/>
+            <a:ext cx="8778240" cy="292608"/>
+          </a:xfrm>
+          <a:prstGeom prst="rect">
+            <a:avLst/>
+          </a:prstGeom>
+          <a:noFill/>
+        </p:spPr>
+        <p:txBody>
+          <a:bodyPr wrap="square">
+            <a:spAutoFit/>
+          </a:bodyPr>
+          <a:lstStyle/>
+          <a:p>
+            <a:pPr algn="l"/>
+            <a:r>
+              <a:rPr sz="1100" b="0">
+                <a:solidFill>
+                  <a:srgbClr val="C8E6C9"/>
+                </a:solidFill>
+                <a:latin typeface="Calibri"/>
+              </a:rPr>
+              <a:t>Top 5 funds vs NIFTY 50 &amp; NIFTY 100 · 3-year indexed to 100</a:t>
+            </a:r>
+          </a:p>
+        </p:txBody>
+      </p:sp>
+      <p:sp>
+        <p:nvSpPr>
+          <p:cNvPr id="6" name="Rectangle 5"/>
+          <p:cNvSpPr/>
+          <p:nvPr/>
+        </p:nvSpPr>
+        <p:spPr>
+          <a:xfrm>
+            <a:off x="0" y="4828032"/>
+            <a:ext cx="9144000" cy="320040"/>
+          </a:xfrm>
+          <a:prstGeom prst="rect">
+            <a:avLst/>
+          </a:prstGeom>
+          <a:solidFill>
+            <a:srgbClr val="E8F5E9"/>
+          </a:solidFill>
+          <a:ln>
+            <a:noFill/>
+          </a:ln>
+        </p:spPr>
+        <p:style>
+          <a:lnRef idx="1">
+            <a:schemeClr val="accent1"/>
+          </a:lnRef>
+          <a:fillRef idx="3">
+            <a:schemeClr val="accent1"/>
+          </a:fillRef>
+          <a:effectRef idx="2">
+            <a:schemeClr val="accent1"/>
+          </a:effectRef>
+          <a:fontRef idx="minor">
+            <a:schemeClr val="lt1"/>
+          </a:fontRef>
+        </p:style>
+        <p:txBody>
+          <a:bodyPr rtlCol="0" anchor="ctr"/>
+          <a:lstStyle/>
+          <a:p>
+            <a:pPr algn="ctr"/>
+          </a:p>
+        </p:txBody>
+      </p:sp>
+      <p:sp>
+        <p:nvSpPr>
+          <p:cNvPr id="7" name="TextBox 6"/>
+          <p:cNvSpPr txBox="1"/>
+          <p:nvPr/>
+        </p:nvSpPr>
+        <p:spPr>
+          <a:xfrm>
+            <a:off x="91440" y="4846320"/>
             <a:ext cx="8961120" cy="274320"/>
           </a:xfrm>
           <a:prstGeom prst="rect">
@@ -8511,14 +9174,14 @@
                 </a:solidFill>
                 <a:latin typeface="Calibri"/>
               </a:rPr>
-              <a:t>Bluestock MF Analytics · Capstone Project 2026</a:t>
+              <a:t>Bluestock MF Analytics  ·  Capstone Project 2026</a:t>
             </a:r>
           </a:p>
         </p:txBody>
       </p:sp>
       <p:pic>
         <p:nvPicPr>
-          <p:cNvPr id="7" name="Picture 6" descr="benchmark_comparison.png"/>
+          <p:cNvPr id="8" name="Picture 7" descr="benchmark_comparison.png"/>
           <p:cNvPicPr>
             <a:picLocks noChangeAspect="1"/>
           </p:cNvPicPr>
@@ -8532,7 +9195,7 @@
         </p:blipFill>
         <p:spPr>
           <a:xfrm>
-            <a:off x="182880" y="1005840"/>
+            <a:off x="182880" y="987552"/>
             <a:ext cx="8778240" cy="6921225"/>
           </a:xfrm>
           <a:prstGeom prst="rect">
@@ -8542,14 +9205,14 @@
       </p:pic>
       <p:sp>
         <p:nvSpPr>
-          <p:cNvPr id="8" name="TextBox 7"/>
+          <p:cNvPr id="9" name="TextBox 8"/>
           <p:cNvSpPr txBox="1"/>
           <p:nvPr/>
         </p:nvSpPr>
         <p:spPr>
           <a:xfrm>
             <a:off x="182880" y="4434840"/>
-            <a:ext cx="8778240" cy="365760"/>
+            <a:ext cx="8778240" cy="384048"/>
           </a:xfrm>
           <a:prstGeom prst="rect">
             <a:avLst/>
@@ -8570,7 +9233,7 @@
                 </a:solidFill>
                 <a:latin typeface="Calibri"/>
               </a:rPr>
-              <a:t>Top 5 funds delivered 15–18% 3yr CAGR vs NIFTY 100's ~13–14%  ·  Direct plans outperform by 50–100 bps annually</a:t>
+              <a:t>Top 5 funds: 15–18% CAGR vs NIFTY 100 ~13–14%  ·  Direct plans beat Regular by 50–100 bps annually</a:t>
             </a:r>
           </a:p>
         </p:txBody>
@@ -8610,13 +9273,13 @@
         <p:spPr>
           <a:xfrm>
             <a:off x="0" y="0"/>
-            <a:ext cx="9144000" cy="1005840"/>
+            <a:ext cx="9144000" cy="960120"/>
           </a:xfrm>
           <a:prstGeom prst="rect">
             <a:avLst/>
           </a:prstGeom>
           <a:solidFill>
-            <a:srgbClr val="1565C0"/>
+            <a:srgbClr val="2E7D32"/>
           </a:solidFill>
           <a:ln>
             <a:noFill/>
@@ -8646,90 +9309,20 @@
       </p:sp>
       <p:sp>
         <p:nvSpPr>
-          <p:cNvPr id="3" name="TextBox 2"/>
-          <p:cNvSpPr txBox="1"/>
-          <p:nvPr/>
-        </p:nvSpPr>
-        <p:spPr>
-          <a:xfrm>
-            <a:off x="182880" y="45720"/>
-            <a:ext cx="8229600" cy="594360"/>
-          </a:xfrm>
-          <a:prstGeom prst="rect">
-            <a:avLst/>
-          </a:prstGeom>
-          <a:noFill/>
-        </p:spPr>
-        <p:txBody>
-          <a:bodyPr wrap="square">
-            <a:spAutoFit/>
-          </a:bodyPr>
-          <a:lstStyle/>
-          <a:p>
-            <a:pPr algn="l"/>
-            <a:r>
-              <a:rPr sz="2400" b="1">
-                <a:solidFill>
-                  <a:srgbClr val="FFFFFF"/>
-                </a:solidFill>
-                <a:latin typeface="Calibri"/>
-              </a:rPr>
-              <a:t>Performance Metrics — Risk-Adjusted Returns</a:t>
-            </a:r>
-          </a:p>
-        </p:txBody>
-      </p:sp>
-      <p:sp>
-        <p:nvSpPr>
-          <p:cNvPr id="4" name="TextBox 3"/>
-          <p:cNvSpPr txBox="1"/>
-          <p:nvPr/>
-        </p:nvSpPr>
-        <p:spPr>
-          <a:xfrm>
-            <a:off x="182880" y="658368"/>
-            <a:ext cx="8229600" cy="320040"/>
-          </a:xfrm>
-          <a:prstGeom prst="rect">
-            <a:avLst/>
-          </a:prstGeom>
-          <a:noFill/>
-        </p:spPr>
-        <p:txBody>
-          <a:bodyPr wrap="square">
-            <a:spAutoFit/>
-          </a:bodyPr>
-          <a:lstStyle/>
-          <a:p>
-            <a:pPr algn="l"/>
-            <a:r>
-              <a:rPr sz="1200" b="0">
-                <a:solidFill>
-                  <a:srgbClr val="BBDEFB"/>
-                </a:solidFill>
-                <a:latin typeface="Calibri"/>
-              </a:rPr>
-              <a:t>Sharpe, Sortino, Alpha/Beta, VaR — all 40 funds</a:t>
-            </a:r>
-          </a:p>
-        </p:txBody>
-      </p:sp>
-      <p:sp>
-        <p:nvSpPr>
-          <p:cNvPr id="5" name="Rectangle 4"/>
+          <p:cNvPr id="3" name="Rectangle 2"/>
           <p:cNvSpPr/>
           <p:nvPr/>
         </p:nvSpPr>
         <p:spPr>
           <a:xfrm>
-            <a:off x="0" y="4800600"/>
-            <a:ext cx="9144000" cy="342900"/>
+            <a:off x="0" y="896112"/>
+            <a:ext cx="9144000" cy="91440"/>
           </a:xfrm>
           <a:prstGeom prst="rect">
             <a:avLst/>
           </a:prstGeom>
           <a:solidFill>
-            <a:srgbClr val="E3F2FD"/>
+            <a:srgbClr val="E65100"/>
           </a:solidFill>
           <a:ln>
             <a:noFill/>
@@ -8759,13 +9352,126 @@
       </p:sp>
       <p:sp>
         <p:nvSpPr>
-          <p:cNvPr id="6" name="TextBox 5"/>
-          <p:cNvSpPr txBox="1"/>
-          <p:nvPr/>
-        </p:nvSpPr>
-        <p:spPr>
-          <a:xfrm>
-            <a:off x="91440" y="4828032"/>
+          <p:cNvPr id="4" name="TextBox 3"/>
+          <p:cNvSpPr txBox="1"/>
+          <p:nvPr/>
+        </p:nvSpPr>
+        <p:spPr>
+          <a:xfrm>
+            <a:off x="182880" y="45720"/>
+            <a:ext cx="8778240" cy="594360"/>
+          </a:xfrm>
+          <a:prstGeom prst="rect">
+            <a:avLst/>
+          </a:prstGeom>
+          <a:noFill/>
+        </p:spPr>
+        <p:txBody>
+          <a:bodyPr wrap="square">
+            <a:spAutoFit/>
+          </a:bodyPr>
+          <a:lstStyle/>
+          <a:p>
+            <a:pPr algn="l"/>
+            <a:r>
+              <a:rPr sz="2200" b="1">
+                <a:solidFill>
+                  <a:srgbClr val="FFFFFF"/>
+                </a:solidFill>
+                <a:latin typeface="Calibri"/>
+              </a:rPr>
+              <a:t>Performance — Risk-Adjusted Returns</a:t>
+            </a:r>
+          </a:p>
+        </p:txBody>
+      </p:sp>
+      <p:sp>
+        <p:nvSpPr>
+          <p:cNvPr id="5" name="TextBox 4"/>
+          <p:cNvSpPr txBox="1"/>
+          <p:nvPr/>
+        </p:nvSpPr>
+        <p:spPr>
+          <a:xfrm>
+            <a:off x="182880" y="640080"/>
+            <a:ext cx="8778240" cy="292608"/>
+          </a:xfrm>
+          <a:prstGeom prst="rect">
+            <a:avLst/>
+          </a:prstGeom>
+          <a:noFill/>
+        </p:spPr>
+        <p:txBody>
+          <a:bodyPr wrap="square">
+            <a:spAutoFit/>
+          </a:bodyPr>
+          <a:lstStyle/>
+          <a:p>
+            <a:pPr algn="l"/>
+            <a:r>
+              <a:rPr sz="1100" b="0">
+                <a:solidFill>
+                  <a:srgbClr val="C8E6C9"/>
+                </a:solidFill>
+                <a:latin typeface="Calibri"/>
+              </a:rPr>
+              <a:t>Sharpe, Sortino, Alpha/Beta, VaR/CVaR</a:t>
+            </a:r>
+          </a:p>
+        </p:txBody>
+      </p:sp>
+      <p:sp>
+        <p:nvSpPr>
+          <p:cNvPr id="6" name="Rectangle 5"/>
+          <p:cNvSpPr/>
+          <p:nvPr/>
+        </p:nvSpPr>
+        <p:spPr>
+          <a:xfrm>
+            <a:off x="0" y="4828032"/>
+            <a:ext cx="9144000" cy="320040"/>
+          </a:xfrm>
+          <a:prstGeom prst="rect">
+            <a:avLst/>
+          </a:prstGeom>
+          <a:solidFill>
+            <a:srgbClr val="E8F5E9"/>
+          </a:solidFill>
+          <a:ln>
+            <a:noFill/>
+          </a:ln>
+        </p:spPr>
+        <p:style>
+          <a:lnRef idx="1">
+            <a:schemeClr val="accent1"/>
+          </a:lnRef>
+          <a:fillRef idx="3">
+            <a:schemeClr val="accent1"/>
+          </a:fillRef>
+          <a:effectRef idx="2">
+            <a:schemeClr val="accent1"/>
+          </a:effectRef>
+          <a:fontRef idx="minor">
+            <a:schemeClr val="lt1"/>
+          </a:fontRef>
+        </p:style>
+        <p:txBody>
+          <a:bodyPr rtlCol="0" anchor="ctr"/>
+          <a:lstStyle/>
+          <a:p>
+            <a:pPr algn="ctr"/>
+          </a:p>
+        </p:txBody>
+      </p:sp>
+      <p:sp>
+        <p:nvSpPr>
+          <p:cNvPr id="7" name="TextBox 6"/>
+          <p:cNvSpPr txBox="1"/>
+          <p:nvPr/>
+        </p:nvSpPr>
+        <p:spPr>
+          <a:xfrm>
+            <a:off x="91440" y="4846320"/>
             <a:ext cx="8961120" cy="274320"/>
           </a:xfrm>
           <a:prstGeom prst="rect">
@@ -8787,14 +9493,14 @@
                 </a:solidFill>
                 <a:latin typeface="Calibri"/>
               </a:rPr>
-              <a:t>Bluestock MF Analytics · Capstone Project 2026</a:t>
+              <a:t>Bluestock MF Analytics  ·  Capstone Project 2026</a:t>
             </a:r>
           </a:p>
         </p:txBody>
       </p:sp>
       <p:pic>
         <p:nvPicPr>
-          <p:cNvPr id="7" name="Picture 6" descr="sharpe_sortino_ranking.png"/>
+          <p:cNvPr id="8" name="Picture 7" descr="sharpe_sortino_ranking.png"/>
           <p:cNvPicPr>
             <a:picLocks noChangeAspect="1"/>
           </p:cNvPicPr>
@@ -8808,7 +9514,7 @@
         </p:blipFill>
         <p:spPr>
           <a:xfrm>
-            <a:off x="182880" y="1051560"/>
+            <a:off x="182880" y="1024128"/>
             <a:ext cx="5120640" cy="3130323"/>
           </a:xfrm>
           <a:prstGeom prst="rect">
@@ -8818,7 +9524,7 @@
       </p:pic>
       <p:pic>
         <p:nvPicPr>
-          <p:cNvPr id="8" name="Picture 7" descr="var_cvar_chart.png"/>
+          <p:cNvPr id="9" name="Picture 8" descr="var_cvar_chart.png"/>
           <p:cNvPicPr>
             <a:picLocks noChangeAspect="1"/>
           </p:cNvPicPr>
@@ -8832,8 +9538,8 @@
         </p:blipFill>
         <p:spPr>
           <a:xfrm>
-            <a:off x="5394960" y="1051560"/>
-            <a:ext cx="3566160" cy="2164969"/>
+            <a:off x="5349240" y="1024128"/>
+            <a:ext cx="3611880" cy="2192725"/>
           </a:xfrm>
           <a:prstGeom prst="rect">
             <a:avLst/>
@@ -8842,7 +9548,7 @@
       </p:pic>
       <p:sp>
         <p:nvSpPr>
-          <p:cNvPr id="9" name="TextBox 8"/>
+          <p:cNvPr id="10" name="TextBox 9"/>
           <p:cNvSpPr txBox="1"/>
           <p:nvPr/>
         </p:nvSpPr>
@@ -8866,25 +9572,25 @@
             <a:r>
               <a:rPr sz="900" b="0">
                 <a:solidFill>
-                  <a:srgbClr val="546E7A"/>
-                </a:solidFill>
-                <a:latin typeface="Calibri"/>
-              </a:rPr>
-              <a:t>Top equity Sharpe: 1.05–1.48 (above 1.0 threshold)</a:t>
-            </a:r>
-          </a:p>
-        </p:txBody>
-      </p:sp>
-      <p:sp>
-        <p:nvSpPr>
-          <p:cNvPr id="10" name="TextBox 9"/>
-          <p:cNvSpPr txBox="1"/>
-          <p:nvPr/>
-        </p:nvSpPr>
-        <p:spPr>
-          <a:xfrm>
-            <a:off x="5394960" y="3840480"/>
-            <a:ext cx="3566160" cy="411480"/>
+                  <a:srgbClr val="2E7D32"/>
+                </a:solidFill>
+                <a:latin typeface="Calibri"/>
+              </a:rPr>
+              <a:t>Sharpe: 1.05–1.48 for top equity funds</a:t>
+            </a:r>
+          </a:p>
+        </p:txBody>
+      </p:sp>
+      <p:sp>
+        <p:nvSpPr>
+          <p:cNvPr id="11" name="TextBox 10"/>
+          <p:cNvSpPr txBox="1"/>
+          <p:nvPr/>
+        </p:nvSpPr>
+        <p:spPr>
+          <a:xfrm>
+            <a:off x="5349240" y="3840480"/>
+            <a:ext cx="3611880" cy="411480"/>
           </a:xfrm>
           <a:prstGeom prst="rect">
             <a:avLst/>
@@ -8901,11 +9607,11 @@
             <a:r>
               <a:rPr sz="900" b="0">
                 <a:solidFill>
-                  <a:srgbClr val="546E7A"/>
-                </a:solidFill>
-                <a:latin typeface="Calibri"/>
-              </a:rPr>
-              <a:t>Daily VaR 95%: equity funds –0.9% to –1.4%</a:t>
+                  <a:srgbClr val="E65100"/>
+                </a:solidFill>
+                <a:latin typeface="Calibri"/>
+              </a:rPr>
+              <a:t>Daily VaR 95%: equity –0.9% to –1.4%</a:t>
             </a:r>
           </a:p>
         </p:txBody>
@@ -8945,13 +9651,13 @@
         <p:spPr>
           <a:xfrm>
             <a:off x="0" y="0"/>
-            <a:ext cx="9144000" cy="1005840"/>
+            <a:ext cx="9144000" cy="960120"/>
           </a:xfrm>
           <a:prstGeom prst="rect">
             <a:avLst/>
           </a:prstGeom>
           <a:solidFill>
-            <a:srgbClr val="1565C0"/>
+            <a:srgbClr val="2E7D32"/>
           </a:solidFill>
           <a:ln>
             <a:noFill/>
@@ -8981,90 +9687,20 @@
       </p:sp>
       <p:sp>
         <p:nvSpPr>
-          <p:cNvPr id="3" name="TextBox 2"/>
-          <p:cNvSpPr txBox="1"/>
-          <p:nvPr/>
-        </p:nvSpPr>
-        <p:spPr>
-          <a:xfrm>
-            <a:off x="182880" y="45720"/>
-            <a:ext cx="8229600" cy="594360"/>
-          </a:xfrm>
-          <a:prstGeom prst="rect">
-            <a:avLst/>
-          </a:prstGeom>
-          <a:noFill/>
-        </p:spPr>
-        <p:txBody>
-          <a:bodyPr wrap="square">
-            <a:spAutoFit/>
-          </a:bodyPr>
-          <a:lstStyle/>
-          <a:p>
-            <a:pPr algn="l"/>
-            <a:r>
-              <a:rPr sz="2400" b="1">
-                <a:solidFill>
-                  <a:srgbClr val="FFFFFF"/>
-                </a:solidFill>
-                <a:latin typeface="Calibri"/>
-              </a:rPr>
-              <a:t>Dashboard — Industry Overview &amp; Fund Performance</a:t>
-            </a:r>
-          </a:p>
-        </p:txBody>
-      </p:sp>
-      <p:sp>
-        <p:nvSpPr>
-          <p:cNvPr id="4" name="TextBox 3"/>
-          <p:cNvSpPr txBox="1"/>
-          <p:nvPr/>
-        </p:nvSpPr>
-        <p:spPr>
-          <a:xfrm>
-            <a:off x="182880" y="658368"/>
-            <a:ext cx="8229600" cy="320040"/>
-          </a:xfrm>
-          <a:prstGeom prst="rect">
-            <a:avLst/>
-          </a:prstGeom>
-          <a:noFill/>
-        </p:spPr>
-        <p:txBody>
-          <a:bodyPr wrap="square">
-            <a:spAutoFit/>
-          </a:bodyPr>
-          <a:lstStyle/>
-          <a:p>
-            <a:pPr algn="l"/>
-            <a:r>
-              <a:rPr sz="1200" b="0">
-                <a:solidFill>
-                  <a:srgbClr val="BBDEFB"/>
-                </a:solidFill>
-                <a:latin typeface="Calibri"/>
-              </a:rPr>
-              <a:t>Power BI · Page 1 and Page 2</a:t>
-            </a:r>
-          </a:p>
-        </p:txBody>
-      </p:sp>
-      <p:sp>
-        <p:nvSpPr>
-          <p:cNvPr id="5" name="Rectangle 4"/>
+          <p:cNvPr id="3" name="Rectangle 2"/>
           <p:cNvSpPr/>
           <p:nvPr/>
         </p:nvSpPr>
         <p:spPr>
           <a:xfrm>
-            <a:off x="0" y="4800600"/>
-            <a:ext cx="9144000" cy="342900"/>
+            <a:off x="0" y="896112"/>
+            <a:ext cx="9144000" cy="91440"/>
           </a:xfrm>
           <a:prstGeom prst="rect">
             <a:avLst/>
           </a:prstGeom>
           <a:solidFill>
-            <a:srgbClr val="E3F2FD"/>
+            <a:srgbClr val="E65100"/>
           </a:solidFill>
           <a:ln>
             <a:noFill/>
@@ -9094,13 +9730,126 @@
       </p:sp>
       <p:sp>
         <p:nvSpPr>
-          <p:cNvPr id="6" name="TextBox 5"/>
-          <p:cNvSpPr txBox="1"/>
-          <p:nvPr/>
-        </p:nvSpPr>
-        <p:spPr>
-          <a:xfrm>
-            <a:off x="91440" y="4828032"/>
+          <p:cNvPr id="4" name="TextBox 3"/>
+          <p:cNvSpPr txBox="1"/>
+          <p:nvPr/>
+        </p:nvSpPr>
+        <p:spPr>
+          <a:xfrm>
+            <a:off x="182880" y="45720"/>
+            <a:ext cx="8778240" cy="594360"/>
+          </a:xfrm>
+          <a:prstGeom prst="rect">
+            <a:avLst/>
+          </a:prstGeom>
+          <a:noFill/>
+        </p:spPr>
+        <p:txBody>
+          <a:bodyPr wrap="square">
+            <a:spAutoFit/>
+          </a:bodyPr>
+          <a:lstStyle/>
+          <a:p>
+            <a:pPr algn="l"/>
+            <a:r>
+              <a:rPr sz="2200" b="1">
+                <a:solidFill>
+                  <a:srgbClr val="FFFFFF"/>
+                </a:solidFill>
+                <a:latin typeface="Calibri"/>
+              </a:rPr>
+              <a:t>Dashboard — Industry Overview &amp; Fund Performance</a:t>
+            </a:r>
+          </a:p>
+        </p:txBody>
+      </p:sp>
+      <p:sp>
+        <p:nvSpPr>
+          <p:cNvPr id="5" name="TextBox 4"/>
+          <p:cNvSpPr txBox="1"/>
+          <p:nvPr/>
+        </p:nvSpPr>
+        <p:spPr>
+          <a:xfrm>
+            <a:off x="182880" y="640080"/>
+            <a:ext cx="8778240" cy="292608"/>
+          </a:xfrm>
+          <a:prstGeom prst="rect">
+            <a:avLst/>
+          </a:prstGeom>
+          <a:noFill/>
+        </p:spPr>
+        <p:txBody>
+          <a:bodyPr wrap="square">
+            <a:spAutoFit/>
+          </a:bodyPr>
+          <a:lstStyle/>
+          <a:p>
+            <a:pPr algn="l"/>
+            <a:r>
+              <a:rPr sz="1100" b="0">
+                <a:solidFill>
+                  <a:srgbClr val="C8E6C9"/>
+                </a:solidFill>
+                <a:latin typeface="Calibri"/>
+              </a:rPr>
+              <a:t>Power BI  ·  Page 1 and Page 2</a:t>
+            </a:r>
+          </a:p>
+        </p:txBody>
+      </p:sp>
+      <p:sp>
+        <p:nvSpPr>
+          <p:cNvPr id="6" name="Rectangle 5"/>
+          <p:cNvSpPr/>
+          <p:nvPr/>
+        </p:nvSpPr>
+        <p:spPr>
+          <a:xfrm>
+            <a:off x="0" y="4828032"/>
+            <a:ext cx="9144000" cy="320040"/>
+          </a:xfrm>
+          <a:prstGeom prst="rect">
+            <a:avLst/>
+          </a:prstGeom>
+          <a:solidFill>
+            <a:srgbClr val="E8F5E9"/>
+          </a:solidFill>
+          <a:ln>
+            <a:noFill/>
+          </a:ln>
+        </p:spPr>
+        <p:style>
+          <a:lnRef idx="1">
+            <a:schemeClr val="accent1"/>
+          </a:lnRef>
+          <a:fillRef idx="3">
+            <a:schemeClr val="accent1"/>
+          </a:fillRef>
+          <a:effectRef idx="2">
+            <a:schemeClr val="accent1"/>
+          </a:effectRef>
+          <a:fontRef idx="minor">
+            <a:schemeClr val="lt1"/>
+          </a:fontRef>
+        </p:style>
+        <p:txBody>
+          <a:bodyPr rtlCol="0" anchor="ctr"/>
+          <a:lstStyle/>
+          <a:p>
+            <a:pPr algn="ctr"/>
+          </a:p>
+        </p:txBody>
+      </p:sp>
+      <p:sp>
+        <p:nvSpPr>
+          <p:cNvPr id="7" name="TextBox 6"/>
+          <p:cNvSpPr txBox="1"/>
+          <p:nvPr/>
+        </p:nvSpPr>
+        <p:spPr>
+          <a:xfrm>
+            <a:off x="91440" y="4846320"/>
             <a:ext cx="8961120" cy="274320"/>
           </a:xfrm>
           <a:prstGeom prst="rect">
@@ -9122,14 +9871,14 @@
                 </a:solidFill>
                 <a:latin typeface="Calibri"/>
               </a:rPr>
-              <a:t>Bluestock MF Analytics · Capstone Project 2026</a:t>
+              <a:t>Bluestock MF Analytics  ·  Capstone Project 2026</a:t>
             </a:r>
           </a:p>
         </p:txBody>
       </p:sp>
       <p:pic>
         <p:nvPicPr>
-          <p:cNvPr id="7" name="Picture 6" descr="12_top10_aum.png"/>
+          <p:cNvPr id="8" name="Picture 7" descr="12_top10_aum.png"/>
           <p:cNvPicPr>
             <a:picLocks noChangeAspect="1"/>
           </p:cNvPicPr>
@@ -9143,8 +9892,8 @@
         </p:blipFill>
         <p:spPr>
           <a:xfrm>
-            <a:off x="182880" y="1051560"/>
-            <a:ext cx="4297680" cy="835352"/>
+            <a:off x="182880" y="1024128"/>
+            <a:ext cx="4343400" cy="844239"/>
           </a:xfrm>
           <a:prstGeom prst="rect">
             <a:avLst/>
@@ -9153,7 +9902,7 @@
       </p:pic>
       <p:pic>
         <p:nvPicPr>
-          <p:cNvPr id="8" name="Picture 7" descr="14_sharpe_ratio_top15.png"/>
+          <p:cNvPr id="9" name="Picture 8" descr="14_sharpe_ratio_top15.png"/>
           <p:cNvPicPr>
             <a:picLocks noChangeAspect="1"/>
           </p:cNvPicPr>
@@ -9167,7 +9916,7 @@
         </p:blipFill>
         <p:spPr>
           <a:xfrm>
-            <a:off x="4663440" y="1051560"/>
+            <a:off x="4681728" y="1024128"/>
             <a:ext cx="4297680" cy="2294569"/>
           </a:xfrm>
           <a:prstGeom prst="rect">
@@ -9177,14 +9926,14 @@
       </p:pic>
       <p:sp>
         <p:nvSpPr>
-          <p:cNvPr id="9" name="TextBox 8"/>
-          <p:cNvSpPr txBox="1"/>
-          <p:nvPr/>
-        </p:nvSpPr>
-        <p:spPr>
-          <a:xfrm>
-            <a:off x="182880" y="4389120"/>
-            <a:ext cx="8778240" cy="411480"/>
+          <p:cNvPr id="10" name="TextBox 9"/>
+          <p:cNvSpPr txBox="1"/>
+          <p:nvPr/>
+        </p:nvSpPr>
+        <p:spPr>
+          <a:xfrm>
+            <a:off x="182880" y="3840480"/>
+            <a:ext cx="4343400" cy="438912"/>
           </a:xfrm>
           <a:prstGeom prst="rect">
             <a:avLst/>
@@ -9201,11 +9950,46 @@
             <a:r>
               <a:rPr sz="900" b="0">
                 <a:solidFill>
-                  <a:srgbClr val="546E7A"/>
-                </a:solidFill>
-                <a:latin typeface="Calibri"/>
-              </a:rPr>
-              <a:t>Dashboard Page 1: KPIs (AUM, SIP, Folios) + AUM trend  ·  Page 2: Scatter risk-return + Fund Scorecard</a:t>
+                  <a:srgbClr val="2E7D32"/>
+                </a:solidFill>
+                <a:latin typeface="Calibri"/>
+              </a:rPr>
+              <a:t>Page 1: KPIs (AUM, SIP, Folios) + AUM trend by AMC</a:t>
+            </a:r>
+          </a:p>
+        </p:txBody>
+      </p:sp>
+      <p:sp>
+        <p:nvSpPr>
+          <p:cNvPr id="11" name="TextBox 10"/>
+          <p:cNvSpPr txBox="1"/>
+          <p:nvPr/>
+        </p:nvSpPr>
+        <p:spPr>
+          <a:xfrm>
+            <a:off x="4681728" y="3840480"/>
+            <a:ext cx="4297680" cy="438912"/>
+          </a:xfrm>
+          <a:prstGeom prst="rect">
+            <a:avLst/>
+          </a:prstGeom>
+          <a:noFill/>
+        </p:spPr>
+        <p:txBody>
+          <a:bodyPr wrap="square">
+            <a:spAutoFit/>
+          </a:bodyPr>
+          <a:lstStyle/>
+          <a:p>
+            <a:pPr algn="ctr"/>
+            <a:r>
+              <a:rPr sz="900" b="0">
+                <a:solidFill>
+                  <a:srgbClr val="E65100"/>
+                </a:solidFill>
+                <a:latin typeface="Calibri"/>
+              </a:rPr>
+              <a:t>Page 2: Risk-return scatter + Fund Scorecard table + drill-through</a:t>
             </a:r>
           </a:p>
         </p:txBody>
